--- a/task 6.1/presentation.pptx
+++ b/task 6.1/presentation.pptx
@@ -5,23 +5,24 @@
     <p:sldMasterId id="2147483648" r:id="rId1"/>
   </p:sldMasterIdLst>
   <p:notesMasterIdLst>
-    <p:notesMasterId r:id="rId16"/>
+    <p:notesMasterId r:id="rId17"/>
   </p:notesMasterIdLst>
   <p:sldIdLst>
     <p:sldId id="256" r:id="rId2"/>
     <p:sldId id="257" r:id="rId3"/>
     <p:sldId id="258" r:id="rId4"/>
-    <p:sldId id="259" r:id="rId5"/>
-    <p:sldId id="260" r:id="rId6"/>
-    <p:sldId id="261" r:id="rId7"/>
+    <p:sldId id="270" r:id="rId5"/>
+    <p:sldId id="259" r:id="rId6"/>
+    <p:sldId id="263" r:id="rId7"/>
     <p:sldId id="262" r:id="rId8"/>
-    <p:sldId id="263" r:id="rId9"/>
-    <p:sldId id="264" r:id="rId10"/>
-    <p:sldId id="265" r:id="rId11"/>
-    <p:sldId id="266" r:id="rId12"/>
-    <p:sldId id="267" r:id="rId13"/>
-    <p:sldId id="268" r:id="rId14"/>
-    <p:sldId id="269" r:id="rId15"/>
+    <p:sldId id="261" r:id="rId9"/>
+    <p:sldId id="260" r:id="rId10"/>
+    <p:sldId id="264" r:id="rId11"/>
+    <p:sldId id="265" r:id="rId12"/>
+    <p:sldId id="266" r:id="rId13"/>
+    <p:sldId id="267" r:id="rId14"/>
+    <p:sldId id="268" r:id="rId15"/>
+    <p:sldId id="269" r:id="rId16"/>
   </p:sldIdLst>
   <p:sldSz cx="9144000" cy="5143500" type="screen16x9"/>
   <p:notesSz cx="5143500" cy="9144000"/>
@@ -754,6 +755,90 @@
 </p:notes>
 </file>
 
+<file path=ppt/notesSlides/notesSlide15.xml><?xml version="1.0" encoding="utf-8"?>
+<p:notes xmlns:a="http://schemas.openxmlformats.org/drawingml/2006/main" xmlns:r="http://schemas.openxmlformats.org/officeDocument/2006/relationships" xmlns:p="http://schemas.openxmlformats.org/presentationml/2006/main">
+  <p:cSld>
+    <p:spTree>
+      <p:nvGrpSpPr>
+        <p:cNvPr id="1" name=""/>
+        <p:cNvGrpSpPr/>
+        <p:nvPr/>
+      </p:nvGrpSpPr>
+      <p:grpSpPr>
+        <a:xfrm>
+          <a:off x="0" y="0"/>
+          <a:ext cx="0" cy="0"/>
+          <a:chOff x="0" y="0"/>
+          <a:chExt cx="0" cy="0"/>
+        </a:xfrm>
+      </p:grpSpPr>
+      <p:sp>
+        <p:nvSpPr>
+          <p:cNvPr id="2" name="Slide Image Placeholder 1"/>
+          <p:cNvSpPr>
+            <a:spLocks noGrp="1" noRot="1" noChangeAspect="1"/>
+          </p:cNvSpPr>
+          <p:nvPr>
+            <p:ph type="sldImg"/>
+          </p:nvPr>
+        </p:nvSpPr>
+        <p:spPr/>
+      </p:sp>
+      <p:sp>
+        <p:nvSpPr>
+          <p:cNvPr id="3" name="Notes Placeholder 2"/>
+          <p:cNvSpPr>
+            <a:spLocks noGrp="1"/>
+          </p:cNvSpPr>
+          <p:nvPr>
+            <p:ph type="body" idx="1"/>
+          </p:nvPr>
+        </p:nvSpPr>
+        <p:spPr/>
+        <p:txBody>
+          <a:bodyPr/>
+          <a:lstStyle/>
+          <a:p>
+            <a:endParaRPr lang="en-US" dirty="0"/>
+          </a:p>
+        </p:txBody>
+      </p:sp>
+      <p:sp>
+        <p:nvSpPr>
+          <p:cNvPr id="4" name="Slide Number Placeholder 3"/>
+          <p:cNvSpPr>
+            <a:spLocks noGrp="1"/>
+          </p:cNvSpPr>
+          <p:nvPr>
+            <p:ph type="sldNum" sz="quarter" idx="10"/>
+          </p:nvPr>
+        </p:nvSpPr>
+        <p:spPr/>
+        <p:txBody>
+          <a:bodyPr/>
+          <a:lstStyle/>
+          <a:p>
+            <a:fld id="{F7021451-1387-4CA6-816F-3879F97B5CBC}" type="slidenum">
+              <a:rPr lang="en-US"/>
+              <a:t>15</a:t>
+            </a:fld>
+            <a:endParaRPr lang="en-US"/>
+          </a:p>
+        </p:txBody>
+      </p:sp>
+    </p:spTree>
+    <p:extLst>
+      <p:ext uri="{BB962C8B-B14F-4D97-AF65-F5344CB8AC3E}">
+        <p14:creationId xmlns:p14="http://schemas.microsoft.com/office/powerpoint/2010/main" val="1024086991"/>
+      </p:ext>
+    </p:extLst>
+  </p:cSld>
+  <p:clrMapOvr>
+    <a:masterClrMapping/>
+  </p:clrMapOvr>
+</p:notes>
+</file>
+
 <file path=ppt/notesSlides/notesSlide2.xml><?xml version="1.0" encoding="utf-8"?>
 <p:notes xmlns:a="http://schemas.openxmlformats.org/drawingml/2006/main" xmlns:r="http://schemas.openxmlformats.org/officeDocument/2006/relationships" xmlns:p="http://schemas.openxmlformats.org/presentationml/2006/main">
   <p:cSld>
@@ -927,7 +1012,13 @@
   <p:cSld>
     <p:spTree>
       <p:nvGrpSpPr>
-        <p:cNvPr id="1" name=""/>
+        <p:cNvPr id="1" name="">
+          <a:extLst>
+            <a:ext uri="{FF2B5EF4-FFF2-40B4-BE49-F238E27FC236}">
+              <a16:creationId xmlns:a16="http://schemas.microsoft.com/office/drawing/2014/main" id="{67E66C56-BDF7-3A26-B14B-66C8B9768C09}"/>
+            </a:ext>
+          </a:extLst>
+        </p:cNvPr>
         <p:cNvGrpSpPr/>
         <p:nvPr/>
       </p:nvGrpSpPr>
@@ -941,7 +1032,13 @@
       </p:grpSpPr>
       <p:sp>
         <p:nvSpPr>
-          <p:cNvPr id="2" name="Slide Image Placeholder 1"/>
+          <p:cNvPr id="2" name="Slide Image Placeholder 1">
+            <a:extLst>
+              <a:ext uri="{FF2B5EF4-FFF2-40B4-BE49-F238E27FC236}">
+                <a16:creationId xmlns:a16="http://schemas.microsoft.com/office/drawing/2014/main" id="{EDD89DF9-F328-839E-942D-1EB41EB90508}"/>
+              </a:ext>
+            </a:extLst>
+          </p:cNvPr>
           <p:cNvSpPr>
             <a:spLocks noGrp="1" noRot="1" noChangeAspect="1"/>
           </p:cNvSpPr>
@@ -953,7 +1050,13 @@
       </p:sp>
       <p:sp>
         <p:nvSpPr>
-          <p:cNvPr id="3" name="Notes Placeholder 2"/>
+          <p:cNvPr id="3" name="Notes Placeholder 2">
+            <a:extLst>
+              <a:ext uri="{FF2B5EF4-FFF2-40B4-BE49-F238E27FC236}">
+                <a16:creationId xmlns:a16="http://schemas.microsoft.com/office/drawing/2014/main" id="{055CF03E-EFB4-4FE0-F0C5-49B1368B3B26}"/>
+              </a:ext>
+            </a:extLst>
+          </p:cNvPr>
           <p:cNvSpPr>
             <a:spLocks noGrp="1"/>
           </p:cNvSpPr>
@@ -972,7 +1075,13 @@
       </p:sp>
       <p:sp>
         <p:nvSpPr>
-          <p:cNvPr id="4" name="Slide Number Placeholder 3"/>
+          <p:cNvPr id="4" name="Slide Number Placeholder 3">
+            <a:extLst>
+              <a:ext uri="{FF2B5EF4-FFF2-40B4-BE49-F238E27FC236}">
+                <a16:creationId xmlns:a16="http://schemas.microsoft.com/office/drawing/2014/main" id="{28215BA5-1118-7CF4-9F19-28BCFDC53421}"/>
+              </a:ext>
+            </a:extLst>
+          </p:cNvPr>
           <p:cNvSpPr>
             <a:spLocks noGrp="1"/>
           </p:cNvSpPr>
@@ -996,7 +1105,7 @@
     </p:spTree>
     <p:extLst>
       <p:ext uri="{BB962C8B-B14F-4D97-AF65-F5344CB8AC3E}">
-        <p14:creationId xmlns:p14="http://schemas.microsoft.com/office/powerpoint/2010/main" val="1024086991"/>
+        <p14:creationId xmlns:p14="http://schemas.microsoft.com/office/powerpoint/2010/main" val="1884164276"/>
       </p:ext>
     </p:extLst>
   </p:cSld>
@@ -1845,6 +1954,1053 @@
 
 <file path=ppt/slides/slide10.xml><?xml version="1.0" encoding="utf-8"?>
 <p:sld xmlns:a="http://schemas.openxmlformats.org/drawingml/2006/main" xmlns:r="http://schemas.openxmlformats.org/officeDocument/2006/relationships" xmlns:p="http://schemas.openxmlformats.org/presentationml/2006/main">
+  <p:cSld name="Slide 9">
+    <p:bg>
+      <p:bgPr>
+        <a:solidFill>
+          <a:srgbClr val="FFFFFF"/>
+        </a:solidFill>
+        <a:effectLst/>
+      </p:bgPr>
+    </p:bg>
+    <p:spTree>
+      <p:nvGrpSpPr>
+        <p:cNvPr id="1" name=""/>
+        <p:cNvGrpSpPr/>
+        <p:nvPr/>
+      </p:nvGrpSpPr>
+      <p:grpSpPr>
+        <a:xfrm>
+          <a:off x="0" y="0"/>
+          <a:ext cx="0" cy="0"/>
+          <a:chOff x="0" y="0"/>
+          <a:chExt cx="0" cy="0"/>
+        </a:xfrm>
+      </p:grpSpPr>
+      <p:sp>
+        <p:nvSpPr>
+          <p:cNvPr id="6" name="Shape 4"/>
+          <p:cNvSpPr/>
+          <p:nvPr/>
+        </p:nvSpPr>
+        <p:spPr>
+          <a:xfrm>
+            <a:off x="2770450" y="1342147"/>
+            <a:ext cx="610710" cy="0"/>
+          </a:xfrm>
+          <a:prstGeom prst="line">
+            <a:avLst/>
+          </a:prstGeom>
+          <a:noFill/>
+          <a:ln w="25400">
+            <a:solidFill>
+              <a:srgbClr val="1976D2"/>
+            </a:solidFill>
+            <a:prstDash val="solid"/>
+            <a:tailEnd type="triangle"/>
+          </a:ln>
+        </p:spPr>
+        <p:txBody>
+          <a:bodyPr/>
+          <a:lstStyle/>
+          <a:p>
+            <a:endParaRPr lang="en-AU"/>
+          </a:p>
+        </p:txBody>
+      </p:sp>
+      <p:sp>
+        <p:nvSpPr>
+          <p:cNvPr id="2" name="Shape 0"/>
+          <p:cNvSpPr/>
+          <p:nvPr/>
+        </p:nvSpPr>
+        <p:spPr>
+          <a:xfrm>
+            <a:off x="0" y="0"/>
+            <a:ext cx="9144000" cy="731520"/>
+          </a:xfrm>
+          <a:prstGeom prst="rect">
+            <a:avLst/>
+          </a:prstGeom>
+          <a:solidFill>
+            <a:srgbClr val="1976D2"/>
+          </a:solidFill>
+          <a:ln w="12700">
+            <a:solidFill>
+              <a:srgbClr val="1976D2"/>
+            </a:solidFill>
+            <a:prstDash val="solid"/>
+          </a:ln>
+        </p:spPr>
+        <p:txBody>
+          <a:bodyPr/>
+          <a:lstStyle/>
+          <a:p>
+            <a:endParaRPr lang="en-AU"/>
+          </a:p>
+        </p:txBody>
+      </p:sp>
+      <p:sp>
+        <p:nvSpPr>
+          <p:cNvPr id="3" name="Text 1"/>
+          <p:cNvSpPr/>
+          <p:nvPr/>
+        </p:nvSpPr>
+        <p:spPr>
+          <a:xfrm>
+            <a:off x="274320" y="45720"/>
+            <a:ext cx="8595360" cy="640080"/>
+          </a:xfrm>
+          <a:prstGeom prst="rect">
+            <a:avLst/>
+          </a:prstGeom>
+          <a:noFill/>
+          <a:ln/>
+        </p:spPr>
+        <p:txBody>
+          <a:bodyPr wrap="square" rtlCol="0" anchor="ctr"/>
+          <a:lstStyle/>
+          <a:p>
+            <a:pPr marL="0" indent="0" algn="l">
+              <a:buNone/>
+            </a:pPr>
+            <a:r>
+              <a:rPr lang="en-US" sz="4000" b="1" dirty="0">
+                <a:solidFill>
+                  <a:srgbClr val="FFFFFF"/>
+                </a:solidFill>
+              </a:rPr>
+              <a:t>Data Flow Diagram</a:t>
+            </a:r>
+            <a:endParaRPr lang="en-US" sz="4000" dirty="0"/>
+          </a:p>
+        </p:txBody>
+      </p:sp>
+      <p:sp>
+        <p:nvSpPr>
+          <p:cNvPr id="4" name="Shape 2"/>
+          <p:cNvSpPr/>
+          <p:nvPr/>
+        </p:nvSpPr>
+        <p:spPr>
+          <a:xfrm>
+            <a:off x="965570" y="1093413"/>
+            <a:ext cx="1828800" cy="548640"/>
+          </a:xfrm>
+          <a:prstGeom prst="rect">
+            <a:avLst/>
+          </a:prstGeom>
+          <a:solidFill>
+            <a:srgbClr val="E3F2FD"/>
+          </a:solidFill>
+          <a:ln w="25400">
+            <a:solidFill>
+              <a:srgbClr val="1976D2"/>
+            </a:solidFill>
+            <a:prstDash val="solid"/>
+          </a:ln>
+        </p:spPr>
+        <p:txBody>
+          <a:bodyPr/>
+          <a:lstStyle/>
+          <a:p>
+            <a:endParaRPr lang="en-AU"/>
+          </a:p>
+        </p:txBody>
+      </p:sp>
+      <p:sp>
+        <p:nvSpPr>
+          <p:cNvPr id="5" name="Text 3"/>
+          <p:cNvSpPr/>
+          <p:nvPr/>
+        </p:nvSpPr>
+        <p:spPr>
+          <a:xfrm>
+            <a:off x="1078810" y="1147763"/>
+            <a:ext cx="1645920" cy="365760"/>
+          </a:xfrm>
+          <a:prstGeom prst="rect">
+            <a:avLst/>
+          </a:prstGeom>
+          <a:noFill/>
+          <a:ln/>
+        </p:spPr>
+        <p:txBody>
+          <a:bodyPr wrap="square" rtlCol="0" anchor="ctr"/>
+          <a:lstStyle/>
+          <a:p>
+            <a:pPr marL="0" indent="0" algn="ctr">
+              <a:buNone/>
+            </a:pPr>
+            <a:r>
+              <a:rPr lang="en-US" sz="1400" b="1" dirty="0">
+                <a:solidFill>
+                  <a:srgbClr val="212121"/>
+                </a:solidFill>
+              </a:rPr>
+              <a:t>ROBOT</a:t>
+            </a:r>
+            <a:endParaRPr lang="en-US" sz="1400" dirty="0"/>
+          </a:p>
+          <a:p>
+            <a:pPr marL="0" indent="0" algn="ctr">
+              <a:buNone/>
+            </a:pPr>
+            <a:r>
+              <a:rPr lang="en-US" sz="1400" b="1" dirty="0">
+                <a:solidFill>
+                  <a:srgbClr val="212121"/>
+                </a:solidFill>
+              </a:rPr>
+              <a:t>Collects Data</a:t>
+            </a:r>
+            <a:endParaRPr lang="en-US" sz="1400" dirty="0"/>
+          </a:p>
+        </p:txBody>
+      </p:sp>
+      <p:sp>
+        <p:nvSpPr>
+          <p:cNvPr id="7" name="Shape 5"/>
+          <p:cNvSpPr/>
+          <p:nvPr/>
+        </p:nvSpPr>
+        <p:spPr>
+          <a:xfrm>
+            <a:off x="3381160" y="1087358"/>
+            <a:ext cx="1828800" cy="548640"/>
+          </a:xfrm>
+          <a:prstGeom prst="rect">
+            <a:avLst/>
+          </a:prstGeom>
+          <a:solidFill>
+            <a:srgbClr val="FFE0B2"/>
+          </a:solidFill>
+          <a:ln w="25400">
+            <a:solidFill>
+              <a:srgbClr val="1976D2"/>
+            </a:solidFill>
+            <a:prstDash val="solid"/>
+          </a:ln>
+        </p:spPr>
+        <p:txBody>
+          <a:bodyPr/>
+          <a:lstStyle/>
+          <a:p>
+            <a:endParaRPr lang="en-AU"/>
+          </a:p>
+        </p:txBody>
+      </p:sp>
+      <p:sp>
+        <p:nvSpPr>
+          <p:cNvPr id="8" name="Text 6"/>
+          <p:cNvSpPr/>
+          <p:nvPr/>
+        </p:nvSpPr>
+        <p:spPr>
+          <a:xfrm>
+            <a:off x="3424761" y="1150185"/>
+            <a:ext cx="1645920" cy="365760"/>
+          </a:xfrm>
+          <a:prstGeom prst="rect">
+            <a:avLst/>
+          </a:prstGeom>
+          <a:noFill/>
+          <a:ln/>
+        </p:spPr>
+        <p:txBody>
+          <a:bodyPr wrap="square" rtlCol="0" anchor="ctr"/>
+          <a:lstStyle/>
+          <a:p>
+            <a:pPr marL="0" indent="0" algn="ctr">
+              <a:buNone/>
+            </a:pPr>
+            <a:r>
+              <a:rPr lang="en-US" sz="1400" b="1" dirty="0">
+                <a:solidFill>
+                  <a:srgbClr val="212121"/>
+                </a:solidFill>
+              </a:rPr>
+              <a:t>LOCAL</a:t>
+            </a:r>
+            <a:endParaRPr lang="en-US" sz="1400" dirty="0"/>
+          </a:p>
+          <a:p>
+            <a:pPr marL="0" indent="0" algn="ctr">
+              <a:buNone/>
+            </a:pPr>
+            <a:r>
+              <a:rPr lang="en-US" sz="1400" b="1" dirty="0">
+                <a:solidFill>
+                  <a:srgbClr val="212121"/>
+                </a:solidFill>
+              </a:rPr>
+              <a:t>SD Storage</a:t>
+            </a:r>
+            <a:endParaRPr lang="en-US" sz="1400" dirty="0"/>
+          </a:p>
+        </p:txBody>
+      </p:sp>
+      <p:sp>
+        <p:nvSpPr>
+          <p:cNvPr id="9" name="Shape 7"/>
+          <p:cNvSpPr/>
+          <p:nvPr/>
+        </p:nvSpPr>
+        <p:spPr>
+          <a:xfrm>
+            <a:off x="5209960" y="1361678"/>
+            <a:ext cx="564990" cy="0"/>
+          </a:xfrm>
+          <a:prstGeom prst="line">
+            <a:avLst/>
+          </a:prstGeom>
+          <a:noFill/>
+          <a:ln w="25400">
+            <a:solidFill>
+              <a:srgbClr val="1976D2"/>
+            </a:solidFill>
+            <a:prstDash val="solid"/>
+            <a:tailEnd type="triangle"/>
+          </a:ln>
+        </p:spPr>
+        <p:txBody>
+          <a:bodyPr/>
+          <a:lstStyle/>
+          <a:p>
+            <a:endParaRPr lang="en-AU"/>
+          </a:p>
+        </p:txBody>
+      </p:sp>
+      <p:sp>
+        <p:nvSpPr>
+          <p:cNvPr id="10" name="Shape 8"/>
+          <p:cNvSpPr/>
+          <p:nvPr/>
+        </p:nvSpPr>
+        <p:spPr>
+          <a:xfrm>
+            <a:off x="5774950" y="1077592"/>
+            <a:ext cx="1828800" cy="548640"/>
+          </a:xfrm>
+          <a:prstGeom prst="rect">
+            <a:avLst/>
+          </a:prstGeom>
+          <a:solidFill>
+            <a:srgbClr val="C8E6C9"/>
+          </a:solidFill>
+          <a:ln w="25400">
+            <a:solidFill>
+              <a:srgbClr val="1976D2"/>
+            </a:solidFill>
+            <a:prstDash val="solid"/>
+          </a:ln>
+        </p:spPr>
+        <p:txBody>
+          <a:bodyPr/>
+          <a:lstStyle/>
+          <a:p>
+            <a:endParaRPr lang="en-AU"/>
+          </a:p>
+        </p:txBody>
+      </p:sp>
+      <p:sp>
+        <p:nvSpPr>
+          <p:cNvPr id="11" name="Text 9"/>
+          <p:cNvSpPr/>
+          <p:nvPr/>
+        </p:nvSpPr>
+        <p:spPr>
+          <a:xfrm>
+            <a:off x="5866390" y="1159267"/>
+            <a:ext cx="1645920" cy="365760"/>
+          </a:xfrm>
+          <a:prstGeom prst="rect">
+            <a:avLst/>
+          </a:prstGeom>
+          <a:noFill/>
+          <a:ln/>
+        </p:spPr>
+        <p:txBody>
+          <a:bodyPr wrap="square" rtlCol="0" anchor="ctr"/>
+          <a:lstStyle/>
+          <a:p>
+            <a:pPr marL="0" indent="0" algn="ctr">
+              <a:buNone/>
+            </a:pPr>
+            <a:r>
+              <a:rPr lang="en-US" sz="1400" b="1" dirty="0">
+                <a:solidFill>
+                  <a:srgbClr val="212121"/>
+                </a:solidFill>
+              </a:rPr>
+              <a:t>CLOUD</a:t>
+            </a:r>
+            <a:endParaRPr lang="en-US" sz="1400" dirty="0"/>
+          </a:p>
+          <a:p>
+            <a:pPr marL="0" indent="0" algn="ctr">
+              <a:buNone/>
+            </a:pPr>
+            <a:r>
+              <a:rPr lang="en-US" sz="1400" b="1" dirty="0">
+                <a:solidFill>
+                  <a:srgbClr val="212121"/>
+                </a:solidFill>
+              </a:rPr>
+              <a:t>Upload</a:t>
+            </a:r>
+            <a:endParaRPr lang="en-US" sz="1400" dirty="0"/>
+          </a:p>
+        </p:txBody>
+      </p:sp>
+      <p:sp>
+        <p:nvSpPr>
+          <p:cNvPr id="12" name="Shape 10"/>
+          <p:cNvSpPr/>
+          <p:nvPr/>
+        </p:nvSpPr>
+        <p:spPr>
+          <a:xfrm>
+            <a:off x="6746274" y="1642052"/>
+            <a:ext cx="0" cy="331323"/>
+          </a:xfrm>
+          <a:prstGeom prst="line">
+            <a:avLst/>
+          </a:prstGeom>
+          <a:noFill/>
+          <a:ln w="25400">
+            <a:solidFill>
+              <a:srgbClr val="1976D2"/>
+            </a:solidFill>
+            <a:prstDash val="solid"/>
+            <a:tailEnd type="triangle"/>
+          </a:ln>
+        </p:spPr>
+        <p:txBody>
+          <a:bodyPr/>
+          <a:lstStyle/>
+          <a:p>
+            <a:endParaRPr lang="en-AU"/>
+          </a:p>
+        </p:txBody>
+      </p:sp>
+      <p:sp>
+        <p:nvSpPr>
+          <p:cNvPr id="13" name="Shape 11"/>
+          <p:cNvSpPr/>
+          <p:nvPr/>
+        </p:nvSpPr>
+        <p:spPr>
+          <a:xfrm>
+            <a:off x="5774950" y="1973376"/>
+            <a:ext cx="1828800" cy="548640"/>
+          </a:xfrm>
+          <a:prstGeom prst="rect">
+            <a:avLst/>
+          </a:prstGeom>
+          <a:solidFill>
+            <a:srgbClr val="C8E6C9"/>
+          </a:solidFill>
+          <a:ln w="25400">
+            <a:solidFill>
+              <a:srgbClr val="1976D2"/>
+            </a:solidFill>
+            <a:prstDash val="solid"/>
+          </a:ln>
+        </p:spPr>
+        <p:txBody>
+          <a:bodyPr/>
+          <a:lstStyle/>
+          <a:p>
+            <a:endParaRPr lang="en-AU"/>
+          </a:p>
+        </p:txBody>
+      </p:sp>
+      <p:sp>
+        <p:nvSpPr>
+          <p:cNvPr id="14" name="Text 12"/>
+          <p:cNvSpPr/>
+          <p:nvPr/>
+        </p:nvSpPr>
+        <p:spPr>
+          <a:xfrm>
+            <a:off x="5923314" y="2064816"/>
+            <a:ext cx="1645920" cy="365760"/>
+          </a:xfrm>
+          <a:prstGeom prst="rect">
+            <a:avLst/>
+          </a:prstGeom>
+          <a:noFill/>
+          <a:ln/>
+        </p:spPr>
+        <p:txBody>
+          <a:bodyPr wrap="square" rtlCol="0" anchor="ctr"/>
+          <a:lstStyle/>
+          <a:p>
+            <a:pPr marL="0" indent="0" algn="ctr">
+              <a:buNone/>
+            </a:pPr>
+            <a:r>
+              <a:rPr lang="en-US" sz="1400" b="1" dirty="0">
+                <a:solidFill>
+                  <a:srgbClr val="212121"/>
+                </a:solidFill>
+              </a:rPr>
+              <a:t>ANALYSIS</a:t>
+            </a:r>
+            <a:endParaRPr lang="en-US" sz="1400" dirty="0"/>
+          </a:p>
+          <a:p>
+            <a:pPr marL="0" indent="0" algn="ctr">
+              <a:buNone/>
+            </a:pPr>
+            <a:r>
+              <a:rPr lang="en-US" sz="1400" b="1" dirty="0">
+                <a:solidFill>
+                  <a:srgbClr val="212121"/>
+                </a:solidFill>
+              </a:rPr>
+              <a:t>Engine</a:t>
+            </a:r>
+            <a:endParaRPr lang="en-US" sz="1400" dirty="0"/>
+          </a:p>
+        </p:txBody>
+      </p:sp>
+      <p:sp>
+        <p:nvSpPr>
+          <p:cNvPr id="15" name="Shape 13"/>
+          <p:cNvSpPr/>
+          <p:nvPr/>
+        </p:nvSpPr>
+        <p:spPr>
+          <a:xfrm flipH="1" flipV="1">
+            <a:off x="4611058" y="2256172"/>
+            <a:ext cx="1177516" cy="9689"/>
+          </a:xfrm>
+          <a:prstGeom prst="line">
+            <a:avLst/>
+          </a:prstGeom>
+          <a:noFill/>
+          <a:ln w="25400">
+            <a:solidFill>
+              <a:srgbClr val="1976D2"/>
+            </a:solidFill>
+            <a:prstDash val="solid"/>
+            <a:tailEnd type="triangle"/>
+          </a:ln>
+        </p:spPr>
+        <p:txBody>
+          <a:bodyPr/>
+          <a:lstStyle/>
+          <a:p>
+            <a:endParaRPr lang="en-AU"/>
+          </a:p>
+        </p:txBody>
+      </p:sp>
+      <p:sp>
+        <p:nvSpPr>
+          <p:cNvPr id="16" name="Shape 14"/>
+          <p:cNvSpPr/>
+          <p:nvPr/>
+        </p:nvSpPr>
+        <p:spPr>
+          <a:xfrm>
+            <a:off x="2770450" y="1981853"/>
+            <a:ext cx="1828800" cy="548640"/>
+          </a:xfrm>
+          <a:prstGeom prst="rect">
+            <a:avLst/>
+          </a:prstGeom>
+          <a:solidFill>
+            <a:srgbClr val="E3F2FD"/>
+          </a:solidFill>
+          <a:ln w="25400">
+            <a:solidFill>
+              <a:srgbClr val="1976D2"/>
+            </a:solidFill>
+            <a:prstDash val="solid"/>
+          </a:ln>
+        </p:spPr>
+        <p:txBody>
+          <a:bodyPr/>
+          <a:lstStyle/>
+          <a:p>
+            <a:endParaRPr lang="en-AU"/>
+          </a:p>
+        </p:txBody>
+      </p:sp>
+      <p:sp>
+        <p:nvSpPr>
+          <p:cNvPr id="17" name="Text 15"/>
+          <p:cNvSpPr/>
+          <p:nvPr/>
+        </p:nvSpPr>
+        <p:spPr>
+          <a:xfrm>
+            <a:off x="2861890" y="2073293"/>
+            <a:ext cx="1645920" cy="365760"/>
+          </a:xfrm>
+          <a:prstGeom prst="rect">
+            <a:avLst/>
+          </a:prstGeom>
+          <a:noFill/>
+          <a:ln/>
+        </p:spPr>
+        <p:txBody>
+          <a:bodyPr wrap="square" rtlCol="0" anchor="ctr"/>
+          <a:lstStyle/>
+          <a:p>
+            <a:pPr marL="0" indent="0" algn="ctr">
+              <a:buNone/>
+            </a:pPr>
+            <a:r>
+              <a:rPr lang="en-US" sz="1400" b="1" dirty="0">
+                <a:solidFill>
+                  <a:srgbClr val="212121"/>
+                </a:solidFill>
+              </a:rPr>
+              <a:t>COMPARE</a:t>
+            </a:r>
+            <a:endParaRPr lang="en-US" sz="1400" dirty="0"/>
+          </a:p>
+          <a:p>
+            <a:pPr marL="0" indent="0" algn="ctr">
+              <a:buNone/>
+            </a:pPr>
+            <a:r>
+              <a:rPr lang="en-US" sz="1400" b="1" dirty="0">
+                <a:solidFill>
+                  <a:srgbClr val="212121"/>
+                </a:solidFill>
+              </a:rPr>
+              <a:t>to Baseline</a:t>
+            </a:r>
+            <a:endParaRPr lang="en-US" sz="1400" dirty="0"/>
+          </a:p>
+        </p:txBody>
+      </p:sp>
+      <p:sp>
+        <p:nvSpPr>
+          <p:cNvPr id="18" name="Shape 16"/>
+          <p:cNvSpPr/>
+          <p:nvPr/>
+        </p:nvSpPr>
+        <p:spPr>
+          <a:xfrm>
+            <a:off x="3684850" y="2530493"/>
+            <a:ext cx="0" cy="457200"/>
+          </a:xfrm>
+          <a:prstGeom prst="line">
+            <a:avLst/>
+          </a:prstGeom>
+          <a:noFill/>
+          <a:ln w="25400">
+            <a:solidFill>
+              <a:srgbClr val="1976D2"/>
+            </a:solidFill>
+            <a:prstDash val="solid"/>
+            <a:tailEnd type="triangle"/>
+          </a:ln>
+        </p:spPr>
+        <p:txBody>
+          <a:bodyPr/>
+          <a:lstStyle/>
+          <a:p>
+            <a:endParaRPr lang="en-AU"/>
+          </a:p>
+        </p:txBody>
+      </p:sp>
+      <p:sp>
+        <p:nvSpPr>
+          <p:cNvPr id="19" name="Shape 17"/>
+          <p:cNvSpPr/>
+          <p:nvPr/>
+        </p:nvSpPr>
+        <p:spPr>
+          <a:xfrm>
+            <a:off x="2770449" y="2999199"/>
+            <a:ext cx="1828800" cy="548640"/>
+          </a:xfrm>
+          <a:prstGeom prst="rect">
+            <a:avLst/>
+          </a:prstGeom>
+          <a:solidFill>
+            <a:srgbClr val="FFE0B2"/>
+          </a:solidFill>
+          <a:ln w="25400">
+            <a:solidFill>
+              <a:srgbClr val="1976D2"/>
+            </a:solidFill>
+            <a:prstDash val="solid"/>
+          </a:ln>
+        </p:spPr>
+        <p:txBody>
+          <a:bodyPr/>
+          <a:lstStyle/>
+          <a:p>
+            <a:endParaRPr lang="en-AU"/>
+          </a:p>
+        </p:txBody>
+      </p:sp>
+      <p:sp>
+        <p:nvSpPr>
+          <p:cNvPr id="20" name="Text 18"/>
+          <p:cNvSpPr/>
+          <p:nvPr/>
+        </p:nvSpPr>
+        <p:spPr>
+          <a:xfrm>
+            <a:off x="2861889" y="3090639"/>
+            <a:ext cx="1645920" cy="365760"/>
+          </a:xfrm>
+          <a:prstGeom prst="rect">
+            <a:avLst/>
+          </a:prstGeom>
+          <a:noFill/>
+          <a:ln/>
+        </p:spPr>
+        <p:txBody>
+          <a:bodyPr wrap="square" rtlCol="0" anchor="ctr"/>
+          <a:lstStyle/>
+          <a:p>
+            <a:pPr marL="0" indent="0" algn="ctr">
+              <a:buNone/>
+            </a:pPr>
+            <a:r>
+              <a:rPr lang="en-US" sz="1400" b="1" dirty="0">
+                <a:solidFill>
+                  <a:srgbClr val="212121"/>
+                </a:solidFill>
+              </a:rPr>
+              <a:t>DECISION</a:t>
+            </a:r>
+            <a:endParaRPr lang="en-US" sz="1400" dirty="0"/>
+          </a:p>
+          <a:p>
+            <a:pPr marL="0" indent="0" algn="ctr">
+              <a:buNone/>
+            </a:pPr>
+            <a:r>
+              <a:rPr lang="en-US" sz="1400" b="1" dirty="0">
+                <a:solidFill>
+                  <a:srgbClr val="212121"/>
+                </a:solidFill>
+              </a:rPr>
+              <a:t>Logic</a:t>
+            </a:r>
+            <a:endParaRPr lang="en-US" sz="1400" dirty="0"/>
+          </a:p>
+        </p:txBody>
+      </p:sp>
+      <p:sp>
+        <p:nvSpPr>
+          <p:cNvPr id="21" name="Shape 19"/>
+          <p:cNvSpPr/>
+          <p:nvPr/>
+        </p:nvSpPr>
+        <p:spPr>
+          <a:xfrm>
+            <a:off x="3681822" y="3547839"/>
+            <a:ext cx="0" cy="365760"/>
+          </a:xfrm>
+          <a:prstGeom prst="line">
+            <a:avLst/>
+          </a:prstGeom>
+          <a:noFill/>
+          <a:ln w="25400">
+            <a:solidFill>
+              <a:srgbClr val="1976D2"/>
+            </a:solidFill>
+            <a:prstDash val="solid"/>
+            <a:tailEnd type="triangle"/>
+          </a:ln>
+        </p:spPr>
+        <p:txBody>
+          <a:bodyPr/>
+          <a:lstStyle/>
+          <a:p>
+            <a:endParaRPr lang="en-AU" dirty="0"/>
+          </a:p>
+        </p:txBody>
+      </p:sp>
+      <p:sp>
+        <p:nvSpPr>
+          <p:cNvPr id="22" name="Shape 20"/>
+          <p:cNvSpPr/>
+          <p:nvPr/>
+        </p:nvSpPr>
+        <p:spPr>
+          <a:xfrm>
+            <a:off x="2770450" y="3913599"/>
+            <a:ext cx="1828800" cy="931506"/>
+          </a:xfrm>
+          <a:prstGeom prst="rect">
+            <a:avLst/>
+          </a:prstGeom>
+          <a:solidFill>
+            <a:schemeClr val="accent2">
+              <a:lumMod val="60000"/>
+              <a:lumOff val="40000"/>
+            </a:schemeClr>
+          </a:solidFill>
+          <a:ln w="38100">
+            <a:solidFill>
+              <a:srgbClr val="FF0000"/>
+            </a:solidFill>
+            <a:prstDash val="solid"/>
+          </a:ln>
+        </p:spPr>
+        <p:txBody>
+          <a:bodyPr/>
+          <a:lstStyle/>
+          <a:p>
+            <a:endParaRPr lang="en-AU"/>
+          </a:p>
+        </p:txBody>
+      </p:sp>
+      <p:sp>
+        <p:nvSpPr>
+          <p:cNvPr id="23" name="Text 21"/>
+          <p:cNvSpPr/>
+          <p:nvPr/>
+        </p:nvSpPr>
+        <p:spPr>
+          <a:xfrm>
+            <a:off x="2816170" y="3849410"/>
+            <a:ext cx="1645920" cy="1005840"/>
+          </a:xfrm>
+          <a:prstGeom prst="rect">
+            <a:avLst/>
+          </a:prstGeom>
+          <a:noFill/>
+          <a:ln/>
+        </p:spPr>
+        <p:txBody>
+          <a:bodyPr wrap="square" rtlCol="0" anchor="ctr"/>
+          <a:lstStyle/>
+          <a:p>
+            <a:pPr marL="0" indent="0" algn="ctr">
+              <a:buNone/>
+            </a:pPr>
+            <a:r>
+              <a:rPr lang="en-US" sz="1200" b="1" dirty="0">
+                <a:solidFill>
+                  <a:srgbClr val="1976D2"/>
+                </a:solidFill>
+              </a:rPr>
+              <a:t>🚨</a:t>
+            </a:r>
+            <a:r>
+              <a:rPr lang="en-US" sz="1200" b="1" dirty="0"/>
+              <a:t> ALERT</a:t>
+            </a:r>
+            <a:endParaRPr lang="en-US" sz="1200" dirty="0"/>
+          </a:p>
+          <a:p>
+            <a:pPr marL="171450" indent="-171450" algn="ctr">
+              <a:buFont typeface="Wingdings" panose="05000000000000000000" pitchFamily="2" charset="2"/>
+              <a:buChar char="ü"/>
+            </a:pPr>
+            <a:r>
+              <a:rPr lang="en-US" sz="1200" b="1" dirty="0"/>
+              <a:t> Timestamp</a:t>
+            </a:r>
+            <a:endParaRPr lang="en-US" sz="1200" dirty="0"/>
+          </a:p>
+          <a:p>
+            <a:pPr marL="171450" indent="-171450" algn="ctr">
+              <a:buFont typeface="Wingdings" panose="05000000000000000000" pitchFamily="2" charset="2"/>
+              <a:buChar char="ü"/>
+            </a:pPr>
+            <a:r>
+              <a:rPr lang="en-US" sz="1200" b="1" dirty="0"/>
+              <a:t> Location</a:t>
+            </a:r>
+            <a:endParaRPr lang="en-US" sz="1200" dirty="0"/>
+          </a:p>
+          <a:p>
+            <a:pPr marL="171450" indent="-171450" algn="ctr">
+              <a:buFont typeface="Wingdings" panose="05000000000000000000" pitchFamily="2" charset="2"/>
+              <a:buChar char="ü"/>
+            </a:pPr>
+            <a:r>
+              <a:rPr lang="en-US" sz="1200" b="1" dirty="0"/>
+              <a:t> Severity</a:t>
+            </a:r>
+            <a:endParaRPr lang="en-US" sz="1200" dirty="0"/>
+          </a:p>
+        </p:txBody>
+      </p:sp>
+      <p:sp>
+        <p:nvSpPr>
+          <p:cNvPr id="24" name="Shape 22"/>
+          <p:cNvSpPr/>
+          <p:nvPr/>
+        </p:nvSpPr>
+        <p:spPr>
+          <a:xfrm>
+            <a:off x="4612876" y="4403191"/>
+            <a:ext cx="1175699" cy="0"/>
+          </a:xfrm>
+          <a:prstGeom prst="line">
+            <a:avLst/>
+          </a:prstGeom>
+          <a:noFill/>
+          <a:ln w="25400">
+            <a:solidFill>
+              <a:srgbClr val="1976D2"/>
+            </a:solidFill>
+            <a:prstDash val="solid"/>
+            <a:tailEnd type="triangle"/>
+          </a:ln>
+        </p:spPr>
+        <p:txBody>
+          <a:bodyPr/>
+          <a:lstStyle/>
+          <a:p>
+            <a:endParaRPr lang="en-AU"/>
+          </a:p>
+        </p:txBody>
+      </p:sp>
+      <p:sp>
+        <p:nvSpPr>
+          <p:cNvPr id="25" name="Shape 23"/>
+          <p:cNvSpPr/>
+          <p:nvPr/>
+        </p:nvSpPr>
+        <p:spPr>
+          <a:xfrm>
+            <a:off x="5774950" y="4102078"/>
+            <a:ext cx="2468880" cy="548640"/>
+          </a:xfrm>
+          <a:prstGeom prst="rect">
+            <a:avLst/>
+          </a:prstGeom>
+          <a:solidFill>
+            <a:srgbClr val="E3F2FD"/>
+          </a:solidFill>
+          <a:ln w="25400">
+            <a:solidFill>
+              <a:srgbClr val="1976D2"/>
+            </a:solidFill>
+            <a:prstDash val="solid"/>
+          </a:ln>
+        </p:spPr>
+        <p:txBody>
+          <a:bodyPr/>
+          <a:lstStyle/>
+          <a:p>
+            <a:endParaRPr lang="en-AU"/>
+          </a:p>
+        </p:txBody>
+      </p:sp>
+      <p:sp>
+        <p:nvSpPr>
+          <p:cNvPr id="26" name="Text 24"/>
+          <p:cNvSpPr/>
+          <p:nvPr/>
+        </p:nvSpPr>
+        <p:spPr>
+          <a:xfrm>
+            <a:off x="5866390" y="4174890"/>
+            <a:ext cx="2286000" cy="365760"/>
+          </a:xfrm>
+          <a:prstGeom prst="rect">
+            <a:avLst/>
+          </a:prstGeom>
+          <a:noFill/>
+          <a:ln/>
+        </p:spPr>
+        <p:txBody>
+          <a:bodyPr wrap="square" rtlCol="0" anchor="ctr"/>
+          <a:lstStyle/>
+          <a:p>
+            <a:pPr marL="0" indent="0" algn="ctr">
+              <a:buNone/>
+            </a:pPr>
+            <a:r>
+              <a:rPr lang="en-US" sz="1400" b="1" dirty="0">
+                <a:solidFill>
+                  <a:srgbClr val="212121"/>
+                </a:solidFill>
+              </a:rPr>
+              <a:t>Property manager</a:t>
+            </a:r>
+            <a:endParaRPr lang="en-US" sz="1400" dirty="0"/>
+          </a:p>
+          <a:p>
+            <a:pPr marL="0" indent="0" algn="ctr">
+              <a:buNone/>
+            </a:pPr>
+            <a:r>
+              <a:rPr lang="en-US" sz="1400" b="1" dirty="0">
+                <a:solidFill>
+                  <a:srgbClr val="212121"/>
+                </a:solidFill>
+              </a:rPr>
+              <a:t>Receives Report</a:t>
+            </a:r>
+            <a:endParaRPr lang="en-US" sz="1400" dirty="0"/>
+          </a:p>
+        </p:txBody>
+      </p:sp>
+      <p:cxnSp>
+        <p:nvCxnSpPr>
+          <p:cNvPr id="28" name="Connector: Elbow 27">
+            <a:extLst>
+              <a:ext uri="{FF2B5EF4-FFF2-40B4-BE49-F238E27FC236}">
+                <a16:creationId xmlns:a16="http://schemas.microsoft.com/office/drawing/2014/main" id="{B4A9E6FA-B111-323A-7B67-63FFCEBF04FE}"/>
+              </a:ext>
+            </a:extLst>
+          </p:cNvPr>
+          <p:cNvCxnSpPr>
+            <a:cxnSpLocks/>
+            <a:stCxn id="10" idx="3"/>
+            <a:endCxn id="4" idx="1"/>
+          </p:cNvCxnSpPr>
+          <p:nvPr/>
+        </p:nvCxnSpPr>
+        <p:spPr>
+          <a:xfrm flipH="1">
+            <a:off x="965570" y="1351912"/>
+            <a:ext cx="6638180" cy="15821"/>
+          </a:xfrm>
+          <a:prstGeom prst="bentConnector5">
+            <a:avLst>
+              <a:gd name="adj1" fmla="val -3444"/>
+              <a:gd name="adj2" fmla="val -2615675"/>
+              <a:gd name="adj3" fmla="val 103444"/>
+            </a:avLst>
+          </a:prstGeom>
+          <a:ln>
+            <a:tailEnd type="triangle"/>
+          </a:ln>
+        </p:spPr>
+        <p:style>
+          <a:lnRef idx="3">
+            <a:schemeClr val="accent1"/>
+          </a:lnRef>
+          <a:fillRef idx="0">
+            <a:schemeClr val="accent1"/>
+          </a:fillRef>
+          <a:effectRef idx="2">
+            <a:schemeClr val="accent1"/>
+          </a:effectRef>
+          <a:fontRef idx="minor">
+            <a:schemeClr val="tx1"/>
+          </a:fontRef>
+        </p:style>
+      </p:cxnSp>
+    </p:spTree>
+  </p:cSld>
+  <p:clrMapOvr>
+    <a:masterClrMapping/>
+  </p:clrMapOvr>
+</p:sld>
+</file>
+
+<file path=ppt/slides/slide11.xml><?xml version="1.0" encoding="utf-8"?>
+<p:sld xmlns:a="http://schemas.openxmlformats.org/drawingml/2006/main" xmlns:r="http://schemas.openxmlformats.org/officeDocument/2006/relationships" xmlns:p="http://schemas.openxmlformats.org/presentationml/2006/main">
   <p:cSld name="Slide 10">
     <p:bg>
       <p:bgPr>
@@ -2508,7 +3664,7 @@
 </p:sld>
 </file>
 
-<file path=ppt/slides/slide11.xml><?xml version="1.0" encoding="utf-8"?>
+<file path=ppt/slides/slide12.xml><?xml version="1.0" encoding="utf-8"?>
 <p:sld xmlns:a="http://schemas.openxmlformats.org/drawingml/2006/main" xmlns:r="http://schemas.openxmlformats.org/officeDocument/2006/relationships" xmlns:p="http://schemas.openxmlformats.org/presentationml/2006/main">
   <p:cSld name="Slide 11">
     <p:bg>
@@ -3218,7 +4374,7 @@
 </p:sld>
 </file>
 
-<file path=ppt/slides/slide12.xml><?xml version="1.0" encoding="utf-8"?>
+<file path=ppt/slides/slide13.xml><?xml version="1.0" encoding="utf-8"?>
 <p:sld xmlns:a="http://schemas.openxmlformats.org/drawingml/2006/main" xmlns:r="http://schemas.openxmlformats.org/officeDocument/2006/relationships" xmlns:p="http://schemas.openxmlformats.org/presentationml/2006/main">
   <p:cSld name="Slide 12">
     <p:bg>
@@ -3909,7 +5065,7 @@
 </p:sld>
 </file>
 
-<file path=ppt/slides/slide13.xml><?xml version="1.0" encoding="utf-8"?>
+<file path=ppt/slides/slide14.xml><?xml version="1.0" encoding="utf-8"?>
 <p:sld xmlns:a="http://schemas.openxmlformats.org/drawingml/2006/main" xmlns:r="http://schemas.openxmlformats.org/officeDocument/2006/relationships" xmlns:p="http://schemas.openxmlformats.org/presentationml/2006/main">
   <p:cSld name="Slide 13">
     <p:bg>
@@ -4100,7 +5256,7 @@
                   <a:srgbClr val="212121"/>
                 </a:solidFill>
               </a:rPr>
-              <a:t>Water damage: #1 insurance claim, preventable</a:t>
+              <a:t>Water damage: A top insurance claim, preventable</a:t>
             </a:r>
             <a:endParaRPr lang="en-US" sz="1300" dirty="0"/>
           </a:p>
@@ -4204,7 +5360,7 @@
                   <a:srgbClr val="212121"/>
                 </a:solidFill>
               </a:rPr>
-              <a:t>Autonomous robot monitors crawl spaces monthly</a:t>
+              <a:t>Can autonomously monitors crawl spaces monthly</a:t>
             </a:r>
             <a:endParaRPr lang="en-US" sz="1300" dirty="0"/>
           </a:p>
@@ -4308,7 +5464,7 @@
                   <a:srgbClr val="212121"/>
                 </a:solidFill>
               </a:rPr>
-              <a:t>Trend analysis enables 2-3 month early warning</a:t>
+              <a:t>Trend analysis enables early warning</a:t>
             </a:r>
             <a:endParaRPr lang="en-US" sz="1300" dirty="0"/>
           </a:p>
@@ -4530,7 +5686,7 @@
 </p:sld>
 </file>
 
-<file path=ppt/slides/slide14.xml><?xml version="1.0" encoding="utf-8"?>
+<file path=ppt/slides/slide15.xml><?xml version="1.0" encoding="utf-8"?>
 <p:sld xmlns:a="http://schemas.openxmlformats.org/drawingml/2006/main" xmlns:r="http://schemas.openxmlformats.org/officeDocument/2006/relationships" xmlns:p="http://schemas.openxmlformats.org/presentationml/2006/main">
   <p:cSld name="Slide 14">
     <p:bg>
@@ -4722,7 +5878,23 @@
                   <a:srgbClr val="FFFFFF"/>
                 </a:solidFill>
               </a:rPr>
-              <a:t>The Problem</a:t>
+              <a:t>The Problem: </a:t>
+            </a:r>
+            <a:r>
+              <a:rPr lang="en-US" sz="2000" b="1" dirty="0">
+                <a:solidFill>
+                  <a:srgbClr val="FFFFFF"/>
+                </a:solidFill>
+              </a:rPr>
+              <a:t>Water damage is detected too late</a:t>
+            </a:r>
+            <a:r>
+              <a:rPr lang="en-US" sz="4000" b="1" dirty="0">
+                <a:solidFill>
+                  <a:srgbClr val="FFFFFF"/>
+                </a:solidFill>
+              </a:rPr>
+              <a:t> </a:t>
             </a:r>
             <a:endParaRPr lang="en-US" sz="4000" dirty="0"/>
           </a:p>
@@ -4758,7 +5930,7 @@
                   <a:srgbClr val="388E3C"/>
                 </a:solidFill>
               </a:rPr>
-              <a:t>$3 BILLION</a:t>
+              <a:t>$ BILLIONS</a:t>
             </a:r>
             <a:endParaRPr lang="en-US" sz="4800" dirty="0"/>
           </a:p>
@@ -4794,7 +5966,7 @@
                   <a:srgbClr val="212121"/>
                 </a:solidFill>
               </a:rPr>
-              <a:t>Annual insurance claims for water damage</a:t>
+              <a:t>In Annual insurance claims for water damage</a:t>
             </a:r>
             <a:endParaRPr lang="en-US" sz="1600" dirty="0"/>
           </a:p>
@@ -4834,7 +6006,7 @@
             </a:pPr>
             <a:r>
               <a:rPr lang="en-AU" dirty="0"/>
-              <a:t>Current : Reactive Approach</a:t>
+              <a:t>Current Approach: Reactive</a:t>
             </a:r>
           </a:p>
           <a:p>
@@ -4911,6 +6083,53 @@
           </a:p>
         </p:txBody>
       </p:sp>
+      <p:pic>
+        <p:nvPicPr>
+          <p:cNvPr id="1026" name="Picture 2" descr="Water in a Crawl Space Can Wreak Havoc On a Home—Here's What to Do About It  - Bob Vila">
+            <a:extLst>
+              <a:ext uri="{FF2B5EF4-FFF2-40B4-BE49-F238E27FC236}">
+                <a16:creationId xmlns:a16="http://schemas.microsoft.com/office/drawing/2014/main" id="{03F90B40-38C0-1C64-5B35-5E17DFA7CD22}"/>
+              </a:ext>
+            </a:extLst>
+          </p:cNvPr>
+          <p:cNvPicPr>
+            <a:picLocks noChangeAspect="1" noChangeArrowheads="1"/>
+          </p:cNvPicPr>
+          <p:nvPr/>
+        </p:nvPicPr>
+        <p:blipFill>
+          <a:blip r:embed="rId3">
+            <a:extLst>
+              <a:ext uri="{28A0092B-C50C-407E-A947-70E740481C1C}">
+                <a14:useLocalDpi xmlns:a14="http://schemas.microsoft.com/office/drawing/2010/main" val="0"/>
+              </a:ext>
+            </a:extLst>
+          </a:blip>
+          <a:srcRect/>
+          <a:stretch>
+            <a:fillRect/>
+          </a:stretch>
+        </p:blipFill>
+        <p:spPr bwMode="auto">
+          <a:xfrm>
+            <a:off x="1002491" y="2286000"/>
+            <a:ext cx="3024217" cy="2016146"/>
+          </a:xfrm>
+          <a:prstGeom prst="rect">
+            <a:avLst/>
+          </a:prstGeom>
+          <a:noFill/>
+          <a:extLst>
+            <a:ext uri="{909E8E84-426E-40DD-AFC4-6F175D3DCCD1}">
+              <a14:hiddenFill xmlns:a14="http://schemas.microsoft.com/office/drawing/2010/main">
+                <a:solidFill>
+                  <a:srgbClr val="FFFFFF"/>
+                </a:solidFill>
+              </a14:hiddenFill>
+            </a:ext>
+          </a:extLst>
+        </p:spPr>
+      </p:pic>
     </p:spTree>
   </p:cSld>
   <p:clrMapOvr>
@@ -5657,6 +6876,632 @@
 
 <file path=ppt/slides/slide4.xml><?xml version="1.0" encoding="utf-8"?>
 <p:sld xmlns:a="http://schemas.openxmlformats.org/drawingml/2006/main" xmlns:r="http://schemas.openxmlformats.org/officeDocument/2006/relationships" xmlns:p="http://schemas.openxmlformats.org/presentationml/2006/main">
+  <p:cSld>
+    <p:bg>
+      <p:bgPr>
+        <a:solidFill>
+          <a:srgbClr val="FFFFFF"/>
+        </a:solidFill>
+        <a:effectLst/>
+      </p:bgPr>
+    </p:bg>
+    <p:spTree>
+      <p:nvGrpSpPr>
+        <p:cNvPr id="1" name="">
+          <a:extLst>
+            <a:ext uri="{FF2B5EF4-FFF2-40B4-BE49-F238E27FC236}">
+              <a16:creationId xmlns:a16="http://schemas.microsoft.com/office/drawing/2014/main" id="{0EBA81D6-5E09-2A43-135B-A9A2FA2A9CC6}"/>
+            </a:ext>
+          </a:extLst>
+        </p:cNvPr>
+        <p:cNvGrpSpPr/>
+        <p:nvPr/>
+      </p:nvGrpSpPr>
+      <p:grpSpPr>
+        <a:xfrm>
+          <a:off x="0" y="0"/>
+          <a:ext cx="0" cy="0"/>
+          <a:chOff x="0" y="0"/>
+          <a:chExt cx="0" cy="0"/>
+        </a:xfrm>
+      </p:grpSpPr>
+      <p:sp>
+        <p:nvSpPr>
+          <p:cNvPr id="2" name="Shape 0">
+            <a:extLst>
+              <a:ext uri="{FF2B5EF4-FFF2-40B4-BE49-F238E27FC236}">
+                <a16:creationId xmlns:a16="http://schemas.microsoft.com/office/drawing/2014/main" id="{D593208F-AFD8-7E1D-0C70-CEC2C0BFA8DA}"/>
+              </a:ext>
+            </a:extLst>
+          </p:cNvPr>
+          <p:cNvSpPr/>
+          <p:nvPr/>
+        </p:nvSpPr>
+        <p:spPr>
+          <a:xfrm>
+            <a:off x="0" y="0"/>
+            <a:ext cx="9144000" cy="731520"/>
+          </a:xfrm>
+          <a:prstGeom prst="rect">
+            <a:avLst/>
+          </a:prstGeom>
+          <a:solidFill>
+            <a:srgbClr val="1976D2"/>
+          </a:solidFill>
+          <a:ln w="12700">
+            <a:solidFill>
+              <a:srgbClr val="1976D2"/>
+            </a:solidFill>
+            <a:prstDash val="solid"/>
+          </a:ln>
+        </p:spPr>
+        <p:txBody>
+          <a:bodyPr/>
+          <a:lstStyle/>
+          <a:p>
+            <a:endParaRPr lang="en-AU"/>
+          </a:p>
+        </p:txBody>
+      </p:sp>
+      <p:sp>
+        <p:nvSpPr>
+          <p:cNvPr id="3" name="Text 1">
+            <a:extLst>
+              <a:ext uri="{FF2B5EF4-FFF2-40B4-BE49-F238E27FC236}">
+                <a16:creationId xmlns:a16="http://schemas.microsoft.com/office/drawing/2014/main" id="{E245062D-262F-6CA9-E165-430CFC912416}"/>
+              </a:ext>
+            </a:extLst>
+          </p:cNvPr>
+          <p:cNvSpPr/>
+          <p:nvPr/>
+        </p:nvSpPr>
+        <p:spPr>
+          <a:xfrm>
+            <a:off x="274320" y="45720"/>
+            <a:ext cx="8595360" cy="640080"/>
+          </a:xfrm>
+          <a:prstGeom prst="rect">
+            <a:avLst/>
+          </a:prstGeom>
+          <a:noFill/>
+          <a:ln/>
+        </p:spPr>
+        <p:txBody>
+          <a:bodyPr wrap="square" rtlCol="0" anchor="ctr"/>
+          <a:lstStyle/>
+          <a:p>
+            <a:pPr marL="0" indent="0" algn="l">
+              <a:buNone/>
+            </a:pPr>
+            <a:r>
+              <a:rPr lang="en-US" sz="4000" b="1" dirty="0">
+                <a:solidFill>
+                  <a:srgbClr val="FFFFFF"/>
+                </a:solidFill>
+              </a:rPr>
+              <a:t>The Gap: </a:t>
+            </a:r>
+            <a:r>
+              <a:rPr lang="en-US" sz="2400" b="1" dirty="0">
+                <a:solidFill>
+                  <a:srgbClr val="FFFFFF"/>
+                </a:solidFill>
+              </a:rPr>
+              <a:t>Why the current approach fails </a:t>
+            </a:r>
+            <a:endParaRPr lang="en-US" sz="2400" dirty="0"/>
+          </a:p>
+        </p:txBody>
+      </p:sp>
+      <p:grpSp>
+        <p:nvGrpSpPr>
+          <p:cNvPr id="19" name="Group 18">
+            <a:extLst>
+              <a:ext uri="{FF2B5EF4-FFF2-40B4-BE49-F238E27FC236}">
+                <a16:creationId xmlns:a16="http://schemas.microsoft.com/office/drawing/2014/main" id="{6E1D5474-08FC-8691-B804-D6476B09B913}"/>
+              </a:ext>
+            </a:extLst>
+          </p:cNvPr>
+          <p:cNvGrpSpPr/>
+          <p:nvPr/>
+        </p:nvGrpSpPr>
+        <p:grpSpPr>
+          <a:xfrm>
+            <a:off x="3090672" y="2286241"/>
+            <a:ext cx="2962656" cy="530352"/>
+            <a:chOff x="731520" y="1371600"/>
+            <a:chExt cx="1828800" cy="914400"/>
+          </a:xfrm>
+        </p:grpSpPr>
+        <p:sp>
+          <p:nvSpPr>
+            <p:cNvPr id="4" name="Shape 2">
+              <a:extLst>
+                <a:ext uri="{FF2B5EF4-FFF2-40B4-BE49-F238E27FC236}">
+                  <a16:creationId xmlns:a16="http://schemas.microsoft.com/office/drawing/2014/main" id="{D0D4C67B-3D71-B745-259D-C5EA536133AE}"/>
+                </a:ext>
+              </a:extLst>
+            </p:cNvPr>
+            <p:cNvSpPr/>
+            <p:nvPr/>
+          </p:nvSpPr>
+          <p:spPr>
+            <a:xfrm>
+              <a:off x="731520" y="1371600"/>
+              <a:ext cx="1828800" cy="914400"/>
+            </a:xfrm>
+            <a:prstGeom prst="rect">
+              <a:avLst/>
+            </a:prstGeom>
+            <a:solidFill>
+              <a:srgbClr val="E8F5E9"/>
+            </a:solidFill>
+            <a:ln w="25400">
+              <a:solidFill>
+                <a:srgbClr val="1976D2"/>
+              </a:solidFill>
+              <a:prstDash val="solid"/>
+            </a:ln>
+          </p:spPr>
+          <p:txBody>
+            <a:bodyPr/>
+            <a:lstStyle/>
+            <a:p>
+              <a:endParaRPr lang="en-AU"/>
+            </a:p>
+          </p:txBody>
+        </p:sp>
+        <p:sp>
+          <p:nvSpPr>
+            <p:cNvPr id="5" name="Text 3">
+              <a:extLst>
+                <a:ext uri="{FF2B5EF4-FFF2-40B4-BE49-F238E27FC236}">
+                  <a16:creationId xmlns:a16="http://schemas.microsoft.com/office/drawing/2014/main" id="{CDCC7964-BC37-A96F-B245-412477E36E23}"/>
+                </a:ext>
+              </a:extLst>
+            </p:cNvPr>
+            <p:cNvSpPr/>
+            <p:nvPr/>
+          </p:nvSpPr>
+          <p:spPr>
+            <a:xfrm>
+              <a:off x="822960" y="1463040"/>
+              <a:ext cx="1645920" cy="731520"/>
+            </a:xfrm>
+            <a:prstGeom prst="rect">
+              <a:avLst/>
+            </a:prstGeom>
+            <a:noFill/>
+            <a:ln/>
+          </p:spPr>
+          <p:txBody>
+            <a:bodyPr wrap="square" rtlCol="0" anchor="ctr"/>
+            <a:lstStyle/>
+            <a:p>
+              <a:pPr marL="0" indent="0" algn="ctr">
+                <a:buNone/>
+              </a:pPr>
+              <a:r>
+                <a:rPr lang="en-US" sz="1400" b="1" dirty="0"/>
+                <a:t>Manual Inspection </a:t>
+              </a:r>
+            </a:p>
+          </p:txBody>
+        </p:sp>
+      </p:grpSp>
+      <p:grpSp>
+        <p:nvGrpSpPr>
+          <p:cNvPr id="20" name="Group 19">
+            <a:extLst>
+              <a:ext uri="{FF2B5EF4-FFF2-40B4-BE49-F238E27FC236}">
+                <a16:creationId xmlns:a16="http://schemas.microsoft.com/office/drawing/2014/main" id="{6A666581-1417-A63A-5487-FEDA6169154D}"/>
+              </a:ext>
+            </a:extLst>
+          </p:cNvPr>
+          <p:cNvGrpSpPr/>
+          <p:nvPr/>
+        </p:nvGrpSpPr>
+        <p:grpSpPr>
+          <a:xfrm>
+            <a:off x="512064" y="1187500"/>
+            <a:ext cx="2962656" cy="530352"/>
+            <a:chOff x="2834640" y="1463040"/>
+            <a:chExt cx="1828800" cy="914400"/>
+          </a:xfrm>
+        </p:grpSpPr>
+        <p:sp>
+          <p:nvSpPr>
+            <p:cNvPr id="7" name="Shape 5">
+              <a:extLst>
+                <a:ext uri="{FF2B5EF4-FFF2-40B4-BE49-F238E27FC236}">
+                  <a16:creationId xmlns:a16="http://schemas.microsoft.com/office/drawing/2014/main" id="{3C922CB4-7E4E-22A4-D989-400B44F15513}"/>
+                </a:ext>
+              </a:extLst>
+            </p:cNvPr>
+            <p:cNvSpPr/>
+            <p:nvPr/>
+          </p:nvSpPr>
+          <p:spPr>
+            <a:xfrm>
+              <a:off x="2834640" y="1463040"/>
+              <a:ext cx="1828800" cy="914400"/>
+            </a:xfrm>
+            <a:prstGeom prst="rect">
+              <a:avLst/>
+            </a:prstGeom>
+            <a:solidFill>
+              <a:srgbClr val="FFF9C4"/>
+            </a:solidFill>
+            <a:ln w="25400">
+              <a:solidFill>
+                <a:srgbClr val="1976D2"/>
+              </a:solidFill>
+              <a:prstDash val="solid"/>
+            </a:ln>
+          </p:spPr>
+          <p:txBody>
+            <a:bodyPr/>
+            <a:lstStyle/>
+            <a:p>
+              <a:endParaRPr lang="en-AU" dirty="0"/>
+            </a:p>
+          </p:txBody>
+        </p:sp>
+        <p:sp>
+          <p:nvSpPr>
+            <p:cNvPr id="8" name="Text 6">
+              <a:extLst>
+                <a:ext uri="{FF2B5EF4-FFF2-40B4-BE49-F238E27FC236}">
+                  <a16:creationId xmlns:a16="http://schemas.microsoft.com/office/drawing/2014/main" id="{D6A6F157-590C-C558-CE92-D7BF8709D3B7}"/>
+                </a:ext>
+              </a:extLst>
+            </p:cNvPr>
+            <p:cNvSpPr/>
+            <p:nvPr/>
+          </p:nvSpPr>
+          <p:spPr>
+            <a:xfrm>
+              <a:off x="2926080" y="1463040"/>
+              <a:ext cx="1645920" cy="731520"/>
+            </a:xfrm>
+            <a:prstGeom prst="rect">
+              <a:avLst/>
+            </a:prstGeom>
+            <a:noFill/>
+            <a:ln/>
+          </p:spPr>
+          <p:txBody>
+            <a:bodyPr wrap="square" rtlCol="0" anchor="ctr"/>
+            <a:lstStyle/>
+            <a:p>
+              <a:pPr marL="0" indent="0" algn="ctr">
+                <a:buNone/>
+              </a:pPr>
+              <a:r>
+                <a:rPr lang="en-US" sz="1400" b="1" dirty="0"/>
+                <a:t>Cameras:</a:t>
+              </a:r>
+            </a:p>
+          </p:txBody>
+        </p:sp>
+      </p:grpSp>
+      <p:grpSp>
+        <p:nvGrpSpPr>
+          <p:cNvPr id="21" name="Group 20">
+            <a:extLst>
+              <a:ext uri="{FF2B5EF4-FFF2-40B4-BE49-F238E27FC236}">
+                <a16:creationId xmlns:a16="http://schemas.microsoft.com/office/drawing/2014/main" id="{8EE438B3-3B7B-BE0F-1C46-AD402FDA6B62}"/>
+              </a:ext>
+            </a:extLst>
+          </p:cNvPr>
+          <p:cNvGrpSpPr/>
+          <p:nvPr/>
+        </p:nvGrpSpPr>
+        <p:grpSpPr>
+          <a:xfrm>
+            <a:off x="5669282" y="1187500"/>
+            <a:ext cx="2962656" cy="530352"/>
+            <a:chOff x="4937760" y="1371600"/>
+            <a:chExt cx="1828800" cy="914400"/>
+          </a:xfrm>
+        </p:grpSpPr>
+        <p:sp>
+          <p:nvSpPr>
+            <p:cNvPr id="10" name="Shape 8">
+              <a:extLst>
+                <a:ext uri="{FF2B5EF4-FFF2-40B4-BE49-F238E27FC236}">
+                  <a16:creationId xmlns:a16="http://schemas.microsoft.com/office/drawing/2014/main" id="{02C9B426-C80D-440E-7C1E-D061B50A7F99}"/>
+                </a:ext>
+              </a:extLst>
+            </p:cNvPr>
+            <p:cNvSpPr/>
+            <p:nvPr/>
+          </p:nvSpPr>
+          <p:spPr>
+            <a:xfrm>
+              <a:off x="4937760" y="1371600"/>
+              <a:ext cx="1828800" cy="914400"/>
+            </a:xfrm>
+            <a:prstGeom prst="rect">
+              <a:avLst/>
+            </a:prstGeom>
+            <a:solidFill>
+              <a:srgbClr val="FFE0B2"/>
+            </a:solidFill>
+            <a:ln w="25400">
+              <a:solidFill>
+                <a:srgbClr val="1976D2"/>
+              </a:solidFill>
+              <a:prstDash val="solid"/>
+            </a:ln>
+          </p:spPr>
+          <p:txBody>
+            <a:bodyPr/>
+            <a:lstStyle/>
+            <a:p>
+              <a:endParaRPr lang="en-AU"/>
+            </a:p>
+          </p:txBody>
+        </p:sp>
+        <p:sp>
+          <p:nvSpPr>
+            <p:cNvPr id="11" name="Text 9">
+              <a:extLst>
+                <a:ext uri="{FF2B5EF4-FFF2-40B4-BE49-F238E27FC236}">
+                  <a16:creationId xmlns:a16="http://schemas.microsoft.com/office/drawing/2014/main" id="{FEEA2679-78BB-8B85-6621-1FCB93531CD8}"/>
+                </a:ext>
+              </a:extLst>
+            </p:cNvPr>
+            <p:cNvSpPr/>
+            <p:nvPr/>
+          </p:nvSpPr>
+          <p:spPr>
+            <a:xfrm>
+              <a:off x="5029200" y="1463040"/>
+              <a:ext cx="1645920" cy="731520"/>
+            </a:xfrm>
+            <a:prstGeom prst="rect">
+              <a:avLst/>
+            </a:prstGeom>
+            <a:noFill/>
+            <a:ln/>
+          </p:spPr>
+          <p:txBody>
+            <a:bodyPr wrap="square" rtlCol="0" anchor="ctr"/>
+            <a:lstStyle/>
+            <a:p>
+              <a:pPr marL="0" indent="0" algn="ctr">
+                <a:buNone/>
+              </a:pPr>
+              <a:r>
+                <a:rPr lang="en-US" sz="1400" b="1" dirty="0"/>
+                <a:t>Insurance Claims</a:t>
+              </a:r>
+            </a:p>
+          </p:txBody>
+        </p:sp>
+      </p:grpSp>
+      <p:grpSp>
+        <p:nvGrpSpPr>
+          <p:cNvPr id="22" name="Group 21">
+            <a:extLst>
+              <a:ext uri="{FF2B5EF4-FFF2-40B4-BE49-F238E27FC236}">
+                <a16:creationId xmlns:a16="http://schemas.microsoft.com/office/drawing/2014/main" id="{7623746B-7F58-3B60-0E9E-6C8206865A29}"/>
+              </a:ext>
+            </a:extLst>
+          </p:cNvPr>
+          <p:cNvGrpSpPr/>
+          <p:nvPr/>
+        </p:nvGrpSpPr>
+        <p:grpSpPr>
+          <a:xfrm>
+            <a:off x="716280" y="3362795"/>
+            <a:ext cx="7711440" cy="1412202"/>
+            <a:chOff x="7040880" y="522781"/>
+            <a:chExt cx="1828800" cy="2434831"/>
+          </a:xfrm>
+        </p:grpSpPr>
+        <p:sp>
+          <p:nvSpPr>
+            <p:cNvPr id="13" name="Shape 11">
+              <a:extLst>
+                <a:ext uri="{FF2B5EF4-FFF2-40B4-BE49-F238E27FC236}">
+                  <a16:creationId xmlns:a16="http://schemas.microsoft.com/office/drawing/2014/main" id="{5E8E82D0-4D21-AC99-6F94-7EA467985BA2}"/>
+                </a:ext>
+              </a:extLst>
+            </p:cNvPr>
+            <p:cNvSpPr/>
+            <p:nvPr/>
+          </p:nvSpPr>
+          <p:spPr>
+            <a:xfrm>
+              <a:off x="7040880" y="522781"/>
+              <a:ext cx="1828800" cy="2434831"/>
+            </a:xfrm>
+            <a:prstGeom prst="rect">
+              <a:avLst/>
+            </a:prstGeom>
+            <a:solidFill>
+              <a:srgbClr val="FFCDD2"/>
+            </a:solidFill>
+            <a:ln w="25400">
+              <a:solidFill>
+                <a:srgbClr val="1976D2"/>
+              </a:solidFill>
+              <a:prstDash val="solid"/>
+            </a:ln>
+          </p:spPr>
+          <p:txBody>
+            <a:bodyPr/>
+            <a:lstStyle/>
+            <a:p>
+              <a:pPr algn="ctr"/>
+              <a:endParaRPr lang="en-AU" sz="2800" b="1" dirty="0"/>
+            </a:p>
+            <a:p>
+              <a:pPr algn="ctr"/>
+              <a:r>
+                <a:rPr lang="en-AU" sz="2800" b="1" dirty="0"/>
+                <a:t>Result: costly and reactive </a:t>
+              </a:r>
+            </a:p>
+          </p:txBody>
+        </p:sp>
+        <p:sp>
+          <p:nvSpPr>
+            <p:cNvPr id="14" name="Text 12">
+              <a:extLst>
+                <a:ext uri="{FF2B5EF4-FFF2-40B4-BE49-F238E27FC236}">
+                  <a16:creationId xmlns:a16="http://schemas.microsoft.com/office/drawing/2014/main" id="{3E9971DB-C73D-EAEC-7F94-FED2BD1855CE}"/>
+                </a:ext>
+              </a:extLst>
+            </p:cNvPr>
+            <p:cNvSpPr/>
+            <p:nvPr/>
+          </p:nvSpPr>
+          <p:spPr>
+            <a:xfrm>
+              <a:off x="7132320" y="1463040"/>
+              <a:ext cx="1645920" cy="731520"/>
+            </a:xfrm>
+            <a:prstGeom prst="rect">
+              <a:avLst/>
+            </a:prstGeom>
+            <a:noFill/>
+            <a:ln/>
+          </p:spPr>
+          <p:txBody>
+            <a:bodyPr wrap="square" rtlCol="0" anchor="ctr"/>
+            <a:lstStyle/>
+            <a:p>
+              <a:pPr marL="0" indent="0" algn="ctr">
+                <a:buNone/>
+              </a:pPr>
+              <a:endParaRPr lang="en-US" sz="1400" dirty="0"/>
+            </a:p>
+          </p:txBody>
+        </p:sp>
+      </p:grpSp>
+      <p:sp>
+        <p:nvSpPr>
+          <p:cNvPr id="24" name="TextBox 23">
+            <a:extLst>
+              <a:ext uri="{FF2B5EF4-FFF2-40B4-BE49-F238E27FC236}">
+                <a16:creationId xmlns:a16="http://schemas.microsoft.com/office/drawing/2014/main" id="{9FD6E520-D7BA-7501-ADC3-861D40DBBD0F}"/>
+              </a:ext>
+            </a:extLst>
+          </p:cNvPr>
+          <p:cNvSpPr txBox="1"/>
+          <p:nvPr/>
+        </p:nvSpPr>
+        <p:spPr>
+          <a:xfrm>
+            <a:off x="512064" y="1863547"/>
+            <a:ext cx="2962656" cy="276999"/>
+          </a:xfrm>
+          <a:prstGeom prst="rect">
+            <a:avLst/>
+          </a:prstGeom>
+          <a:noFill/>
+        </p:spPr>
+        <p:txBody>
+          <a:bodyPr wrap="square" rtlCol="0">
+            <a:spAutoFit/>
+          </a:bodyPr>
+          <a:lstStyle/>
+          <a:p>
+            <a:r>
+              <a:rPr lang="en-AU" sz="1200" dirty="0"/>
+              <a:t>Do not usually appear under the building </a:t>
+            </a:r>
+          </a:p>
+        </p:txBody>
+      </p:sp>
+      <p:sp>
+        <p:nvSpPr>
+          <p:cNvPr id="25" name="TextBox 24">
+            <a:extLst>
+              <a:ext uri="{FF2B5EF4-FFF2-40B4-BE49-F238E27FC236}">
+                <a16:creationId xmlns:a16="http://schemas.microsoft.com/office/drawing/2014/main" id="{7A0416C9-719A-129E-BBE5-3240592F56EF}"/>
+              </a:ext>
+            </a:extLst>
+          </p:cNvPr>
+          <p:cNvSpPr txBox="1"/>
+          <p:nvPr/>
+        </p:nvSpPr>
+        <p:spPr>
+          <a:xfrm>
+            <a:off x="3090672" y="2871216"/>
+            <a:ext cx="2962656" cy="276999"/>
+          </a:xfrm>
+          <a:prstGeom prst="rect">
+            <a:avLst/>
+          </a:prstGeom>
+          <a:noFill/>
+        </p:spPr>
+        <p:txBody>
+          <a:bodyPr wrap="square" rtlCol="0">
+            <a:spAutoFit/>
+          </a:bodyPr>
+          <a:lstStyle/>
+          <a:p>
+            <a:r>
+              <a:rPr lang="en-AU" sz="1200" dirty="0"/>
+              <a:t>Infrequent, expensive, human dependent </a:t>
+            </a:r>
+          </a:p>
+        </p:txBody>
+      </p:sp>
+      <p:sp>
+        <p:nvSpPr>
+          <p:cNvPr id="26" name="TextBox 25">
+            <a:extLst>
+              <a:ext uri="{FF2B5EF4-FFF2-40B4-BE49-F238E27FC236}">
+                <a16:creationId xmlns:a16="http://schemas.microsoft.com/office/drawing/2014/main" id="{7CD8A04B-C5C8-F12F-997A-FA8133FD346D}"/>
+              </a:ext>
+            </a:extLst>
+          </p:cNvPr>
+          <p:cNvSpPr txBox="1"/>
+          <p:nvPr/>
+        </p:nvSpPr>
+        <p:spPr>
+          <a:xfrm>
+            <a:off x="5669282" y="1867205"/>
+            <a:ext cx="2962656" cy="276999"/>
+          </a:xfrm>
+          <a:prstGeom prst="rect">
+            <a:avLst/>
+          </a:prstGeom>
+          <a:noFill/>
+        </p:spPr>
+        <p:txBody>
+          <a:bodyPr wrap="square" rtlCol="0">
+            <a:spAutoFit/>
+          </a:bodyPr>
+          <a:lstStyle/>
+          <a:p>
+            <a:r>
+              <a:rPr lang="en-AU" sz="1200" dirty="0"/>
+              <a:t>Is tedious and only pays after damage occurs </a:t>
+            </a:r>
+          </a:p>
+        </p:txBody>
+      </p:sp>
+    </p:spTree>
+    <p:extLst>
+      <p:ext uri="{BB962C8B-B14F-4D97-AF65-F5344CB8AC3E}">
+        <p14:creationId xmlns:p14="http://schemas.microsoft.com/office/powerpoint/2010/main" val="1881512782"/>
+      </p:ext>
+    </p:extLst>
+  </p:cSld>
+  <p:clrMapOvr>
+    <a:masterClrMapping/>
+  </p:clrMapOvr>
+</p:sld>
+</file>
+
+<file path=ppt/slides/slide5.xml><?xml version="1.0" encoding="utf-8"?>
+<p:sld xmlns:a="http://schemas.openxmlformats.org/drawingml/2006/main" xmlns:r="http://schemas.openxmlformats.org/officeDocument/2006/relationships" xmlns:p="http://schemas.openxmlformats.org/presentationml/2006/main">
   <p:cSld name="Slide 4">
     <p:bg>
       <p:bgPr>
@@ -6058,7 +7903,7 @@
                   <a:srgbClr val="212121"/>
                 </a:solidFill>
               </a:rPr>
-              <a:t>Trend-based anomaly detection</a:t>
+              <a:t>Trend-based and anomaly detection</a:t>
             </a:r>
             <a:endParaRPr lang="en-US" sz="1300" dirty="0"/>
           </a:p>
@@ -6198,7 +8043,7 @@
                   <a:srgbClr val="212121"/>
                 </a:solidFill>
               </a:rPr>
-              <a:t>Early warning to property manager</a:t>
+              <a:t>Early warning for property manager</a:t>
             </a:r>
             <a:endParaRPr lang="en-US" sz="1300" dirty="0"/>
           </a:p>
@@ -6254,7 +8099,7 @@
         </p:nvGrpSpPr>
         <p:grpSpPr>
           <a:xfrm>
-            <a:off x="1678015" y="4018212"/>
+            <a:off x="1242089" y="4074530"/>
             <a:ext cx="7100225" cy="640080"/>
             <a:chOff x="457200" y="3886805"/>
             <a:chExt cx="7680960" cy="640080"/>
@@ -6281,8 +8126,9 @@
             <a:bodyPr wrap="square" rtlCol="0" anchor="ctr"/>
             <a:lstStyle/>
             <a:p>
-              <a:pPr marL="0" indent="0">
-                <a:buNone/>
+              <a:pPr marL="285750" indent="-285750">
+                <a:buFont typeface="Wingdings" panose="05000000000000000000" pitchFamily="2" charset="2"/>
+                <a:buChar char="ü"/>
               </a:pPr>
               <a:r>
                 <a:rPr lang="en-US" sz="1400" dirty="0">
@@ -6290,7 +8136,7 @@
                     <a:srgbClr val="212121"/>
                   </a:solidFill>
                 </a:rPr>
-                <a:t>✓ Prevent mold &amp; structural damage</a:t>
+                <a:t> Prevent mold &amp; structural damage</a:t>
               </a:r>
               <a:endParaRPr lang="en-US" sz="1400" dirty="0"/>
             </a:p>
@@ -6317,8 +8163,9 @@
             <a:bodyPr wrap="square" rtlCol="0" anchor="ctr"/>
             <a:lstStyle/>
             <a:p>
-              <a:pPr marL="0" indent="0">
-                <a:buNone/>
+              <a:pPr marL="285750" indent="-285750">
+                <a:buFont typeface="Wingdings" panose="05000000000000000000" pitchFamily="2" charset="2"/>
+                <a:buChar char="ü"/>
               </a:pPr>
               <a:r>
                 <a:rPr lang="en-US" sz="1400" dirty="0">
@@ -6326,7 +8173,7 @@
                     <a:srgbClr val="212121"/>
                   </a:solidFill>
                 </a:rPr>
-                <a:t>✓ Avoid insurance complications</a:t>
+                <a:t>Avoid insurance complications</a:t>
               </a:r>
               <a:endParaRPr lang="en-US" sz="1400" dirty="0"/>
             </a:p>
@@ -6353,8 +8200,9 @@
             <a:bodyPr wrap="square" rtlCol="0" anchor="ctr"/>
             <a:lstStyle/>
             <a:p>
-              <a:pPr marL="0" indent="0">
-                <a:buNone/>
+              <a:pPr marL="285750" indent="-285750">
+                <a:buFont typeface="Wingdings" panose="05000000000000000000" pitchFamily="2" charset="2"/>
+                <a:buChar char="ü"/>
               </a:pPr>
               <a:r>
                 <a:rPr lang="en-US" sz="1400" dirty="0">
@@ -6362,7 +8210,7 @@
                     <a:srgbClr val="212121"/>
                   </a:solidFill>
                 </a:rPr>
-                <a:t>✓ Fix problems for $500 instead of $15,000</a:t>
+                <a:t>Fix problems for $500 instead of $15,000</a:t>
               </a:r>
               <a:endParaRPr lang="en-US" sz="1400" dirty="0"/>
             </a:p>
@@ -6389,8 +8237,9 @@
             <a:bodyPr wrap="square" rtlCol="0" anchor="ctr"/>
             <a:lstStyle/>
             <a:p>
-              <a:pPr marL="0" indent="0">
-                <a:buNone/>
+              <a:pPr marL="285750" indent="-285750">
+                <a:buFont typeface="Wingdings" panose="05000000000000000000" pitchFamily="2" charset="2"/>
+                <a:buChar char="ü"/>
               </a:pPr>
               <a:r>
                 <a:rPr lang="en-US" sz="1400" dirty="0">
@@ -6398,7 +8247,7 @@
                     <a:srgbClr val="212121"/>
                   </a:solidFill>
                 </a:rPr>
-                <a:t>✓ Property manager has peace of mind</a:t>
+                <a:t>Property manager has peace of mind</a:t>
               </a:r>
               <a:endParaRPr lang="en-US" sz="1400" dirty="0"/>
             </a:p>
@@ -6413,9 +8262,9 @@
 </p:sld>
 </file>
 
-<file path=ppt/slides/slide5.xml><?xml version="1.0" encoding="utf-8"?>
+<file path=ppt/slides/slide6.xml><?xml version="1.0" encoding="utf-8"?>
 <p:sld xmlns:a="http://schemas.openxmlformats.org/drawingml/2006/main" xmlns:r="http://schemas.openxmlformats.org/officeDocument/2006/relationships" xmlns:p="http://schemas.openxmlformats.org/presentationml/2006/main">
-  <p:cSld name="Slide 5">
+  <p:cSld name="Slide 8">
     <p:bg>
       <p:bgPr>
         <a:solidFill>
@@ -6440,6 +8289,134 @@
       </p:grpSpPr>
       <p:sp>
         <p:nvSpPr>
+          <p:cNvPr id="6" name="Shape 4"/>
+          <p:cNvSpPr/>
+          <p:nvPr/>
+        </p:nvSpPr>
+        <p:spPr>
+          <a:xfrm>
+            <a:off x="2560320" y="889875"/>
+            <a:ext cx="5669280" cy="411480"/>
+          </a:xfrm>
+          <a:prstGeom prst="rect">
+            <a:avLst/>
+          </a:prstGeom>
+          <a:solidFill>
+            <a:srgbClr val="E3F2FD"/>
+          </a:solidFill>
+          <a:ln w="25400">
+            <a:solidFill>
+              <a:srgbClr val="1976D2"/>
+            </a:solidFill>
+            <a:prstDash val="solid"/>
+          </a:ln>
+        </p:spPr>
+        <p:txBody>
+          <a:bodyPr/>
+          <a:lstStyle/>
+          <a:p>
+            <a:endParaRPr lang="en-AU"/>
+          </a:p>
+        </p:txBody>
+      </p:sp>
+      <p:sp>
+        <p:nvSpPr>
+          <p:cNvPr id="10" name="Shape 8"/>
+          <p:cNvSpPr/>
+          <p:nvPr/>
+        </p:nvSpPr>
+        <p:spPr>
+          <a:xfrm>
+            <a:off x="2560320" y="1484235"/>
+            <a:ext cx="5669280" cy="411480"/>
+          </a:xfrm>
+          <a:prstGeom prst="rect">
+            <a:avLst/>
+          </a:prstGeom>
+          <a:solidFill>
+            <a:srgbClr val="FFF9C4"/>
+          </a:solidFill>
+          <a:ln w="25400">
+            <a:solidFill>
+              <a:srgbClr val="1976D2"/>
+            </a:solidFill>
+            <a:prstDash val="solid"/>
+          </a:ln>
+        </p:spPr>
+        <p:txBody>
+          <a:bodyPr/>
+          <a:lstStyle/>
+          <a:p>
+            <a:endParaRPr lang="en-AU"/>
+          </a:p>
+        </p:txBody>
+      </p:sp>
+      <p:sp>
+        <p:nvSpPr>
+          <p:cNvPr id="14" name="Shape 12"/>
+          <p:cNvSpPr/>
+          <p:nvPr/>
+        </p:nvSpPr>
+        <p:spPr>
+          <a:xfrm>
+            <a:off x="2560320" y="2071555"/>
+            <a:ext cx="5669280" cy="411480"/>
+          </a:xfrm>
+          <a:prstGeom prst="rect">
+            <a:avLst/>
+          </a:prstGeom>
+          <a:solidFill>
+            <a:srgbClr val="FFE0B2"/>
+          </a:solidFill>
+          <a:ln w="25400">
+            <a:solidFill>
+              <a:srgbClr val="1976D2"/>
+            </a:solidFill>
+            <a:prstDash val="solid"/>
+          </a:ln>
+        </p:spPr>
+        <p:txBody>
+          <a:bodyPr/>
+          <a:lstStyle/>
+          <a:p>
+            <a:endParaRPr lang="en-AU"/>
+          </a:p>
+        </p:txBody>
+      </p:sp>
+      <p:sp>
+        <p:nvSpPr>
+          <p:cNvPr id="18" name="Shape 16"/>
+          <p:cNvSpPr/>
+          <p:nvPr/>
+        </p:nvSpPr>
+        <p:spPr>
+          <a:xfrm>
+            <a:off x="2560320" y="2665915"/>
+            <a:ext cx="5669280" cy="411480"/>
+          </a:xfrm>
+          <a:prstGeom prst="rect">
+            <a:avLst/>
+          </a:prstGeom>
+          <a:solidFill>
+            <a:srgbClr val="FFCDD2"/>
+          </a:solidFill>
+          <a:ln w="25400">
+            <a:solidFill>
+              <a:srgbClr val="1976D2"/>
+            </a:solidFill>
+            <a:prstDash val="solid"/>
+          </a:ln>
+        </p:spPr>
+        <p:txBody>
+          <a:bodyPr/>
+          <a:lstStyle/>
+          <a:p>
+            <a:endParaRPr lang="en-AU"/>
+          </a:p>
+        </p:txBody>
+      </p:sp>
+      <p:sp>
+        <p:nvSpPr>
           <p:cNvPr id="2" name="Shape 0"/>
           <p:cNvSpPr/>
           <p:nvPr/>
@@ -6500,7 +8477,7 @@
                   <a:srgbClr val="FFFFFF"/>
                 </a:solidFill>
               </a:rPr>
-              <a:t>System Architecture - Block Diagram</a:t>
+              <a:t>Monthly Patrol Cycle</a:t>
             </a:r>
             <a:endParaRPr lang="en-US" sz="4000" dirty="0"/>
           </a:p>
@@ -6508,14 +8485,302 @@
       </p:sp>
       <p:sp>
         <p:nvSpPr>
-          <p:cNvPr id="4" name="Shape 2"/>
-          <p:cNvSpPr/>
-          <p:nvPr/>
-        </p:nvSpPr>
-        <p:spPr>
-          <a:xfrm>
-            <a:off x="457200" y="1097734"/>
-            <a:ext cx="2286000" cy="913946"/>
+          <p:cNvPr id="4" name="Text 2"/>
+          <p:cNvSpPr/>
+          <p:nvPr/>
+        </p:nvSpPr>
+        <p:spPr>
+          <a:xfrm>
+            <a:off x="457200" y="889875"/>
+            <a:ext cx="1371600" cy="411480"/>
+          </a:xfrm>
+          <a:prstGeom prst="rect">
+            <a:avLst/>
+          </a:prstGeom>
+          <a:noFill/>
+          <a:ln/>
+        </p:spPr>
+        <p:txBody>
+          <a:bodyPr wrap="square" rtlCol="0" anchor="ctr"/>
+          <a:lstStyle/>
+          <a:p>
+            <a:pPr marL="0" indent="0" algn="ctr">
+              <a:buNone/>
+            </a:pPr>
+            <a:r>
+              <a:rPr lang="en-US" sz="1400" b="1" dirty="0">
+                <a:solidFill>
+                  <a:srgbClr val="388E3C"/>
+                </a:solidFill>
+              </a:rPr>
+              <a:t>5 min</a:t>
+            </a:r>
+            <a:endParaRPr lang="en-US" sz="1400" dirty="0"/>
+          </a:p>
+        </p:txBody>
+      </p:sp>
+      <p:sp>
+        <p:nvSpPr>
+          <p:cNvPr id="7" name="Text 5"/>
+          <p:cNvSpPr/>
+          <p:nvPr/>
+        </p:nvSpPr>
+        <p:spPr>
+          <a:xfrm>
+            <a:off x="2651760" y="975902"/>
+            <a:ext cx="5486400" cy="228600"/>
+          </a:xfrm>
+          <a:prstGeom prst="rect">
+            <a:avLst/>
+          </a:prstGeom>
+          <a:noFill/>
+          <a:ln/>
+        </p:spPr>
+        <p:txBody>
+          <a:bodyPr wrap="square" rtlCol="0" anchor="ctr"/>
+          <a:lstStyle/>
+          <a:p>
+            <a:pPr marL="0" indent="0" algn="ctr">
+              <a:buNone/>
+            </a:pPr>
+            <a:r>
+              <a:rPr lang="en-US" sz="1400" b="1" dirty="0">
+                <a:solidFill>
+                  <a:srgbClr val="212121"/>
+                </a:solidFill>
+              </a:rPr>
+              <a:t>Deploy robot</a:t>
+            </a:r>
+            <a:endParaRPr lang="en-US" sz="1400" dirty="0"/>
+          </a:p>
+        </p:txBody>
+      </p:sp>
+      <p:sp>
+        <p:nvSpPr>
+          <p:cNvPr id="8" name="Text 6"/>
+          <p:cNvSpPr/>
+          <p:nvPr/>
+        </p:nvSpPr>
+        <p:spPr>
+          <a:xfrm>
+            <a:off x="457200" y="1484235"/>
+            <a:ext cx="1371600" cy="411480"/>
+          </a:xfrm>
+          <a:prstGeom prst="rect">
+            <a:avLst/>
+          </a:prstGeom>
+          <a:noFill/>
+          <a:ln/>
+        </p:spPr>
+        <p:txBody>
+          <a:bodyPr wrap="square" rtlCol="0" anchor="ctr"/>
+          <a:lstStyle/>
+          <a:p>
+            <a:pPr marL="0" indent="0" algn="ctr">
+              <a:buNone/>
+            </a:pPr>
+            <a:r>
+              <a:rPr lang="en-US" sz="1400" b="1" dirty="0">
+                <a:solidFill>
+                  <a:srgbClr val="388E3C"/>
+                </a:solidFill>
+              </a:rPr>
+              <a:t>30-40 min</a:t>
+            </a:r>
+            <a:endParaRPr lang="en-US" sz="1400" dirty="0"/>
+          </a:p>
+        </p:txBody>
+      </p:sp>
+      <p:sp>
+        <p:nvSpPr>
+          <p:cNvPr id="11" name="Text 9"/>
+          <p:cNvSpPr/>
+          <p:nvPr/>
+        </p:nvSpPr>
+        <p:spPr>
+          <a:xfrm>
+            <a:off x="2651760" y="1577340"/>
+            <a:ext cx="5486400" cy="228600"/>
+          </a:xfrm>
+          <a:prstGeom prst="rect">
+            <a:avLst/>
+          </a:prstGeom>
+          <a:noFill/>
+          <a:ln/>
+        </p:spPr>
+        <p:txBody>
+          <a:bodyPr wrap="square" rtlCol="0" anchor="ctr"/>
+          <a:lstStyle/>
+          <a:p>
+            <a:pPr marL="0" indent="0" algn="ctr">
+              <a:buNone/>
+            </a:pPr>
+            <a:r>
+              <a:rPr lang="en-US" sz="1400" b="1" dirty="0">
+                <a:solidFill>
+                  <a:srgbClr val="212121"/>
+                </a:solidFill>
+              </a:rPr>
+              <a:t>Autonomous/Manual patrol</a:t>
+            </a:r>
+            <a:endParaRPr lang="en-US" sz="1400" dirty="0"/>
+          </a:p>
+        </p:txBody>
+      </p:sp>
+      <p:sp>
+        <p:nvSpPr>
+          <p:cNvPr id="12" name="Text 10"/>
+          <p:cNvSpPr/>
+          <p:nvPr/>
+        </p:nvSpPr>
+        <p:spPr>
+          <a:xfrm>
+            <a:off x="457200" y="2078595"/>
+            <a:ext cx="1371600" cy="411480"/>
+          </a:xfrm>
+          <a:prstGeom prst="rect">
+            <a:avLst/>
+          </a:prstGeom>
+          <a:noFill/>
+          <a:ln/>
+        </p:spPr>
+        <p:txBody>
+          <a:bodyPr wrap="square" rtlCol="0" anchor="ctr"/>
+          <a:lstStyle/>
+          <a:p>
+            <a:pPr marL="0" indent="0" algn="ctr">
+              <a:buNone/>
+            </a:pPr>
+            <a:r>
+              <a:rPr lang="en-US" sz="1400" b="1" dirty="0">
+                <a:solidFill>
+                  <a:srgbClr val="388E3C"/>
+                </a:solidFill>
+              </a:rPr>
+              <a:t>5 min</a:t>
+            </a:r>
+            <a:endParaRPr lang="en-US" sz="1400" dirty="0"/>
+          </a:p>
+        </p:txBody>
+      </p:sp>
+      <p:sp>
+        <p:nvSpPr>
+          <p:cNvPr id="15" name="Text 13"/>
+          <p:cNvSpPr/>
+          <p:nvPr/>
+        </p:nvSpPr>
+        <p:spPr>
+          <a:xfrm>
+            <a:off x="2560320" y="2164660"/>
+            <a:ext cx="5486400" cy="228600"/>
+          </a:xfrm>
+          <a:prstGeom prst="rect">
+            <a:avLst/>
+          </a:prstGeom>
+          <a:noFill/>
+          <a:ln/>
+        </p:spPr>
+        <p:txBody>
+          <a:bodyPr wrap="square" rtlCol="0" anchor="ctr"/>
+          <a:lstStyle/>
+          <a:p>
+            <a:pPr marL="0" indent="0" algn="ctr">
+              <a:buNone/>
+            </a:pPr>
+            <a:r>
+              <a:rPr lang="en-US" sz="1400" b="1" dirty="0">
+                <a:solidFill>
+                  <a:srgbClr val="212121"/>
+                </a:solidFill>
+              </a:rPr>
+              <a:t>Retrieve &amp; review</a:t>
+            </a:r>
+            <a:endParaRPr lang="en-US" sz="1400" dirty="0"/>
+          </a:p>
+        </p:txBody>
+      </p:sp>
+      <p:sp>
+        <p:nvSpPr>
+          <p:cNvPr id="16" name="Text 14"/>
+          <p:cNvSpPr/>
+          <p:nvPr/>
+        </p:nvSpPr>
+        <p:spPr>
+          <a:xfrm>
+            <a:off x="457200" y="2635545"/>
+            <a:ext cx="1371600" cy="411480"/>
+          </a:xfrm>
+          <a:prstGeom prst="rect">
+            <a:avLst/>
+          </a:prstGeom>
+          <a:noFill/>
+          <a:ln/>
+        </p:spPr>
+        <p:txBody>
+          <a:bodyPr wrap="square" rtlCol="0" anchor="ctr"/>
+          <a:lstStyle/>
+          <a:p>
+            <a:pPr marL="0" indent="0" algn="ctr">
+              <a:buNone/>
+            </a:pPr>
+            <a:r>
+              <a:rPr lang="en-US" sz="1400" b="1" dirty="0">
+                <a:solidFill>
+                  <a:srgbClr val="388E3C"/>
+                </a:solidFill>
+              </a:rPr>
+              <a:t>Instant</a:t>
+            </a:r>
+            <a:endParaRPr lang="en-US" sz="1400" dirty="0"/>
+          </a:p>
+        </p:txBody>
+      </p:sp>
+      <p:sp>
+        <p:nvSpPr>
+          <p:cNvPr id="19" name="Text 17"/>
+          <p:cNvSpPr/>
+          <p:nvPr/>
+        </p:nvSpPr>
+        <p:spPr>
+          <a:xfrm>
+            <a:off x="2651760" y="2729045"/>
+            <a:ext cx="5486400" cy="228600"/>
+          </a:xfrm>
+          <a:prstGeom prst="rect">
+            <a:avLst/>
+          </a:prstGeom>
+          <a:noFill/>
+          <a:ln/>
+        </p:spPr>
+        <p:txBody>
+          <a:bodyPr wrap="square" rtlCol="0" anchor="ctr"/>
+          <a:lstStyle/>
+          <a:p>
+            <a:pPr marL="0" indent="0" algn="ctr">
+              <a:buNone/>
+            </a:pPr>
+            <a:r>
+              <a:rPr lang="en-US" sz="1400" b="1" dirty="0">
+                <a:solidFill>
+                  <a:srgbClr val="212121"/>
+                </a:solidFill>
+              </a:rPr>
+              <a:t>Alerts if detected</a:t>
+            </a:r>
+            <a:endParaRPr lang="en-US" sz="1400" dirty="0"/>
+          </a:p>
+        </p:txBody>
+      </p:sp>
+      <p:sp>
+        <p:nvSpPr>
+          <p:cNvPr id="20" name="Shape 18"/>
+          <p:cNvSpPr/>
+          <p:nvPr/>
+        </p:nvSpPr>
+        <p:spPr>
+          <a:xfrm>
+            <a:off x="457200" y="3293883"/>
+            <a:ext cx="8229600" cy="1745990"/>
           </a:xfrm>
           <a:prstGeom prst="rect">
             <a:avLst/>
@@ -6540,1251 +8805,376 @@
       </p:sp>
       <p:sp>
         <p:nvSpPr>
-          <p:cNvPr id="5" name="Text 3"/>
-          <p:cNvSpPr/>
-          <p:nvPr/>
-        </p:nvSpPr>
-        <p:spPr>
-          <a:xfrm>
-            <a:off x="411480" y="1233982"/>
-            <a:ext cx="2286000" cy="640534"/>
-          </a:xfrm>
-          <a:prstGeom prst="rect">
-            <a:avLst/>
-          </a:prstGeom>
-          <a:noFill/>
-          <a:ln/>
-        </p:spPr>
-        <p:txBody>
-          <a:bodyPr wrap="square" rtlCol="0" anchor="ctr"/>
+          <p:cNvPr id="21" name="Text 19"/>
+          <p:cNvSpPr/>
+          <p:nvPr/>
+        </p:nvSpPr>
+        <p:spPr>
+          <a:xfrm>
+            <a:off x="640080" y="3376430"/>
+            <a:ext cx="7863840" cy="274320"/>
+          </a:xfrm>
+          <a:prstGeom prst="rect">
+            <a:avLst/>
+          </a:prstGeom>
+          <a:noFill/>
+          <a:ln/>
+        </p:spPr>
+        <p:txBody>
+          <a:bodyPr wrap="square" rtlCol="0" anchor="ctr"/>
+          <a:lstStyle/>
+          <a:p>
+            <a:pPr marL="0" indent="0">
+              <a:buNone/>
+            </a:pPr>
+            <a:r>
+              <a:rPr lang="en-US" sz="1400" b="1" dirty="0">
+                <a:solidFill>
+                  <a:srgbClr val="1976D2"/>
+                </a:solidFill>
+              </a:rPr>
+              <a:t>Property Manager Action:</a:t>
+            </a:r>
+            <a:endParaRPr lang="en-US" sz="1400" dirty="0"/>
+          </a:p>
+        </p:txBody>
+      </p:sp>
+      <p:sp>
+        <p:nvSpPr>
+          <p:cNvPr id="22" name="Text 20"/>
+          <p:cNvSpPr/>
+          <p:nvPr/>
+        </p:nvSpPr>
+        <p:spPr>
+          <a:xfrm>
+            <a:off x="822960" y="3755398"/>
+            <a:ext cx="7498080" cy="320040"/>
+          </a:xfrm>
+          <a:prstGeom prst="rect">
+            <a:avLst/>
+          </a:prstGeom>
+          <a:noFill/>
+          <a:ln/>
+        </p:spPr>
+        <p:txBody>
+          <a:bodyPr wrap="square" rtlCol="0" anchor="ctr"/>
+          <a:lstStyle/>
+          <a:p>
+            <a:pPr marL="285750" indent="-285750">
+              <a:buFont typeface="Wingdings" panose="05000000000000000000" pitchFamily="2" charset="2"/>
+              <a:buChar char="ü"/>
+            </a:pPr>
+            <a:r>
+              <a:rPr lang="en-US" sz="1300" dirty="0">
+                <a:solidFill>
+                  <a:srgbClr val="212121"/>
+                </a:solidFill>
+              </a:rPr>
+              <a:t>If normal: 'Schedule next month'</a:t>
+            </a:r>
+            <a:endParaRPr lang="en-US" sz="1300" dirty="0"/>
+          </a:p>
+        </p:txBody>
+      </p:sp>
+      <p:sp>
+        <p:nvSpPr>
+          <p:cNvPr id="23" name="Text 21"/>
+          <p:cNvSpPr/>
+          <p:nvPr/>
+        </p:nvSpPr>
+        <p:spPr>
+          <a:xfrm>
+            <a:off x="822960" y="4166878"/>
+            <a:ext cx="7498080" cy="320040"/>
+          </a:xfrm>
+          <a:prstGeom prst="rect">
+            <a:avLst/>
+          </a:prstGeom>
+          <a:noFill/>
+          <a:ln/>
+        </p:spPr>
+        <p:txBody>
+          <a:bodyPr wrap="square" rtlCol="0" anchor="ctr"/>
+          <a:lstStyle/>
+          <a:p>
+            <a:pPr marL="285750" indent="-285750">
+              <a:buFont typeface="Wingdings" panose="05000000000000000000" pitchFamily="2" charset="2"/>
+              <a:buChar char="ü"/>
+            </a:pPr>
+            <a:r>
+              <a:rPr lang="en-US" sz="1300" dirty="0">
+                <a:solidFill>
+                  <a:srgbClr val="212121"/>
+                </a:solidFill>
+              </a:rPr>
+              <a:t>If watch zone: 'Monitor closely next visit'</a:t>
+            </a:r>
+            <a:endParaRPr lang="en-US" sz="1300" dirty="0"/>
+          </a:p>
+        </p:txBody>
+      </p:sp>
+      <p:sp>
+        <p:nvSpPr>
+          <p:cNvPr id="24" name="Text 22"/>
+          <p:cNvSpPr/>
+          <p:nvPr/>
+        </p:nvSpPr>
+        <p:spPr>
+          <a:xfrm>
+            <a:off x="822960" y="4578358"/>
+            <a:ext cx="7498080" cy="320040"/>
+          </a:xfrm>
+          <a:prstGeom prst="rect">
+            <a:avLst/>
+          </a:prstGeom>
+          <a:noFill/>
+          <a:ln/>
+        </p:spPr>
+        <p:txBody>
+          <a:bodyPr wrap="square" rtlCol="0" anchor="ctr"/>
+          <a:lstStyle/>
+          <a:p>
+            <a:pPr marL="285750" indent="-285750">
+              <a:buFont typeface="Wingdings" panose="05000000000000000000" pitchFamily="2" charset="2"/>
+              <a:buChar char="ü"/>
+            </a:pPr>
+            <a:r>
+              <a:rPr lang="en-US" sz="1300" dirty="0">
+                <a:solidFill>
+                  <a:srgbClr val="212121"/>
+                </a:solidFill>
+              </a:rPr>
+              <a:t>If alert: 'Call contractor immediately'</a:t>
+            </a:r>
+            <a:endParaRPr lang="en-US" sz="1300" dirty="0"/>
+          </a:p>
+        </p:txBody>
+      </p:sp>
+      <p:sp>
+        <p:nvSpPr>
+          <p:cNvPr id="25" name="Arrow: Right 24">
+            <a:extLst>
+              <a:ext uri="{FF2B5EF4-FFF2-40B4-BE49-F238E27FC236}">
+                <a16:creationId xmlns:a16="http://schemas.microsoft.com/office/drawing/2014/main" id="{77FD0DE4-F5A8-706E-08B6-90F8CA9CEE83}"/>
+              </a:ext>
+            </a:extLst>
+          </p:cNvPr>
+          <p:cNvSpPr/>
+          <p:nvPr/>
+        </p:nvSpPr>
+        <p:spPr>
+          <a:xfrm>
+            <a:off x="1917508" y="2772832"/>
+            <a:ext cx="377133" cy="141026"/>
+          </a:xfrm>
+          <a:prstGeom prst="rightArrow">
+            <a:avLst/>
+          </a:prstGeom>
+          <a:solidFill>
+            <a:schemeClr val="accent1">
+              <a:lumMod val="40000"/>
+              <a:lumOff val="60000"/>
+            </a:schemeClr>
+          </a:solidFill>
+          <a:ln>
+            <a:solidFill>
+              <a:srgbClr val="0070C0"/>
+            </a:solidFill>
+          </a:ln>
+        </p:spPr>
+        <p:style>
+          <a:lnRef idx="2">
+            <a:schemeClr val="accent1">
+              <a:shade val="15000"/>
+            </a:schemeClr>
+          </a:lnRef>
+          <a:fillRef idx="1">
+            <a:schemeClr val="accent1"/>
+          </a:fillRef>
+          <a:effectRef idx="0">
+            <a:schemeClr val="accent1"/>
+          </a:effectRef>
+          <a:fontRef idx="minor">
+            <a:schemeClr val="lt1"/>
+          </a:fontRef>
+        </p:style>
+        <p:txBody>
+          <a:bodyPr rtlCol="0" anchor="ctr"/>
           <a:lstStyle/>
           <a:p>
             <a:pPr algn="ctr"/>
-            <a:r>
-              <a:rPr lang="en-US" sz="1200" b="1" dirty="0">
-                <a:solidFill>
-                  <a:srgbClr val="212121"/>
-                </a:solidFill>
-              </a:rPr>
-              <a:t>SENSORS</a:t>
-            </a:r>
-            <a:r>
-              <a:rPr lang="en-US" sz="1050" b="1" dirty="0">
-                <a:solidFill>
-                  <a:srgbClr val="212121"/>
-                </a:solidFill>
-              </a:rPr>
-              <a:t>:</a:t>
-            </a:r>
-            <a:r>
-              <a:rPr lang="en-US" sz="1050" dirty="0"/>
-              <a:t> </a:t>
-            </a:r>
-          </a:p>
-          <a:p>
-            <a:pPr marL="171450" indent="-171450" algn="ctr">
-              <a:buFont typeface="Arial" panose="020B0604020202020204" pitchFamily="34" charset="0"/>
-              <a:buChar char="•"/>
-            </a:pPr>
-            <a:r>
-              <a:rPr lang="en-US" sz="1050" b="1" dirty="0">
-                <a:solidFill>
-                  <a:srgbClr val="212121"/>
-                </a:solidFill>
-              </a:rPr>
-              <a:t>Humidity</a:t>
-            </a:r>
-          </a:p>
-          <a:p>
-            <a:pPr marL="171450" indent="-171450" algn="ctr">
-              <a:buFont typeface="Arial" panose="020B0604020202020204" pitchFamily="34" charset="0"/>
-              <a:buChar char="•"/>
-            </a:pPr>
-            <a:r>
-              <a:rPr lang="en-US" sz="1050" dirty="0"/>
-              <a:t> </a:t>
-            </a:r>
-            <a:r>
-              <a:rPr lang="en-US" sz="1050" b="1" dirty="0">
-                <a:solidFill>
-                  <a:srgbClr val="212121"/>
-                </a:solidFill>
-              </a:rPr>
-              <a:t>temperature</a:t>
-            </a:r>
-            <a:r>
-              <a:rPr lang="en-US" sz="1050" dirty="0"/>
-              <a:t> </a:t>
-            </a:r>
-          </a:p>
-          <a:p>
-            <a:pPr marL="171450" indent="-171450" algn="ctr">
-              <a:buFont typeface="Arial" panose="020B0604020202020204" pitchFamily="34" charset="0"/>
-              <a:buChar char="•"/>
-            </a:pPr>
-            <a:r>
-              <a:rPr lang="en-US" sz="1050" b="1" dirty="0">
-                <a:solidFill>
-                  <a:srgbClr val="212121"/>
-                </a:solidFill>
-              </a:rPr>
-              <a:t>thermal</a:t>
-            </a:r>
-            <a:r>
-              <a:rPr lang="en-US" sz="1050" dirty="0"/>
-              <a:t> </a:t>
-            </a:r>
-          </a:p>
-          <a:p>
-            <a:pPr marL="171450" indent="-171450" algn="ctr">
-              <a:buFont typeface="Arial" panose="020B0604020202020204" pitchFamily="34" charset="0"/>
-              <a:buChar char="•"/>
-            </a:pPr>
-            <a:r>
-              <a:rPr lang="en-US" sz="1050" b="1" dirty="0">
-                <a:solidFill>
-                  <a:srgbClr val="212121"/>
-                </a:solidFill>
-              </a:rPr>
-              <a:t>GPS</a:t>
-            </a:r>
-            <a:endParaRPr lang="en-US" sz="1200" dirty="0"/>
-          </a:p>
-        </p:txBody>
-      </p:sp>
-      <p:sp>
-        <p:nvSpPr>
-          <p:cNvPr id="6" name="Shape 4"/>
-          <p:cNvSpPr/>
-          <p:nvPr/>
-        </p:nvSpPr>
-        <p:spPr>
-          <a:xfrm>
-            <a:off x="3200400" y="1097279"/>
-            <a:ext cx="2286000" cy="913941"/>
-          </a:xfrm>
-          <a:prstGeom prst="rect">
+            <a:endParaRPr lang="en-AU"/>
+          </a:p>
+        </p:txBody>
+      </p:sp>
+      <p:sp>
+        <p:nvSpPr>
+          <p:cNvPr id="26" name="Arrow: Right 25">
+            <a:extLst>
+              <a:ext uri="{FF2B5EF4-FFF2-40B4-BE49-F238E27FC236}">
+                <a16:creationId xmlns:a16="http://schemas.microsoft.com/office/drawing/2014/main" id="{57B853FE-73BC-4C60-C75B-CC24BC1E3B3E}"/>
+              </a:ext>
+            </a:extLst>
+          </p:cNvPr>
+          <p:cNvSpPr/>
+          <p:nvPr/>
+        </p:nvSpPr>
+        <p:spPr>
+          <a:xfrm>
+            <a:off x="1917509" y="2203148"/>
+            <a:ext cx="377133" cy="141026"/>
+          </a:xfrm>
+          <a:prstGeom prst="rightArrow">
             <a:avLst/>
           </a:prstGeom>
           <a:solidFill>
-            <a:srgbClr val="C8E6C9"/>
+            <a:schemeClr val="accent1">
+              <a:lumMod val="40000"/>
+              <a:lumOff val="60000"/>
+            </a:schemeClr>
           </a:solidFill>
-          <a:ln w="25400">
+          <a:ln>
             <a:solidFill>
-              <a:srgbClr val="1976D2"/>
+              <a:srgbClr val="0070C0"/>
             </a:solidFill>
-            <a:prstDash val="solid"/>
           </a:ln>
         </p:spPr>
-        <p:txBody>
-          <a:bodyPr/>
-          <a:lstStyle/>
-          <a:p>
+        <p:style>
+          <a:lnRef idx="2">
+            <a:schemeClr val="accent1">
+              <a:shade val="15000"/>
+            </a:schemeClr>
+          </a:lnRef>
+          <a:fillRef idx="1">
+            <a:schemeClr val="accent1"/>
+          </a:fillRef>
+          <a:effectRef idx="0">
+            <a:schemeClr val="accent1"/>
+          </a:effectRef>
+          <a:fontRef idx="minor">
+            <a:schemeClr val="lt1"/>
+          </a:fontRef>
+        </p:style>
+        <p:txBody>
+          <a:bodyPr rtlCol="0" anchor="ctr"/>
+          <a:lstStyle/>
+          <a:p>
+            <a:pPr algn="ctr"/>
             <a:endParaRPr lang="en-AU"/>
           </a:p>
         </p:txBody>
       </p:sp>
       <p:sp>
         <p:nvSpPr>
-          <p:cNvPr id="7" name="Text 5"/>
-          <p:cNvSpPr/>
-          <p:nvPr/>
-        </p:nvSpPr>
-        <p:spPr>
-          <a:xfrm>
-            <a:off x="3291840" y="1237539"/>
-            <a:ext cx="2103120" cy="548640"/>
-          </a:xfrm>
-          <a:prstGeom prst="rect">
-            <a:avLst/>
-          </a:prstGeom>
-          <a:noFill/>
-          <a:ln/>
-        </p:spPr>
-        <p:txBody>
-          <a:bodyPr wrap="square" rtlCol="0" anchor="ctr"/>
-          <a:lstStyle/>
-          <a:p>
-            <a:pPr marL="0" indent="0" algn="ctr">
-              <a:buNone/>
-            </a:pPr>
-            <a:r>
-              <a:rPr lang="en-US" sz="1200" b="1" dirty="0">
-                <a:solidFill>
-                  <a:srgbClr val="212121"/>
-                </a:solidFill>
-              </a:rPr>
-              <a:t>PROCESSING:</a:t>
-            </a:r>
-            <a:endParaRPr lang="en-US" sz="1200" dirty="0"/>
-          </a:p>
-          <a:p>
-            <a:pPr marL="171450" indent="-171450" algn="ctr">
-              <a:buFont typeface="Arial" panose="020B0604020202020204" pitchFamily="34" charset="0"/>
-              <a:buChar char="•"/>
-            </a:pPr>
-            <a:r>
-              <a:rPr lang="en-US" sz="1050" b="1" dirty="0">
-                <a:solidFill>
-                  <a:srgbClr val="212121"/>
-                </a:solidFill>
-              </a:rPr>
-              <a:t>Data Collection</a:t>
-            </a:r>
-            <a:endParaRPr lang="en-US" sz="1050" dirty="0"/>
-          </a:p>
-          <a:p>
-            <a:pPr marL="171450" indent="-171450" algn="ctr">
-              <a:buFont typeface="Arial" panose="020B0604020202020204" pitchFamily="34" charset="0"/>
-              <a:buChar char="•"/>
-            </a:pPr>
-            <a:r>
-              <a:rPr lang="en-US" sz="1050" b="1" dirty="0">
-                <a:solidFill>
-                  <a:srgbClr val="212121"/>
-                </a:solidFill>
-              </a:rPr>
-              <a:t>Baseline Learning</a:t>
-            </a:r>
-            <a:endParaRPr lang="en-US" sz="1050" dirty="0"/>
-          </a:p>
-          <a:p>
-            <a:pPr marL="171450" indent="-171450" algn="ctr">
-              <a:buFont typeface="Arial" panose="020B0604020202020204" pitchFamily="34" charset="0"/>
-              <a:buChar char="•"/>
-            </a:pPr>
-            <a:r>
-              <a:rPr lang="en-US" sz="1050" b="1" dirty="0">
-                <a:solidFill>
-                  <a:srgbClr val="212121"/>
-                </a:solidFill>
-              </a:rPr>
-              <a:t>Trend Analysis</a:t>
-            </a:r>
-            <a:endParaRPr lang="en-US" sz="1050" dirty="0"/>
-          </a:p>
-        </p:txBody>
-      </p:sp>
-      <p:sp>
-        <p:nvSpPr>
-          <p:cNvPr id="8" name="Shape 6"/>
-          <p:cNvSpPr/>
-          <p:nvPr/>
-        </p:nvSpPr>
-        <p:spPr>
-          <a:xfrm>
-            <a:off x="5943600" y="1097280"/>
-            <a:ext cx="2286000" cy="914400"/>
-          </a:xfrm>
-          <a:prstGeom prst="rect">
+          <p:cNvPr id="27" name="Arrow: Right 26">
+            <a:extLst>
+              <a:ext uri="{FF2B5EF4-FFF2-40B4-BE49-F238E27FC236}">
+                <a16:creationId xmlns:a16="http://schemas.microsoft.com/office/drawing/2014/main" id="{B161943B-5CA7-D732-088E-DBD2A4541D52}"/>
+              </a:ext>
+            </a:extLst>
+          </p:cNvPr>
+          <p:cNvSpPr/>
+          <p:nvPr/>
+        </p:nvSpPr>
+        <p:spPr>
+          <a:xfrm>
+            <a:off x="1919558" y="1619628"/>
+            <a:ext cx="377133" cy="141026"/>
+          </a:xfrm>
+          <a:prstGeom prst="rightArrow">
             <a:avLst/>
           </a:prstGeom>
           <a:solidFill>
-            <a:srgbClr val="FFE0B2"/>
+            <a:schemeClr val="accent1">
+              <a:lumMod val="40000"/>
+              <a:lumOff val="60000"/>
+            </a:schemeClr>
           </a:solidFill>
-          <a:ln w="25400">
+          <a:ln>
             <a:solidFill>
-              <a:srgbClr val="1976D2"/>
+              <a:srgbClr val="0070C0"/>
             </a:solidFill>
-            <a:prstDash val="solid"/>
           </a:ln>
         </p:spPr>
-        <p:txBody>
-          <a:bodyPr/>
-          <a:lstStyle/>
-          <a:p>
+        <p:style>
+          <a:lnRef idx="2">
+            <a:schemeClr val="accent1">
+              <a:shade val="15000"/>
+            </a:schemeClr>
+          </a:lnRef>
+          <a:fillRef idx="1">
+            <a:schemeClr val="accent1"/>
+          </a:fillRef>
+          <a:effectRef idx="0">
+            <a:schemeClr val="accent1"/>
+          </a:effectRef>
+          <a:fontRef idx="minor">
+            <a:schemeClr val="lt1"/>
+          </a:fontRef>
+        </p:style>
+        <p:txBody>
+          <a:bodyPr rtlCol="0" anchor="ctr"/>
+          <a:lstStyle/>
+          <a:p>
+            <a:pPr algn="ctr"/>
             <a:endParaRPr lang="en-AU"/>
           </a:p>
         </p:txBody>
       </p:sp>
       <p:sp>
         <p:nvSpPr>
-          <p:cNvPr id="9" name="Text 7"/>
-          <p:cNvSpPr/>
-          <p:nvPr/>
-        </p:nvSpPr>
-        <p:spPr>
-          <a:xfrm>
-            <a:off x="6035040" y="1223011"/>
-            <a:ext cx="2103120" cy="548640"/>
-          </a:xfrm>
-          <a:prstGeom prst="rect">
-            <a:avLst/>
-          </a:prstGeom>
-          <a:noFill/>
-          <a:ln/>
-        </p:spPr>
-        <p:txBody>
-          <a:bodyPr wrap="square" rtlCol="0" anchor="ctr"/>
-          <a:lstStyle/>
-          <a:p>
-            <a:pPr marL="0" indent="0" algn="ctr">
-              <a:buNone/>
-            </a:pPr>
-            <a:r>
-              <a:rPr lang="en-US" sz="1200" b="1" dirty="0">
-                <a:solidFill>
-                  <a:srgbClr val="212121"/>
-                </a:solidFill>
-              </a:rPr>
-              <a:t>OUTPUT:</a:t>
-            </a:r>
-            <a:endParaRPr lang="en-US" sz="1200" dirty="0"/>
-          </a:p>
-          <a:p>
-            <a:pPr marL="171450" indent="-171450" algn="ctr">
-              <a:buFont typeface="Arial" panose="020B0604020202020204" pitchFamily="34" charset="0"/>
-              <a:buChar char="•"/>
-            </a:pPr>
-            <a:r>
-              <a:rPr lang="en-US" sz="1050" b="1" dirty="0">
-                <a:solidFill>
-                  <a:srgbClr val="212121"/>
-                </a:solidFill>
-              </a:rPr>
-              <a:t>Alerts</a:t>
-            </a:r>
-            <a:endParaRPr lang="en-US" sz="1050" dirty="0"/>
-          </a:p>
-          <a:p>
-            <a:pPr marL="171450" indent="-171450" algn="ctr">
-              <a:buFont typeface="Arial" panose="020B0604020202020204" pitchFamily="34" charset="0"/>
-              <a:buChar char="•"/>
-            </a:pPr>
-            <a:r>
-              <a:rPr lang="en-US" sz="1050" b="1" dirty="0">
-                <a:solidFill>
-                  <a:srgbClr val="212121"/>
-                </a:solidFill>
-              </a:rPr>
-              <a:t>Reports</a:t>
-            </a:r>
-          </a:p>
-          <a:p>
-            <a:pPr marL="171450" indent="-171450" algn="ctr">
-              <a:buFont typeface="Arial" panose="020B0604020202020204" pitchFamily="34" charset="0"/>
-              <a:buChar char="•"/>
-            </a:pPr>
-            <a:r>
-              <a:rPr lang="en-US" sz="1050" b="1" dirty="0">
-                <a:solidFill>
-                  <a:srgbClr val="212121"/>
-                </a:solidFill>
-              </a:rPr>
-              <a:t>Dashboard</a:t>
-            </a:r>
-            <a:endParaRPr lang="en-US" sz="1050" dirty="0"/>
-          </a:p>
-        </p:txBody>
-      </p:sp>
-      <p:sp>
-        <p:nvSpPr>
-          <p:cNvPr id="10" name="Shape 8"/>
-          <p:cNvSpPr/>
-          <p:nvPr/>
-        </p:nvSpPr>
-        <p:spPr>
-          <a:xfrm>
-            <a:off x="2743200" y="1572041"/>
-            <a:ext cx="457200" cy="0"/>
-          </a:xfrm>
-          <a:prstGeom prst="line">
-            <a:avLst/>
-          </a:prstGeom>
-          <a:noFill/>
-          <a:ln w="25400">
+          <p:cNvPr id="28" name="Arrow: Right 27">
+            <a:extLst>
+              <a:ext uri="{FF2B5EF4-FFF2-40B4-BE49-F238E27FC236}">
+                <a16:creationId xmlns:a16="http://schemas.microsoft.com/office/drawing/2014/main" id="{DEF16E7C-276B-4CF7-AD67-8BF6A8FBD962}"/>
+              </a:ext>
+            </a:extLst>
+          </p:cNvPr>
+          <p:cNvSpPr/>
+          <p:nvPr/>
+        </p:nvSpPr>
+        <p:spPr>
+          <a:xfrm>
+            <a:off x="1920239" y="1030025"/>
+            <a:ext cx="377133" cy="141026"/>
+          </a:xfrm>
+          <a:prstGeom prst="rightArrow">
+            <a:avLst/>
+          </a:prstGeom>
+          <a:solidFill>
+            <a:schemeClr val="accent1">
+              <a:lumMod val="40000"/>
+              <a:lumOff val="60000"/>
+            </a:schemeClr>
+          </a:solidFill>
+          <a:ln>
             <a:solidFill>
-              <a:srgbClr val="1976D2"/>
+              <a:srgbClr val="0070C0"/>
             </a:solidFill>
-            <a:prstDash val="solid"/>
-            <a:tailEnd type="triangle"/>
           </a:ln>
         </p:spPr>
-        <p:txBody>
-          <a:bodyPr/>
-          <a:lstStyle/>
-          <a:p>
+        <p:style>
+          <a:lnRef idx="2">
+            <a:schemeClr val="accent1">
+              <a:shade val="15000"/>
+            </a:schemeClr>
+          </a:lnRef>
+          <a:fillRef idx="1">
+            <a:schemeClr val="accent1"/>
+          </a:fillRef>
+          <a:effectRef idx="0">
+            <a:schemeClr val="accent1"/>
+          </a:effectRef>
+          <a:fontRef idx="minor">
+            <a:schemeClr val="lt1"/>
+          </a:fontRef>
+        </p:style>
+        <p:txBody>
+          <a:bodyPr rtlCol="0" anchor="ctr"/>
+          <a:lstStyle/>
+          <a:p>
+            <a:pPr algn="ctr"/>
             <a:endParaRPr lang="en-AU"/>
-          </a:p>
-        </p:txBody>
-      </p:sp>
-      <p:sp>
-        <p:nvSpPr>
-          <p:cNvPr id="11" name="Shape 9"/>
-          <p:cNvSpPr/>
-          <p:nvPr/>
-        </p:nvSpPr>
-        <p:spPr>
-          <a:xfrm>
-            <a:off x="5486400" y="1572041"/>
-            <a:ext cx="457200" cy="0"/>
-          </a:xfrm>
-          <a:prstGeom prst="line">
-            <a:avLst/>
-          </a:prstGeom>
-          <a:noFill/>
-          <a:ln w="25400">
-            <a:solidFill>
-              <a:srgbClr val="1976D2"/>
-            </a:solidFill>
-            <a:prstDash val="solid"/>
-            <a:tailEnd type="triangle"/>
-          </a:ln>
-        </p:spPr>
-        <p:txBody>
-          <a:bodyPr/>
-          <a:lstStyle/>
-          <a:p>
-            <a:endParaRPr lang="en-AU"/>
-          </a:p>
-        </p:txBody>
-      </p:sp>
-      <p:sp>
-        <p:nvSpPr>
-          <p:cNvPr id="12" name="Text 10"/>
-          <p:cNvSpPr/>
-          <p:nvPr/>
-        </p:nvSpPr>
-        <p:spPr>
-          <a:xfrm>
-            <a:off x="457200" y="2103120"/>
-            <a:ext cx="8229600" cy="274320"/>
-          </a:xfrm>
-          <a:prstGeom prst="rect">
-            <a:avLst/>
-          </a:prstGeom>
-          <a:noFill/>
-          <a:ln/>
-        </p:spPr>
-        <p:txBody>
-          <a:bodyPr wrap="square" rtlCol="0" anchor="ctr"/>
-          <a:lstStyle/>
-          <a:p>
-            <a:pPr marL="0" indent="0">
-              <a:buNone/>
-            </a:pPr>
-            <a:r>
-              <a:rPr lang="en-US" sz="1400" b="1" dirty="0">
-                <a:solidFill>
-                  <a:srgbClr val="212121"/>
-                </a:solidFill>
-              </a:rPr>
-              <a:t>Continuous cycle:</a:t>
-            </a:r>
-            <a:endParaRPr lang="en-US" sz="1400" dirty="0"/>
-          </a:p>
-        </p:txBody>
-      </p:sp>
-      <p:sp>
-        <p:nvSpPr>
-          <p:cNvPr id="13" name="Text 11"/>
-          <p:cNvSpPr/>
-          <p:nvPr/>
-        </p:nvSpPr>
-        <p:spPr>
-          <a:xfrm>
-            <a:off x="731520" y="2468880"/>
-            <a:ext cx="7680960" cy="320040"/>
-          </a:xfrm>
-          <a:prstGeom prst="rect">
-            <a:avLst/>
-          </a:prstGeom>
-          <a:noFill/>
-          <a:ln/>
-        </p:spPr>
-        <p:txBody>
-          <a:bodyPr wrap="square" rtlCol="0" anchor="ctr"/>
-          <a:lstStyle/>
-          <a:p>
-            <a:pPr marL="0" indent="0">
-              <a:buNone/>
-            </a:pPr>
-            <a:r>
-              <a:rPr lang="en-US" sz="1300" dirty="0">
-                <a:solidFill>
-                  <a:srgbClr val="212121"/>
-                </a:solidFill>
-              </a:rPr>
-              <a:t>1. Robot collects sensor data every 10 seconds</a:t>
-            </a:r>
-            <a:endParaRPr lang="en-US" sz="1300" dirty="0"/>
-          </a:p>
-        </p:txBody>
-      </p:sp>
-      <p:sp>
-        <p:nvSpPr>
-          <p:cNvPr id="14" name="Text 12"/>
-          <p:cNvSpPr/>
-          <p:nvPr/>
-        </p:nvSpPr>
-        <p:spPr>
-          <a:xfrm>
-            <a:off x="731520" y="2903219"/>
-            <a:ext cx="7680960" cy="320040"/>
-          </a:xfrm>
-          <a:prstGeom prst="rect">
-            <a:avLst/>
-          </a:prstGeom>
-          <a:noFill/>
-          <a:ln/>
-        </p:spPr>
-        <p:txBody>
-          <a:bodyPr wrap="square" rtlCol="0" anchor="ctr"/>
-          <a:lstStyle/>
-          <a:p>
-            <a:pPr marL="0" indent="0">
-              <a:buNone/>
-            </a:pPr>
-            <a:r>
-              <a:rPr lang="en-US" sz="1300" dirty="0">
-                <a:solidFill>
-                  <a:srgbClr val="212121"/>
-                </a:solidFill>
-              </a:rPr>
-              <a:t>2. Data stored locally (SD card) &amp; uploaded (via </a:t>
-            </a:r>
-            <a:r>
-              <a:rPr lang="en-US" sz="1300" dirty="0" err="1">
-                <a:solidFill>
-                  <a:srgbClr val="212121"/>
-                </a:solidFill>
-              </a:rPr>
-              <a:t>WiFi</a:t>
-            </a:r>
-            <a:r>
-              <a:rPr lang="en-US" sz="1300" dirty="0">
-                <a:solidFill>
-                  <a:srgbClr val="212121"/>
-                </a:solidFill>
-              </a:rPr>
-              <a:t>) to remote data base</a:t>
-            </a:r>
-            <a:endParaRPr lang="en-US" sz="1300" dirty="0"/>
-          </a:p>
-        </p:txBody>
-      </p:sp>
-      <p:sp>
-        <p:nvSpPr>
-          <p:cNvPr id="15" name="Text 13"/>
-          <p:cNvSpPr/>
-          <p:nvPr/>
-        </p:nvSpPr>
-        <p:spPr>
-          <a:xfrm>
-            <a:off x="731520" y="3314699"/>
-            <a:ext cx="7680960" cy="320040"/>
-          </a:xfrm>
-          <a:prstGeom prst="rect">
-            <a:avLst/>
-          </a:prstGeom>
-          <a:noFill/>
-          <a:ln/>
-        </p:spPr>
-        <p:txBody>
-          <a:bodyPr wrap="square" rtlCol="0" anchor="ctr"/>
-          <a:lstStyle/>
-          <a:p>
-            <a:pPr marL="0" indent="0">
-              <a:buNone/>
-            </a:pPr>
-            <a:r>
-              <a:rPr lang="en-US" sz="1300" dirty="0">
-                <a:solidFill>
-                  <a:srgbClr val="212121"/>
-                </a:solidFill>
-              </a:rPr>
-              <a:t>3. System compares current to baseline</a:t>
-            </a:r>
-            <a:endParaRPr lang="en-US" sz="1300" dirty="0"/>
-          </a:p>
-        </p:txBody>
-      </p:sp>
-      <p:sp>
-        <p:nvSpPr>
-          <p:cNvPr id="16" name="Text 14"/>
-          <p:cNvSpPr/>
-          <p:nvPr/>
-        </p:nvSpPr>
-        <p:spPr>
-          <a:xfrm>
-            <a:off x="731520" y="3726179"/>
-            <a:ext cx="7680960" cy="320040"/>
-          </a:xfrm>
-          <a:prstGeom prst="rect">
-            <a:avLst/>
-          </a:prstGeom>
-          <a:noFill/>
-          <a:ln/>
-        </p:spPr>
-        <p:txBody>
-          <a:bodyPr wrap="square" rtlCol="0" anchor="ctr"/>
-          <a:lstStyle/>
-          <a:p>
-            <a:pPr marL="0" indent="0">
-              <a:buNone/>
-            </a:pPr>
-            <a:r>
-              <a:rPr lang="en-US" sz="1300" dirty="0">
-                <a:solidFill>
-                  <a:srgbClr val="212121"/>
-                </a:solidFill>
-              </a:rPr>
-              <a:t>4. Detects anomalies, Trends &amp; generates alerts</a:t>
-            </a:r>
-            <a:endParaRPr lang="en-US" sz="1300" dirty="0"/>
-          </a:p>
-        </p:txBody>
-      </p:sp>
-      <p:sp>
-        <p:nvSpPr>
-          <p:cNvPr id="17" name="Text 15"/>
-          <p:cNvSpPr/>
-          <p:nvPr/>
-        </p:nvSpPr>
-        <p:spPr>
-          <a:xfrm>
-            <a:off x="731520" y="4137659"/>
-            <a:ext cx="7680960" cy="320040"/>
-          </a:xfrm>
-          <a:prstGeom prst="rect">
-            <a:avLst/>
-          </a:prstGeom>
-          <a:noFill/>
-          <a:ln/>
-        </p:spPr>
-        <p:txBody>
-          <a:bodyPr wrap="square" rtlCol="0" anchor="ctr"/>
-          <a:lstStyle/>
-          <a:p>
-            <a:pPr marL="0" indent="0">
-              <a:buNone/>
-            </a:pPr>
-            <a:r>
-              <a:rPr lang="en-US" sz="1300" dirty="0">
-                <a:solidFill>
-                  <a:srgbClr val="212121"/>
-                </a:solidFill>
-              </a:rPr>
-              <a:t>5. Property manager receives report and takes action</a:t>
-            </a:r>
-            <a:endParaRPr lang="en-US" sz="1300" dirty="0"/>
-          </a:p>
-        </p:txBody>
-      </p:sp>
-    </p:spTree>
-  </p:cSld>
-  <p:clrMapOvr>
-    <a:masterClrMapping/>
-  </p:clrMapOvr>
-</p:sld>
-</file>
-
-<file path=ppt/slides/slide6.xml><?xml version="1.0" encoding="utf-8"?>
-<p:sld xmlns:a="http://schemas.openxmlformats.org/drawingml/2006/main" xmlns:r="http://schemas.openxmlformats.org/officeDocument/2006/relationships" xmlns:p="http://schemas.openxmlformats.org/presentationml/2006/main">
-  <p:cSld name="Slide 6">
-    <p:bg>
-      <p:bgPr>
-        <a:solidFill>
-          <a:srgbClr val="FFFFFF"/>
-        </a:solidFill>
-        <a:effectLst/>
-      </p:bgPr>
-    </p:bg>
-    <p:spTree>
-      <p:nvGrpSpPr>
-        <p:cNvPr id="1" name=""/>
-        <p:cNvGrpSpPr/>
-        <p:nvPr/>
-      </p:nvGrpSpPr>
-      <p:grpSpPr>
-        <a:xfrm>
-          <a:off x="0" y="0"/>
-          <a:ext cx="0" cy="0"/>
-          <a:chOff x="0" y="0"/>
-          <a:chExt cx="0" cy="0"/>
-        </a:xfrm>
-      </p:grpSpPr>
-      <p:sp>
-        <p:nvSpPr>
-          <p:cNvPr id="2" name="Shape 0"/>
-          <p:cNvSpPr/>
-          <p:nvPr/>
-        </p:nvSpPr>
-        <p:spPr>
-          <a:xfrm>
-            <a:off x="0" y="0"/>
-            <a:ext cx="9144000" cy="731520"/>
-          </a:xfrm>
-          <a:prstGeom prst="rect">
-            <a:avLst/>
-          </a:prstGeom>
-          <a:solidFill>
-            <a:srgbClr val="1976D2"/>
-          </a:solidFill>
-          <a:ln w="12700">
-            <a:solidFill>
-              <a:srgbClr val="1976D2"/>
-            </a:solidFill>
-            <a:prstDash val="solid"/>
-          </a:ln>
-        </p:spPr>
-        <p:txBody>
-          <a:bodyPr/>
-          <a:lstStyle/>
-          <a:p>
-            <a:endParaRPr lang="en-AU"/>
-          </a:p>
-        </p:txBody>
-      </p:sp>
-      <p:sp>
-        <p:nvSpPr>
-          <p:cNvPr id="3" name="Text 1"/>
-          <p:cNvSpPr/>
-          <p:nvPr/>
-        </p:nvSpPr>
-        <p:spPr>
-          <a:xfrm>
-            <a:off x="274320" y="45720"/>
-            <a:ext cx="8595360" cy="640080"/>
-          </a:xfrm>
-          <a:prstGeom prst="rect">
-            <a:avLst/>
-          </a:prstGeom>
-          <a:noFill/>
-          <a:ln/>
-        </p:spPr>
-        <p:txBody>
-          <a:bodyPr wrap="square" rtlCol="0" anchor="ctr"/>
-          <a:lstStyle/>
-          <a:p>
-            <a:pPr marL="0" indent="0" algn="l">
-              <a:buNone/>
-            </a:pPr>
-            <a:r>
-              <a:rPr lang="en-US" sz="4000" b="1" dirty="0">
-                <a:solidFill>
-                  <a:srgbClr val="FFFFFF"/>
-                </a:solidFill>
-              </a:rPr>
-              <a:t>Hardware Components</a:t>
-            </a:r>
-            <a:endParaRPr lang="en-US" sz="4000" dirty="0"/>
-          </a:p>
-        </p:txBody>
-      </p:sp>
-      <p:sp>
-        <p:nvSpPr>
-          <p:cNvPr id="4" name="Shape 2"/>
-          <p:cNvSpPr/>
-          <p:nvPr/>
-        </p:nvSpPr>
-        <p:spPr>
-          <a:xfrm>
-            <a:off x="365760" y="1164650"/>
-            <a:ext cx="4114800" cy="2408096"/>
-          </a:xfrm>
-          <a:prstGeom prst="rect">
-            <a:avLst/>
-          </a:prstGeom>
-          <a:solidFill>
-            <a:srgbClr val="E3F2FD"/>
-          </a:solidFill>
-          <a:ln w="25400">
-            <a:solidFill>
-              <a:srgbClr val="1976D2"/>
-            </a:solidFill>
-            <a:prstDash val="solid"/>
-          </a:ln>
-        </p:spPr>
-        <p:txBody>
-          <a:bodyPr/>
-          <a:lstStyle/>
-          <a:p>
-            <a:endParaRPr lang="en-AU"/>
-          </a:p>
-        </p:txBody>
-      </p:sp>
-      <p:sp>
-        <p:nvSpPr>
-          <p:cNvPr id="5" name="Text 3"/>
-          <p:cNvSpPr/>
-          <p:nvPr/>
-        </p:nvSpPr>
-        <p:spPr>
-          <a:xfrm>
-            <a:off x="548640" y="1280160"/>
-            <a:ext cx="3931920" cy="320040"/>
-          </a:xfrm>
-          <a:prstGeom prst="rect">
-            <a:avLst/>
-          </a:prstGeom>
-          <a:noFill/>
-          <a:ln/>
-        </p:spPr>
-        <p:txBody>
-          <a:bodyPr wrap="square" rtlCol="0" anchor="ctr"/>
-          <a:lstStyle/>
-          <a:p>
-            <a:pPr marL="0" indent="0">
-              <a:buNone/>
-            </a:pPr>
-            <a:r>
-              <a:rPr lang="en-US" sz="1600" b="1" dirty="0">
-                <a:solidFill>
-                  <a:srgbClr val="1976D2"/>
-                </a:solidFill>
-              </a:rPr>
-              <a:t>ROBOT CHASSIS</a:t>
-            </a:r>
-            <a:endParaRPr lang="en-US" sz="1600" dirty="0"/>
-          </a:p>
-        </p:txBody>
-      </p:sp>
-      <p:sp>
-        <p:nvSpPr>
-          <p:cNvPr id="6" name="Text 4"/>
-          <p:cNvSpPr/>
-          <p:nvPr/>
-        </p:nvSpPr>
-        <p:spPr>
-          <a:xfrm>
-            <a:off x="731520" y="1737360"/>
-            <a:ext cx="3657600" cy="320040"/>
-          </a:xfrm>
-          <a:prstGeom prst="rect">
-            <a:avLst/>
-          </a:prstGeom>
-          <a:noFill/>
-          <a:ln/>
-        </p:spPr>
-        <p:txBody>
-          <a:bodyPr wrap="square" rtlCol="0" anchor="ctr"/>
-          <a:lstStyle/>
-          <a:p>
-            <a:pPr marL="0" indent="0">
-              <a:buNone/>
-            </a:pPr>
-            <a:r>
-              <a:rPr lang="en-US" sz="1300" dirty="0">
-                <a:solidFill>
-                  <a:srgbClr val="212121"/>
-                </a:solidFill>
-              </a:rPr>
-              <a:t>🤖 Robot Body</a:t>
-            </a:r>
-            <a:endParaRPr lang="en-US" sz="1300" dirty="0"/>
-          </a:p>
-        </p:txBody>
-      </p:sp>
-      <p:sp>
-        <p:nvSpPr>
-          <p:cNvPr id="7" name="Text 5"/>
-          <p:cNvSpPr/>
-          <p:nvPr/>
-        </p:nvSpPr>
-        <p:spPr>
-          <a:xfrm>
-            <a:off x="731520" y="2194560"/>
-            <a:ext cx="3657600" cy="320040"/>
-          </a:xfrm>
-          <a:prstGeom prst="rect">
-            <a:avLst/>
-          </a:prstGeom>
-          <a:noFill/>
-          <a:ln/>
-        </p:spPr>
-        <p:txBody>
-          <a:bodyPr wrap="square" rtlCol="0" anchor="ctr"/>
-          <a:lstStyle/>
-          <a:p>
-            <a:pPr marL="0" indent="0">
-              <a:buNone/>
-            </a:pPr>
-            <a:r>
-              <a:rPr lang="en-US" sz="1300" dirty="0">
-                <a:solidFill>
-                  <a:srgbClr val="212121"/>
-                </a:solidFill>
-              </a:rPr>
-              <a:t>🔋 4-6 hour battery</a:t>
-            </a:r>
-            <a:endParaRPr lang="en-US" sz="1300" dirty="0"/>
-          </a:p>
-        </p:txBody>
-      </p:sp>
-      <p:sp>
-        <p:nvSpPr>
-          <p:cNvPr id="8" name="Text 6"/>
-          <p:cNvSpPr/>
-          <p:nvPr/>
-        </p:nvSpPr>
-        <p:spPr>
-          <a:xfrm>
-            <a:off x="731520" y="2651760"/>
-            <a:ext cx="3657600" cy="320040"/>
-          </a:xfrm>
-          <a:prstGeom prst="rect">
-            <a:avLst/>
-          </a:prstGeom>
-          <a:noFill/>
-          <a:ln/>
-        </p:spPr>
-        <p:txBody>
-          <a:bodyPr wrap="square" rtlCol="0" anchor="ctr"/>
-          <a:lstStyle/>
-          <a:p>
-            <a:pPr marL="0" indent="0">
-              <a:buNone/>
-            </a:pPr>
-            <a:r>
-              <a:rPr lang="en-US" sz="1300" dirty="0">
-                <a:solidFill>
-                  <a:srgbClr val="212121"/>
-                </a:solidFill>
-              </a:rPr>
-              <a:t>⚙️ Motor control</a:t>
-            </a:r>
-            <a:endParaRPr lang="en-US" sz="1300" dirty="0"/>
-          </a:p>
-        </p:txBody>
-      </p:sp>
-      <p:sp>
-        <p:nvSpPr>
-          <p:cNvPr id="9" name="Text 7"/>
-          <p:cNvSpPr/>
-          <p:nvPr/>
-        </p:nvSpPr>
-        <p:spPr>
-          <a:xfrm>
-            <a:off x="731520" y="3108960"/>
-            <a:ext cx="3657600" cy="320040"/>
-          </a:xfrm>
-          <a:prstGeom prst="rect">
-            <a:avLst/>
-          </a:prstGeom>
-          <a:noFill/>
-          <a:ln/>
-        </p:spPr>
-        <p:txBody>
-          <a:bodyPr wrap="square" rtlCol="0" anchor="ctr"/>
-          <a:lstStyle/>
-          <a:p>
-            <a:pPr marL="0" indent="0">
-              <a:buNone/>
-            </a:pPr>
-            <a:r>
-              <a:rPr lang="en-US" sz="1300" dirty="0">
-                <a:solidFill>
-                  <a:srgbClr val="212121"/>
-                </a:solidFill>
-              </a:rPr>
-              <a:t>📡WIFI Capable Controller</a:t>
-            </a:r>
-            <a:endParaRPr lang="en-US" sz="1300" dirty="0"/>
-          </a:p>
-        </p:txBody>
-      </p:sp>
-      <p:sp>
-        <p:nvSpPr>
-          <p:cNvPr id="10" name="Text 8"/>
-          <p:cNvSpPr/>
-          <p:nvPr/>
-        </p:nvSpPr>
-        <p:spPr>
-          <a:xfrm>
-            <a:off x="731520" y="3566160"/>
-            <a:ext cx="3657600" cy="320040"/>
-          </a:xfrm>
-          <a:prstGeom prst="rect">
-            <a:avLst/>
-          </a:prstGeom>
-          <a:noFill/>
-          <a:ln/>
-        </p:spPr>
-        <p:txBody>
-          <a:bodyPr wrap="square" rtlCol="0" anchor="ctr"/>
-          <a:lstStyle/>
-          <a:p>
-            <a:pPr marL="0" indent="0">
-              <a:buNone/>
-            </a:pPr>
-            <a:endParaRPr lang="en-US" sz="1300" dirty="0"/>
-          </a:p>
-        </p:txBody>
-      </p:sp>
-      <p:sp>
-        <p:nvSpPr>
-          <p:cNvPr id="11" name="Shape 9"/>
-          <p:cNvSpPr/>
-          <p:nvPr/>
-        </p:nvSpPr>
-        <p:spPr>
-          <a:xfrm>
-            <a:off x="4754880" y="1158065"/>
-            <a:ext cx="3931920" cy="2408096"/>
-          </a:xfrm>
-          <a:prstGeom prst="rect">
-            <a:avLst/>
-          </a:prstGeom>
-          <a:solidFill>
-            <a:srgbClr val="C8E6C9"/>
-          </a:solidFill>
-          <a:ln w="25400">
-            <a:solidFill>
-              <a:srgbClr val="1976D2"/>
-            </a:solidFill>
-            <a:prstDash val="solid"/>
-          </a:ln>
-        </p:spPr>
-        <p:txBody>
-          <a:bodyPr/>
-          <a:lstStyle/>
-          <a:p>
-            <a:endParaRPr lang="en-AU"/>
-          </a:p>
-        </p:txBody>
-      </p:sp>
-      <p:sp>
-        <p:nvSpPr>
-          <p:cNvPr id="12" name="Text 10"/>
-          <p:cNvSpPr/>
-          <p:nvPr/>
-        </p:nvSpPr>
-        <p:spPr>
-          <a:xfrm>
-            <a:off x="4846320" y="1280160"/>
-            <a:ext cx="3657600" cy="320040"/>
-          </a:xfrm>
-          <a:prstGeom prst="rect">
-            <a:avLst/>
-          </a:prstGeom>
-          <a:noFill/>
-          <a:ln/>
-        </p:spPr>
-        <p:txBody>
-          <a:bodyPr wrap="square" rtlCol="0" anchor="ctr"/>
-          <a:lstStyle/>
-          <a:p>
-            <a:pPr marL="0" indent="0">
-              <a:buNone/>
-            </a:pPr>
-            <a:r>
-              <a:rPr lang="en-US" sz="1600" b="1" dirty="0">
-                <a:solidFill>
-                  <a:srgbClr val="1976D2"/>
-                </a:solidFill>
-              </a:rPr>
-              <a:t>SENSORS</a:t>
-            </a:r>
-            <a:endParaRPr lang="en-US" sz="1600" dirty="0"/>
-          </a:p>
-        </p:txBody>
-      </p:sp>
-      <p:sp>
-        <p:nvSpPr>
-          <p:cNvPr id="13" name="Text 11"/>
-          <p:cNvSpPr/>
-          <p:nvPr/>
-        </p:nvSpPr>
-        <p:spPr>
-          <a:xfrm>
-            <a:off x="5029200" y="1737360"/>
-            <a:ext cx="3474720" cy="320040"/>
-          </a:xfrm>
-          <a:prstGeom prst="rect">
-            <a:avLst/>
-          </a:prstGeom>
-          <a:noFill/>
-          <a:ln/>
-        </p:spPr>
-        <p:txBody>
-          <a:bodyPr wrap="square" rtlCol="0" anchor="ctr"/>
-          <a:lstStyle/>
-          <a:p>
-            <a:pPr marL="0" indent="0">
-              <a:buNone/>
-            </a:pPr>
-            <a:r>
-              <a:rPr lang="en-US" sz="1300" dirty="0">
-                <a:solidFill>
-                  <a:srgbClr val="212121"/>
-                </a:solidFill>
-              </a:rPr>
-              <a:t>💧 Humidity (±2%)</a:t>
-            </a:r>
-            <a:endParaRPr lang="en-US" sz="1300" dirty="0"/>
-          </a:p>
-        </p:txBody>
-      </p:sp>
-      <p:sp>
-        <p:nvSpPr>
-          <p:cNvPr id="14" name="Text 12"/>
-          <p:cNvSpPr/>
-          <p:nvPr/>
-        </p:nvSpPr>
-        <p:spPr>
-          <a:xfrm>
-            <a:off x="5029200" y="2194560"/>
-            <a:ext cx="3474720" cy="320040"/>
-          </a:xfrm>
-          <a:prstGeom prst="rect">
-            <a:avLst/>
-          </a:prstGeom>
-          <a:noFill/>
-          <a:ln/>
-        </p:spPr>
-        <p:txBody>
-          <a:bodyPr wrap="square" rtlCol="0" anchor="ctr"/>
-          <a:lstStyle/>
-          <a:p>
-            <a:pPr marL="0" indent="0">
-              <a:buNone/>
-            </a:pPr>
-            <a:r>
-              <a:rPr lang="en-US" sz="1300" dirty="0">
-                <a:solidFill>
-                  <a:srgbClr val="212121"/>
-                </a:solidFill>
-              </a:rPr>
-              <a:t>🌡️ Temperature</a:t>
-            </a:r>
-            <a:endParaRPr lang="en-US" sz="1300" dirty="0"/>
-          </a:p>
-        </p:txBody>
-      </p:sp>
-      <p:sp>
-        <p:nvSpPr>
-          <p:cNvPr id="15" name="Text 13"/>
-          <p:cNvSpPr/>
-          <p:nvPr/>
-        </p:nvSpPr>
-        <p:spPr>
-          <a:xfrm>
-            <a:off x="5029200" y="2651760"/>
-            <a:ext cx="3474720" cy="320040"/>
-          </a:xfrm>
-          <a:prstGeom prst="rect">
-            <a:avLst/>
-          </a:prstGeom>
-          <a:noFill/>
-          <a:ln/>
-        </p:spPr>
-        <p:txBody>
-          <a:bodyPr wrap="square" rtlCol="0" anchor="ctr"/>
-          <a:lstStyle/>
-          <a:p>
-            <a:pPr marL="0" indent="0">
-              <a:buNone/>
-            </a:pPr>
-            <a:r>
-              <a:rPr lang="en-US" sz="1300" dirty="0">
-                <a:solidFill>
-                  <a:srgbClr val="212121"/>
-                </a:solidFill>
-              </a:rPr>
-              <a:t>🔴 Thermal Camera</a:t>
-            </a:r>
-            <a:endParaRPr lang="en-US" sz="1300" dirty="0"/>
-          </a:p>
-        </p:txBody>
-      </p:sp>
-      <p:sp>
-        <p:nvSpPr>
-          <p:cNvPr id="16" name="Text 14"/>
-          <p:cNvSpPr/>
-          <p:nvPr/>
-        </p:nvSpPr>
-        <p:spPr>
-          <a:xfrm>
-            <a:off x="5029200" y="3108960"/>
-            <a:ext cx="3474720" cy="320040"/>
-          </a:xfrm>
-          <a:prstGeom prst="rect">
-            <a:avLst/>
-          </a:prstGeom>
-          <a:noFill/>
-          <a:ln/>
-        </p:spPr>
-        <p:txBody>
-          <a:bodyPr wrap="square" rtlCol="0" anchor="ctr"/>
-          <a:lstStyle/>
-          <a:p>
-            <a:pPr marL="0" indent="0">
-              <a:buNone/>
-            </a:pPr>
-            <a:r>
-              <a:rPr lang="en-US" sz="1300" dirty="0">
-                <a:solidFill>
-                  <a:srgbClr val="212121"/>
-                </a:solidFill>
-              </a:rPr>
-              <a:t>📍 GPS</a:t>
-            </a:r>
-            <a:endParaRPr lang="en-US" sz="1300" dirty="0"/>
-          </a:p>
-        </p:txBody>
-      </p:sp>
-      <p:sp>
-        <p:nvSpPr>
-          <p:cNvPr id="17" name="Text 15"/>
-          <p:cNvSpPr/>
-          <p:nvPr/>
-        </p:nvSpPr>
-        <p:spPr>
-          <a:xfrm>
-            <a:off x="5029200" y="3566160"/>
-            <a:ext cx="3474720" cy="320040"/>
-          </a:xfrm>
-          <a:prstGeom prst="rect">
-            <a:avLst/>
-          </a:prstGeom>
-          <a:noFill/>
-          <a:ln/>
-        </p:spPr>
-        <p:txBody>
-          <a:bodyPr wrap="square" rtlCol="0" anchor="ctr"/>
-          <a:lstStyle/>
-          <a:p>
-            <a:pPr marL="0" indent="0">
-              <a:buNone/>
-            </a:pPr>
-            <a:endParaRPr lang="en-US" sz="1300" dirty="0"/>
-          </a:p>
-        </p:txBody>
-      </p:sp>
-      <p:sp>
-        <p:nvSpPr>
-          <p:cNvPr id="18" name="Text 16"/>
-          <p:cNvSpPr/>
-          <p:nvPr/>
-        </p:nvSpPr>
-        <p:spPr>
-          <a:xfrm>
-            <a:off x="457200" y="4214718"/>
-            <a:ext cx="8229600" cy="365760"/>
-          </a:xfrm>
-          <a:prstGeom prst="rect">
-            <a:avLst/>
-          </a:prstGeom>
-          <a:noFill/>
-          <a:ln/>
-        </p:spPr>
-        <p:txBody>
-          <a:bodyPr wrap="square" rtlCol="0" anchor="ctr"/>
-          <a:lstStyle/>
-          <a:p>
-            <a:pPr marL="0" indent="0" algn="ctr">
-              <a:buNone/>
-            </a:pPr>
-            <a:r>
-              <a:rPr lang="en-US" sz="1400" b="1" dirty="0">
-                <a:solidFill>
-                  <a:srgbClr val="388E3C"/>
-                </a:solidFill>
-              </a:rPr>
-              <a:t>Total Cost: ~$300</a:t>
-            </a:r>
-            <a:endParaRPr lang="en-US" sz="1400" dirty="0"/>
           </a:p>
         </p:txBody>
       </p:sp>
@@ -8313,8 +9703,8 @@
         </p:nvSpPr>
         <p:spPr>
           <a:xfrm>
-            <a:off x="442061" y="2436333"/>
-            <a:ext cx="8229600" cy="274320"/>
+            <a:off x="442060" y="2436333"/>
+            <a:ext cx="2941219" cy="274320"/>
           </a:xfrm>
           <a:prstGeom prst="rect">
             <a:avLst/>
@@ -8335,7 +9725,7 @@
                   <a:srgbClr val="1976D2"/>
                 </a:solidFill>
               </a:rPr>
-              <a:t>EXAMPLE DETECTION FLOW:</a:t>
+              <a:t>EXAMPLE TREND DETECTION FLOW:</a:t>
             </a:r>
             <a:endParaRPr lang="en-US" sz="1400" dirty="0"/>
           </a:p>
@@ -8350,7 +9740,7 @@
         <p:spPr>
           <a:xfrm>
             <a:off x="457200" y="2777417"/>
-            <a:ext cx="7680960" cy="365760"/>
+            <a:ext cx="4114800" cy="365760"/>
           </a:xfrm>
           <a:prstGeom prst="rect">
             <a:avLst/>
@@ -8386,7 +9776,7 @@
         <p:spPr>
           <a:xfrm>
             <a:off x="442061" y="3214027"/>
-            <a:ext cx="7680960" cy="365760"/>
+            <a:ext cx="4129939" cy="365760"/>
           </a:xfrm>
           <a:prstGeom prst="rect">
             <a:avLst/>
@@ -8422,7 +9812,7 @@
         <p:spPr>
           <a:xfrm>
             <a:off x="457200" y="3670018"/>
-            <a:ext cx="7680960" cy="365760"/>
+            <a:ext cx="4183039" cy="365760"/>
           </a:xfrm>
           <a:prstGeom prst="rect">
             <a:avLst/>
@@ -8533,10 +9923,10 @@
       </p:sp>
       <p:sp>
         <p:nvSpPr>
-          <p:cNvPr id="32" name="Text 16">
+          <p:cNvPr id="22" name="Text 13">
             <a:extLst>
               <a:ext uri="{FF2B5EF4-FFF2-40B4-BE49-F238E27FC236}">
-                <a16:creationId xmlns:a16="http://schemas.microsoft.com/office/drawing/2014/main" id="{CC71EA84-C84B-E074-BED2-9289B1005956}"/>
+                <a16:creationId xmlns:a16="http://schemas.microsoft.com/office/drawing/2014/main" id="{E8DD58A5-2B77-F019-16CD-C289C8FBBFCF}"/>
               </a:ext>
             </a:extLst>
           </p:cNvPr>
@@ -8545,20 +9935,62 @@
         </p:nvSpPr>
         <p:spPr>
           <a:xfrm>
-            <a:off x="7014236" y="2464493"/>
-            <a:ext cx="1687703" cy="1195384"/>
-          </a:xfrm>
-          <a:prstGeom prst="rect">
-            <a:avLst/>
-          </a:prstGeom>
-          <a:noFill/>
-          <a:ln/>
-        </p:spPr>
-        <p:txBody>
-          <a:bodyPr wrap="square" rtlCol="0" anchor="ctr"/>
-          <a:lstStyle/>
-          <a:p>
-            <a:pPr marL="0" indent="0" algn="ctr">
+            <a:off x="4792639" y="2430277"/>
+            <a:ext cx="3095767" cy="274320"/>
+          </a:xfrm>
+          <a:prstGeom prst="rect">
+            <a:avLst/>
+          </a:prstGeom>
+          <a:noFill/>
+          <a:ln/>
+        </p:spPr>
+        <p:txBody>
+          <a:bodyPr wrap="square" rtlCol="0" anchor="ctr"/>
+          <a:lstStyle/>
+          <a:p>
+            <a:pPr marL="0" indent="0">
+              <a:buNone/>
+            </a:pPr>
+            <a:r>
+              <a:rPr lang="en-US" sz="1400" b="1" dirty="0">
+                <a:solidFill>
+                  <a:srgbClr val="1976D2"/>
+                </a:solidFill>
+              </a:rPr>
+              <a:t>EXAMPLE ANOMOLY DETECTION FLOW:</a:t>
+            </a:r>
+            <a:endParaRPr lang="en-US" sz="1400" dirty="0"/>
+          </a:p>
+        </p:txBody>
+      </p:sp>
+      <p:sp>
+        <p:nvSpPr>
+          <p:cNvPr id="23" name="Text 14">
+            <a:extLst>
+              <a:ext uri="{FF2B5EF4-FFF2-40B4-BE49-F238E27FC236}">
+                <a16:creationId xmlns:a16="http://schemas.microsoft.com/office/drawing/2014/main" id="{48D302F5-A2EC-51F1-1816-2C9D00F8475C}"/>
+              </a:ext>
+            </a:extLst>
+          </p:cNvPr>
+          <p:cNvSpPr/>
+          <p:nvPr/>
+        </p:nvSpPr>
+        <p:spPr>
+          <a:xfrm>
+            <a:off x="4807779" y="2771361"/>
+            <a:ext cx="4114800" cy="365760"/>
+          </a:xfrm>
+          <a:prstGeom prst="rect">
+            <a:avLst/>
+          </a:prstGeom>
+          <a:noFill/>
+          <a:ln/>
+        </p:spPr>
+        <p:txBody>
+          <a:bodyPr wrap="square" rtlCol="0" anchor="ctr"/>
+          <a:lstStyle/>
+          <a:p>
+            <a:pPr marL="0" indent="0">
               <a:buNone/>
             </a:pPr>
             <a:r>
@@ -8567,7 +9999,88 @@
                   <a:srgbClr val="212121"/>
                 </a:solidFill>
               </a:rPr>
-              <a:t>We will also use IR sensor to detect anomalous cold spots for closer inspection and location logging  </a:t>
+              <a:t>Step 1: cold spot detected</a:t>
+            </a:r>
+            <a:endParaRPr lang="en-US" sz="1300" dirty="0"/>
+          </a:p>
+        </p:txBody>
+      </p:sp>
+      <p:sp>
+        <p:nvSpPr>
+          <p:cNvPr id="24" name="Text 15">
+            <a:extLst>
+              <a:ext uri="{FF2B5EF4-FFF2-40B4-BE49-F238E27FC236}">
+                <a16:creationId xmlns:a16="http://schemas.microsoft.com/office/drawing/2014/main" id="{11FB9722-53ED-7DB9-934B-3C9521175DBA}"/>
+              </a:ext>
+            </a:extLst>
+          </p:cNvPr>
+          <p:cNvSpPr/>
+          <p:nvPr/>
+        </p:nvSpPr>
+        <p:spPr>
+          <a:xfrm>
+            <a:off x="4792640" y="3207971"/>
+            <a:ext cx="4129939" cy="365760"/>
+          </a:xfrm>
+          <a:prstGeom prst="rect">
+            <a:avLst/>
+          </a:prstGeom>
+          <a:noFill/>
+          <a:ln/>
+        </p:spPr>
+        <p:txBody>
+          <a:bodyPr wrap="square" rtlCol="0" anchor="ctr"/>
+          <a:lstStyle/>
+          <a:p>
+            <a:pPr marL="0" indent="0">
+              <a:buNone/>
+            </a:pPr>
+            <a:r>
+              <a:rPr lang="en-US" sz="1300" dirty="0">
+                <a:solidFill>
+                  <a:srgbClr val="212121"/>
+                </a:solidFill>
+              </a:rPr>
+              <a:t>Step 2: probe soil for moisture </a:t>
+            </a:r>
+            <a:endParaRPr lang="en-US" sz="1300" dirty="0"/>
+          </a:p>
+        </p:txBody>
+      </p:sp>
+      <p:sp>
+        <p:nvSpPr>
+          <p:cNvPr id="25" name="Text 16">
+            <a:extLst>
+              <a:ext uri="{FF2B5EF4-FFF2-40B4-BE49-F238E27FC236}">
+                <a16:creationId xmlns:a16="http://schemas.microsoft.com/office/drawing/2014/main" id="{131AC748-F754-4E1C-1361-C1B74CE51BE3}"/>
+              </a:ext>
+            </a:extLst>
+          </p:cNvPr>
+          <p:cNvSpPr/>
+          <p:nvPr/>
+        </p:nvSpPr>
+        <p:spPr>
+          <a:xfrm>
+            <a:off x="4807779" y="3663962"/>
+            <a:ext cx="4183039" cy="365760"/>
+          </a:xfrm>
+          <a:prstGeom prst="rect">
+            <a:avLst/>
+          </a:prstGeom>
+          <a:noFill/>
+          <a:ln/>
+        </p:spPr>
+        <p:txBody>
+          <a:bodyPr wrap="square" rtlCol="0" anchor="ctr"/>
+          <a:lstStyle/>
+          <a:p>
+            <a:r>
+              <a:rPr lang="en-US" sz="1300" dirty="0">
+                <a:solidFill>
+                  <a:srgbClr val="212121"/>
+                </a:solidFill>
+              </a:rPr>
+              <a:t>step 3: excess moisture found → alert: action needed  </a:t>
             </a:r>
             <a:endParaRPr lang="en-US" sz="1300" dirty="0"/>
           </a:p>
@@ -8583,7 +10096,7 @@
 
 <file path=ppt/slides/slide8.xml><?xml version="1.0" encoding="utf-8"?>
 <p:sld xmlns:a="http://schemas.openxmlformats.org/drawingml/2006/main" xmlns:r="http://schemas.openxmlformats.org/officeDocument/2006/relationships" xmlns:p="http://schemas.openxmlformats.org/presentationml/2006/main">
-  <p:cSld name="Slide 8">
+  <p:cSld name="Slide 6">
     <p:bg>
       <p:bgPr>
         <a:solidFill>
@@ -8608,14 +10121,82 @@
       </p:grpSpPr>
       <p:sp>
         <p:nvSpPr>
-          <p:cNvPr id="6" name="Shape 4"/>
-          <p:cNvSpPr/>
-          <p:nvPr/>
-        </p:nvSpPr>
-        <p:spPr>
-          <a:xfrm>
-            <a:off x="2560320" y="889875"/>
-            <a:ext cx="5669280" cy="411480"/>
+          <p:cNvPr id="2" name="Shape 0"/>
+          <p:cNvSpPr/>
+          <p:nvPr/>
+        </p:nvSpPr>
+        <p:spPr>
+          <a:xfrm>
+            <a:off x="0" y="0"/>
+            <a:ext cx="9144000" cy="731520"/>
+          </a:xfrm>
+          <a:prstGeom prst="rect">
+            <a:avLst/>
+          </a:prstGeom>
+          <a:solidFill>
+            <a:srgbClr val="1976D2"/>
+          </a:solidFill>
+          <a:ln w="12700">
+            <a:solidFill>
+              <a:srgbClr val="1976D2"/>
+            </a:solidFill>
+            <a:prstDash val="solid"/>
+          </a:ln>
+        </p:spPr>
+        <p:txBody>
+          <a:bodyPr/>
+          <a:lstStyle/>
+          <a:p>
+            <a:endParaRPr lang="en-AU"/>
+          </a:p>
+        </p:txBody>
+      </p:sp>
+      <p:sp>
+        <p:nvSpPr>
+          <p:cNvPr id="3" name="Text 1"/>
+          <p:cNvSpPr/>
+          <p:nvPr/>
+        </p:nvSpPr>
+        <p:spPr>
+          <a:xfrm>
+            <a:off x="274320" y="45720"/>
+            <a:ext cx="8595360" cy="640080"/>
+          </a:xfrm>
+          <a:prstGeom prst="rect">
+            <a:avLst/>
+          </a:prstGeom>
+          <a:noFill/>
+          <a:ln/>
+        </p:spPr>
+        <p:txBody>
+          <a:bodyPr wrap="square" rtlCol="0" anchor="ctr"/>
+          <a:lstStyle/>
+          <a:p>
+            <a:pPr marL="0" indent="0" algn="l">
+              <a:buNone/>
+            </a:pPr>
+            <a:r>
+              <a:rPr lang="en-US" sz="4000" b="1" dirty="0">
+                <a:solidFill>
+                  <a:srgbClr val="FFFFFF"/>
+                </a:solidFill>
+              </a:rPr>
+              <a:t>Hardware Components</a:t>
+            </a:r>
+            <a:endParaRPr lang="en-US" sz="4000" dirty="0"/>
+          </a:p>
+        </p:txBody>
+      </p:sp>
+      <p:sp>
+        <p:nvSpPr>
+          <p:cNvPr id="4" name="Shape 2"/>
+          <p:cNvSpPr/>
+          <p:nvPr/>
+        </p:nvSpPr>
+        <p:spPr>
+          <a:xfrm>
+            <a:off x="365760" y="1164650"/>
+            <a:ext cx="4114800" cy="2408096"/>
           </a:xfrm>
           <a:prstGeom prst="rect">
             <a:avLst/>
@@ -8640,20 +10221,228 @@
       </p:sp>
       <p:sp>
         <p:nvSpPr>
-          <p:cNvPr id="10" name="Shape 8"/>
-          <p:cNvSpPr/>
-          <p:nvPr/>
-        </p:nvSpPr>
-        <p:spPr>
-          <a:xfrm>
-            <a:off x="2560320" y="1484235"/>
-            <a:ext cx="5669280" cy="411480"/>
+          <p:cNvPr id="5" name="Text 3"/>
+          <p:cNvSpPr/>
+          <p:nvPr/>
+        </p:nvSpPr>
+        <p:spPr>
+          <a:xfrm>
+            <a:off x="548640" y="1280160"/>
+            <a:ext cx="3931920" cy="320040"/>
+          </a:xfrm>
+          <a:prstGeom prst="rect">
+            <a:avLst/>
+          </a:prstGeom>
+          <a:noFill/>
+          <a:ln/>
+        </p:spPr>
+        <p:txBody>
+          <a:bodyPr wrap="square" rtlCol="0" anchor="ctr"/>
+          <a:lstStyle/>
+          <a:p>
+            <a:pPr marL="0" indent="0">
+              <a:buNone/>
+            </a:pPr>
+            <a:r>
+              <a:rPr lang="en-US" sz="1600" b="1" dirty="0">
+                <a:solidFill>
+                  <a:srgbClr val="1976D2"/>
+                </a:solidFill>
+              </a:rPr>
+              <a:t>ROBOT CHASSIS</a:t>
+            </a:r>
+            <a:endParaRPr lang="en-US" sz="1600" dirty="0"/>
+          </a:p>
+        </p:txBody>
+      </p:sp>
+      <p:sp>
+        <p:nvSpPr>
+          <p:cNvPr id="6" name="Text 4"/>
+          <p:cNvSpPr/>
+          <p:nvPr/>
+        </p:nvSpPr>
+        <p:spPr>
+          <a:xfrm>
+            <a:off x="731520" y="1737360"/>
+            <a:ext cx="3657600" cy="320040"/>
+          </a:xfrm>
+          <a:prstGeom prst="rect">
+            <a:avLst/>
+          </a:prstGeom>
+          <a:noFill/>
+          <a:ln/>
+        </p:spPr>
+        <p:txBody>
+          <a:bodyPr wrap="square" rtlCol="0" anchor="ctr"/>
+          <a:lstStyle/>
+          <a:p>
+            <a:pPr marL="0" indent="0">
+              <a:buNone/>
+            </a:pPr>
+            <a:r>
+              <a:rPr lang="en-US" sz="1300" dirty="0">
+                <a:solidFill>
+                  <a:srgbClr val="212121"/>
+                </a:solidFill>
+              </a:rPr>
+              <a:t>🤖 Robot Body</a:t>
+            </a:r>
+            <a:endParaRPr lang="en-US" sz="1300" dirty="0"/>
+          </a:p>
+        </p:txBody>
+      </p:sp>
+      <p:sp>
+        <p:nvSpPr>
+          <p:cNvPr id="7" name="Text 5"/>
+          <p:cNvSpPr/>
+          <p:nvPr/>
+        </p:nvSpPr>
+        <p:spPr>
+          <a:xfrm>
+            <a:off x="731520" y="2194560"/>
+            <a:ext cx="3657600" cy="320040"/>
+          </a:xfrm>
+          <a:prstGeom prst="rect">
+            <a:avLst/>
+          </a:prstGeom>
+          <a:noFill/>
+          <a:ln/>
+        </p:spPr>
+        <p:txBody>
+          <a:bodyPr wrap="square" rtlCol="0" anchor="ctr"/>
+          <a:lstStyle/>
+          <a:p>
+            <a:pPr marL="0" indent="0">
+              <a:buNone/>
+            </a:pPr>
+            <a:r>
+              <a:rPr lang="en-US" sz="1300" dirty="0">
+                <a:solidFill>
+                  <a:srgbClr val="212121"/>
+                </a:solidFill>
+              </a:rPr>
+              <a:t>🔋 4-6 hour battery</a:t>
+            </a:r>
+            <a:endParaRPr lang="en-US" sz="1300" dirty="0"/>
+          </a:p>
+        </p:txBody>
+      </p:sp>
+      <p:sp>
+        <p:nvSpPr>
+          <p:cNvPr id="8" name="Text 6"/>
+          <p:cNvSpPr/>
+          <p:nvPr/>
+        </p:nvSpPr>
+        <p:spPr>
+          <a:xfrm>
+            <a:off x="731520" y="2651760"/>
+            <a:ext cx="3657600" cy="320040"/>
+          </a:xfrm>
+          <a:prstGeom prst="rect">
+            <a:avLst/>
+          </a:prstGeom>
+          <a:noFill/>
+          <a:ln/>
+        </p:spPr>
+        <p:txBody>
+          <a:bodyPr wrap="square" rtlCol="0" anchor="ctr"/>
+          <a:lstStyle/>
+          <a:p>
+            <a:pPr marL="0" indent="0">
+              <a:buNone/>
+            </a:pPr>
+            <a:r>
+              <a:rPr lang="en-US" sz="1300" dirty="0">
+                <a:solidFill>
+                  <a:srgbClr val="212121"/>
+                </a:solidFill>
+              </a:rPr>
+              <a:t>⚙️ Motor control</a:t>
+            </a:r>
+            <a:endParaRPr lang="en-US" sz="1300" dirty="0"/>
+          </a:p>
+        </p:txBody>
+      </p:sp>
+      <p:sp>
+        <p:nvSpPr>
+          <p:cNvPr id="9" name="Text 7"/>
+          <p:cNvSpPr/>
+          <p:nvPr/>
+        </p:nvSpPr>
+        <p:spPr>
+          <a:xfrm>
+            <a:off x="731520" y="3108960"/>
+            <a:ext cx="3657600" cy="320040"/>
+          </a:xfrm>
+          <a:prstGeom prst="rect">
+            <a:avLst/>
+          </a:prstGeom>
+          <a:noFill/>
+          <a:ln/>
+        </p:spPr>
+        <p:txBody>
+          <a:bodyPr wrap="square" rtlCol="0" anchor="ctr"/>
+          <a:lstStyle/>
+          <a:p>
+            <a:pPr marL="0" indent="0">
+              <a:buNone/>
+            </a:pPr>
+            <a:r>
+              <a:rPr lang="en-US" sz="1300" dirty="0">
+                <a:solidFill>
+                  <a:srgbClr val="212121"/>
+                </a:solidFill>
+              </a:rPr>
+              <a:t>📡WIFI Capable Controller</a:t>
+            </a:r>
+            <a:endParaRPr lang="en-US" sz="1300" dirty="0"/>
+          </a:p>
+        </p:txBody>
+      </p:sp>
+      <p:sp>
+        <p:nvSpPr>
+          <p:cNvPr id="10" name="Text 8"/>
+          <p:cNvSpPr/>
+          <p:nvPr/>
+        </p:nvSpPr>
+        <p:spPr>
+          <a:xfrm>
+            <a:off x="731520" y="3566160"/>
+            <a:ext cx="3657600" cy="320040"/>
+          </a:xfrm>
+          <a:prstGeom prst="rect">
+            <a:avLst/>
+          </a:prstGeom>
+          <a:noFill/>
+          <a:ln/>
+        </p:spPr>
+        <p:txBody>
+          <a:bodyPr wrap="square" rtlCol="0" anchor="ctr"/>
+          <a:lstStyle/>
+          <a:p>
+            <a:pPr marL="0" indent="0">
+              <a:buNone/>
+            </a:pPr>
+            <a:endParaRPr lang="en-US" sz="1300" dirty="0"/>
+          </a:p>
+        </p:txBody>
+      </p:sp>
+      <p:sp>
+        <p:nvSpPr>
+          <p:cNvPr id="11" name="Shape 9"/>
+          <p:cNvSpPr/>
+          <p:nvPr/>
+        </p:nvSpPr>
+        <p:spPr>
+          <a:xfrm>
+            <a:off x="4754880" y="1158065"/>
+            <a:ext cx="3931920" cy="2408096"/>
           </a:xfrm>
           <a:prstGeom prst="rect">
             <a:avLst/>
           </a:prstGeom>
           <a:solidFill>
-            <a:srgbClr val="FFF9C4"/>
+            <a:srgbClr val="C8E6C9"/>
           </a:solidFill>
           <a:ln w="25400">
             <a:solidFill>
@@ -8672,146 +10461,222 @@
       </p:sp>
       <p:sp>
         <p:nvSpPr>
-          <p:cNvPr id="14" name="Shape 12"/>
-          <p:cNvSpPr/>
-          <p:nvPr/>
-        </p:nvSpPr>
-        <p:spPr>
-          <a:xfrm>
-            <a:off x="2560320" y="2071555"/>
-            <a:ext cx="5669280" cy="411480"/>
-          </a:xfrm>
-          <a:prstGeom prst="rect">
-            <a:avLst/>
-          </a:prstGeom>
-          <a:solidFill>
-            <a:srgbClr val="FFE0B2"/>
-          </a:solidFill>
-          <a:ln w="25400">
-            <a:solidFill>
-              <a:srgbClr val="1976D2"/>
-            </a:solidFill>
-            <a:prstDash val="solid"/>
-          </a:ln>
-        </p:spPr>
-        <p:txBody>
-          <a:bodyPr/>
-          <a:lstStyle/>
-          <a:p>
-            <a:endParaRPr lang="en-AU"/>
-          </a:p>
-        </p:txBody>
-      </p:sp>
-      <p:sp>
-        <p:nvSpPr>
-          <p:cNvPr id="18" name="Shape 16"/>
-          <p:cNvSpPr/>
-          <p:nvPr/>
-        </p:nvSpPr>
-        <p:spPr>
-          <a:xfrm>
-            <a:off x="2560320" y="2665915"/>
-            <a:ext cx="5669280" cy="411480"/>
-          </a:xfrm>
-          <a:prstGeom prst="rect">
-            <a:avLst/>
-          </a:prstGeom>
-          <a:solidFill>
-            <a:srgbClr val="FFCDD2"/>
-          </a:solidFill>
-          <a:ln w="25400">
-            <a:solidFill>
-              <a:srgbClr val="1976D2"/>
-            </a:solidFill>
-            <a:prstDash val="solid"/>
-          </a:ln>
-        </p:spPr>
-        <p:txBody>
-          <a:bodyPr/>
-          <a:lstStyle/>
-          <a:p>
-            <a:endParaRPr lang="en-AU"/>
-          </a:p>
-        </p:txBody>
-      </p:sp>
-      <p:sp>
-        <p:nvSpPr>
-          <p:cNvPr id="2" name="Shape 0"/>
-          <p:cNvSpPr/>
-          <p:nvPr/>
-        </p:nvSpPr>
-        <p:spPr>
-          <a:xfrm>
-            <a:off x="0" y="0"/>
-            <a:ext cx="9144000" cy="731520"/>
-          </a:xfrm>
-          <a:prstGeom prst="rect">
-            <a:avLst/>
-          </a:prstGeom>
-          <a:solidFill>
-            <a:srgbClr val="1976D2"/>
-          </a:solidFill>
-          <a:ln w="12700">
-            <a:solidFill>
-              <a:srgbClr val="1976D2"/>
-            </a:solidFill>
-            <a:prstDash val="solid"/>
-          </a:ln>
-        </p:spPr>
-        <p:txBody>
-          <a:bodyPr/>
-          <a:lstStyle/>
-          <a:p>
-            <a:endParaRPr lang="en-AU"/>
-          </a:p>
-        </p:txBody>
-      </p:sp>
-      <p:sp>
-        <p:nvSpPr>
-          <p:cNvPr id="3" name="Text 1"/>
-          <p:cNvSpPr/>
-          <p:nvPr/>
-        </p:nvSpPr>
-        <p:spPr>
-          <a:xfrm>
-            <a:off x="274320" y="45720"/>
-            <a:ext cx="8595360" cy="640080"/>
-          </a:xfrm>
-          <a:prstGeom prst="rect">
-            <a:avLst/>
-          </a:prstGeom>
-          <a:noFill/>
-          <a:ln/>
-        </p:spPr>
-        <p:txBody>
-          <a:bodyPr wrap="square" rtlCol="0" anchor="ctr"/>
-          <a:lstStyle/>
-          <a:p>
-            <a:pPr marL="0" indent="0" algn="l">
-              <a:buNone/>
-            </a:pPr>
-            <a:r>
-              <a:rPr lang="en-US" sz="4000" b="1" dirty="0">
-                <a:solidFill>
-                  <a:srgbClr val="FFFFFF"/>
-                </a:solidFill>
-              </a:rPr>
-              <a:t>Monthly Patrol Cycle</a:t>
-            </a:r>
-            <a:endParaRPr lang="en-US" sz="4000" dirty="0"/>
-          </a:p>
-        </p:txBody>
-      </p:sp>
-      <p:sp>
-        <p:nvSpPr>
-          <p:cNvPr id="4" name="Text 2"/>
-          <p:cNvSpPr/>
-          <p:nvPr/>
-        </p:nvSpPr>
-        <p:spPr>
-          <a:xfrm>
-            <a:off x="457200" y="889875"/>
-            <a:ext cx="1371600" cy="411480"/>
+          <p:cNvPr id="12" name="Text 10"/>
+          <p:cNvSpPr/>
+          <p:nvPr/>
+        </p:nvSpPr>
+        <p:spPr>
+          <a:xfrm>
+            <a:off x="4846320" y="1280160"/>
+            <a:ext cx="3657600" cy="320040"/>
+          </a:xfrm>
+          <a:prstGeom prst="rect">
+            <a:avLst/>
+          </a:prstGeom>
+          <a:noFill/>
+          <a:ln/>
+        </p:spPr>
+        <p:txBody>
+          <a:bodyPr wrap="square" rtlCol="0" anchor="ctr"/>
+          <a:lstStyle/>
+          <a:p>
+            <a:pPr marL="0" indent="0">
+              <a:buNone/>
+            </a:pPr>
+            <a:r>
+              <a:rPr lang="en-US" sz="1600" b="1" dirty="0">
+                <a:solidFill>
+                  <a:srgbClr val="1976D2"/>
+                </a:solidFill>
+              </a:rPr>
+              <a:t>SENSORS</a:t>
+            </a:r>
+            <a:endParaRPr lang="en-US" sz="1600" dirty="0"/>
+          </a:p>
+        </p:txBody>
+      </p:sp>
+      <p:sp>
+        <p:nvSpPr>
+          <p:cNvPr id="13" name="Text 11"/>
+          <p:cNvSpPr/>
+          <p:nvPr/>
+        </p:nvSpPr>
+        <p:spPr>
+          <a:xfrm>
+            <a:off x="5029200" y="1737360"/>
+            <a:ext cx="3474720" cy="320040"/>
+          </a:xfrm>
+          <a:prstGeom prst="rect">
+            <a:avLst/>
+          </a:prstGeom>
+          <a:noFill/>
+          <a:ln/>
+        </p:spPr>
+        <p:txBody>
+          <a:bodyPr wrap="square" rtlCol="0" anchor="ctr"/>
+          <a:lstStyle/>
+          <a:p>
+            <a:pPr marL="0" indent="0">
+              <a:buNone/>
+            </a:pPr>
+            <a:r>
+              <a:rPr lang="en-US" sz="1300" dirty="0">
+                <a:solidFill>
+                  <a:srgbClr val="212121"/>
+                </a:solidFill>
+              </a:rPr>
+              <a:t>💧 Humidity (±2%)</a:t>
+            </a:r>
+            <a:endParaRPr lang="en-US" sz="1300" dirty="0"/>
+          </a:p>
+        </p:txBody>
+      </p:sp>
+      <p:sp>
+        <p:nvSpPr>
+          <p:cNvPr id="14" name="Text 12"/>
+          <p:cNvSpPr/>
+          <p:nvPr/>
+        </p:nvSpPr>
+        <p:spPr>
+          <a:xfrm>
+            <a:off x="5029200" y="2194560"/>
+            <a:ext cx="3474720" cy="320040"/>
+          </a:xfrm>
+          <a:prstGeom prst="rect">
+            <a:avLst/>
+          </a:prstGeom>
+          <a:noFill/>
+          <a:ln/>
+        </p:spPr>
+        <p:txBody>
+          <a:bodyPr wrap="square" rtlCol="0" anchor="ctr"/>
+          <a:lstStyle/>
+          <a:p>
+            <a:pPr marL="0" indent="0">
+              <a:buNone/>
+            </a:pPr>
+            <a:r>
+              <a:rPr lang="en-US" sz="1300" dirty="0">
+                <a:solidFill>
+                  <a:srgbClr val="212121"/>
+                </a:solidFill>
+              </a:rPr>
+              <a:t>🌡️ Temperature</a:t>
+            </a:r>
+            <a:endParaRPr lang="en-US" sz="1300" dirty="0"/>
+          </a:p>
+        </p:txBody>
+      </p:sp>
+      <p:sp>
+        <p:nvSpPr>
+          <p:cNvPr id="15" name="Text 13"/>
+          <p:cNvSpPr/>
+          <p:nvPr/>
+        </p:nvSpPr>
+        <p:spPr>
+          <a:xfrm>
+            <a:off x="5029200" y="2651760"/>
+            <a:ext cx="3474720" cy="320040"/>
+          </a:xfrm>
+          <a:prstGeom prst="rect">
+            <a:avLst/>
+          </a:prstGeom>
+          <a:noFill/>
+          <a:ln/>
+        </p:spPr>
+        <p:txBody>
+          <a:bodyPr wrap="square" rtlCol="0" anchor="ctr"/>
+          <a:lstStyle/>
+          <a:p>
+            <a:pPr marL="0" indent="0">
+              <a:buNone/>
+            </a:pPr>
+            <a:r>
+              <a:rPr lang="en-US" sz="1300" dirty="0">
+                <a:solidFill>
+                  <a:srgbClr val="212121"/>
+                </a:solidFill>
+              </a:rPr>
+              <a:t>🔴 Thermal Camera</a:t>
+            </a:r>
+            <a:endParaRPr lang="en-US" sz="1300" dirty="0"/>
+          </a:p>
+        </p:txBody>
+      </p:sp>
+      <p:sp>
+        <p:nvSpPr>
+          <p:cNvPr id="16" name="Text 14"/>
+          <p:cNvSpPr/>
+          <p:nvPr/>
+        </p:nvSpPr>
+        <p:spPr>
+          <a:xfrm>
+            <a:off x="5029200" y="3108960"/>
+            <a:ext cx="3474720" cy="320040"/>
+          </a:xfrm>
+          <a:prstGeom prst="rect">
+            <a:avLst/>
+          </a:prstGeom>
+          <a:noFill/>
+          <a:ln/>
+        </p:spPr>
+        <p:txBody>
+          <a:bodyPr wrap="square" rtlCol="0" anchor="ctr"/>
+          <a:lstStyle/>
+          <a:p>
+            <a:pPr marL="0" indent="0">
+              <a:buNone/>
+            </a:pPr>
+            <a:r>
+              <a:rPr lang="en-US" sz="1300" dirty="0">
+                <a:solidFill>
+                  <a:srgbClr val="212121"/>
+                </a:solidFill>
+              </a:rPr>
+              <a:t>📍 GPS</a:t>
+            </a:r>
+            <a:endParaRPr lang="en-US" sz="1300" dirty="0"/>
+          </a:p>
+        </p:txBody>
+      </p:sp>
+      <p:sp>
+        <p:nvSpPr>
+          <p:cNvPr id="17" name="Text 15"/>
+          <p:cNvSpPr/>
+          <p:nvPr/>
+        </p:nvSpPr>
+        <p:spPr>
+          <a:xfrm>
+            <a:off x="5029200" y="3566160"/>
+            <a:ext cx="3474720" cy="320040"/>
+          </a:xfrm>
+          <a:prstGeom prst="rect">
+            <a:avLst/>
+          </a:prstGeom>
+          <a:noFill/>
+          <a:ln/>
+        </p:spPr>
+        <p:txBody>
+          <a:bodyPr wrap="square" rtlCol="0" anchor="ctr"/>
+          <a:lstStyle/>
+          <a:p>
+            <a:pPr marL="0" indent="0">
+              <a:buNone/>
+            </a:pPr>
+            <a:endParaRPr lang="en-US" sz="1300" dirty="0"/>
+          </a:p>
+        </p:txBody>
+      </p:sp>
+      <p:sp>
+        <p:nvSpPr>
+          <p:cNvPr id="18" name="Text 16"/>
+          <p:cNvSpPr/>
+          <p:nvPr/>
+        </p:nvSpPr>
+        <p:spPr>
+          <a:xfrm>
+            <a:off x="457200" y="4214718"/>
+            <a:ext cx="8229600" cy="365760"/>
           </a:xfrm>
           <a:prstGeom prst="rect">
             <a:avLst/>
@@ -8832,584 +10697,9 @@
                   <a:srgbClr val="388E3C"/>
                 </a:solidFill>
               </a:rPr>
-              <a:t>5 min</a:t>
+              <a:t>Total Cost: ~$300</a:t>
             </a:r>
             <a:endParaRPr lang="en-US" sz="1400" dirty="0"/>
-          </a:p>
-        </p:txBody>
-      </p:sp>
-      <p:sp>
-        <p:nvSpPr>
-          <p:cNvPr id="5" name="Text 3"/>
-          <p:cNvSpPr/>
-          <p:nvPr/>
-        </p:nvSpPr>
-        <p:spPr>
-          <a:xfrm>
-            <a:off x="1920240" y="889875"/>
-            <a:ext cx="457200" cy="411480"/>
-          </a:xfrm>
-          <a:prstGeom prst="rect">
-            <a:avLst/>
-          </a:prstGeom>
-          <a:noFill/>
-          <a:ln/>
-        </p:spPr>
-        <p:txBody>
-          <a:bodyPr wrap="square" rtlCol="0" anchor="ctr"/>
-          <a:lstStyle/>
-          <a:p>
-            <a:pPr marL="0" indent="0" algn="ctr">
-              <a:buNone/>
-            </a:pPr>
-            <a:r>
-              <a:rPr lang="en-US" sz="2000" dirty="0">
-                <a:solidFill>
-                  <a:srgbClr val="1976D2"/>
-                </a:solidFill>
-              </a:rPr>
-              <a:t>→</a:t>
-            </a:r>
-            <a:endParaRPr lang="en-US" sz="2000" dirty="0"/>
-          </a:p>
-        </p:txBody>
-      </p:sp>
-      <p:sp>
-        <p:nvSpPr>
-          <p:cNvPr id="7" name="Text 5"/>
-          <p:cNvSpPr/>
-          <p:nvPr/>
-        </p:nvSpPr>
-        <p:spPr>
-          <a:xfrm>
-            <a:off x="2651760" y="975902"/>
-            <a:ext cx="5486400" cy="228600"/>
-          </a:xfrm>
-          <a:prstGeom prst="rect">
-            <a:avLst/>
-          </a:prstGeom>
-          <a:noFill/>
-          <a:ln/>
-        </p:spPr>
-        <p:txBody>
-          <a:bodyPr wrap="square" rtlCol="0" anchor="ctr"/>
-          <a:lstStyle/>
-          <a:p>
-            <a:pPr marL="0" indent="0" algn="ctr">
-              <a:buNone/>
-            </a:pPr>
-            <a:r>
-              <a:rPr lang="en-US" sz="1400" b="1" dirty="0">
-                <a:solidFill>
-                  <a:srgbClr val="212121"/>
-                </a:solidFill>
-              </a:rPr>
-              <a:t>Deploy robot</a:t>
-            </a:r>
-            <a:endParaRPr lang="en-US" sz="1400" dirty="0"/>
-          </a:p>
-        </p:txBody>
-      </p:sp>
-      <p:sp>
-        <p:nvSpPr>
-          <p:cNvPr id="8" name="Text 6"/>
-          <p:cNvSpPr/>
-          <p:nvPr/>
-        </p:nvSpPr>
-        <p:spPr>
-          <a:xfrm>
-            <a:off x="457200" y="1484235"/>
-            <a:ext cx="1371600" cy="411480"/>
-          </a:xfrm>
-          <a:prstGeom prst="rect">
-            <a:avLst/>
-          </a:prstGeom>
-          <a:noFill/>
-          <a:ln/>
-        </p:spPr>
-        <p:txBody>
-          <a:bodyPr wrap="square" rtlCol="0" anchor="ctr"/>
-          <a:lstStyle/>
-          <a:p>
-            <a:pPr marL="0" indent="0" algn="ctr">
-              <a:buNone/>
-            </a:pPr>
-            <a:r>
-              <a:rPr lang="en-US" sz="1400" b="1" dirty="0">
-                <a:solidFill>
-                  <a:srgbClr val="388E3C"/>
-                </a:solidFill>
-              </a:rPr>
-              <a:t>30-40 min</a:t>
-            </a:r>
-            <a:endParaRPr lang="en-US" sz="1400" dirty="0"/>
-          </a:p>
-        </p:txBody>
-      </p:sp>
-      <p:sp>
-        <p:nvSpPr>
-          <p:cNvPr id="9" name="Text 7"/>
-          <p:cNvSpPr/>
-          <p:nvPr/>
-        </p:nvSpPr>
-        <p:spPr>
-          <a:xfrm>
-            <a:off x="1920240" y="1484235"/>
-            <a:ext cx="457200" cy="411480"/>
-          </a:xfrm>
-          <a:prstGeom prst="rect">
-            <a:avLst/>
-          </a:prstGeom>
-          <a:noFill/>
-          <a:ln/>
-        </p:spPr>
-        <p:txBody>
-          <a:bodyPr wrap="square" rtlCol="0" anchor="ctr"/>
-          <a:lstStyle/>
-          <a:p>
-            <a:pPr marL="0" indent="0" algn="ctr">
-              <a:buNone/>
-            </a:pPr>
-            <a:r>
-              <a:rPr lang="en-US" sz="2000" dirty="0">
-                <a:solidFill>
-                  <a:srgbClr val="1976D2"/>
-                </a:solidFill>
-              </a:rPr>
-              <a:t>→</a:t>
-            </a:r>
-            <a:endParaRPr lang="en-US" sz="2000" dirty="0"/>
-          </a:p>
-        </p:txBody>
-      </p:sp>
-      <p:sp>
-        <p:nvSpPr>
-          <p:cNvPr id="11" name="Text 9"/>
-          <p:cNvSpPr/>
-          <p:nvPr/>
-        </p:nvSpPr>
-        <p:spPr>
-          <a:xfrm>
-            <a:off x="2651760" y="1577340"/>
-            <a:ext cx="5486400" cy="228600"/>
-          </a:xfrm>
-          <a:prstGeom prst="rect">
-            <a:avLst/>
-          </a:prstGeom>
-          <a:noFill/>
-          <a:ln/>
-        </p:spPr>
-        <p:txBody>
-          <a:bodyPr wrap="square" rtlCol="0" anchor="ctr"/>
-          <a:lstStyle/>
-          <a:p>
-            <a:pPr marL="0" indent="0" algn="ctr">
-              <a:buNone/>
-            </a:pPr>
-            <a:r>
-              <a:rPr lang="en-US" sz="1400" b="1" dirty="0">
-                <a:solidFill>
-                  <a:srgbClr val="212121"/>
-                </a:solidFill>
-              </a:rPr>
-              <a:t>Autonomous patrol</a:t>
-            </a:r>
-            <a:endParaRPr lang="en-US" sz="1400" dirty="0"/>
-          </a:p>
-        </p:txBody>
-      </p:sp>
-      <p:sp>
-        <p:nvSpPr>
-          <p:cNvPr id="12" name="Text 10"/>
-          <p:cNvSpPr/>
-          <p:nvPr/>
-        </p:nvSpPr>
-        <p:spPr>
-          <a:xfrm>
-            <a:off x="457200" y="2078595"/>
-            <a:ext cx="1371600" cy="411480"/>
-          </a:xfrm>
-          <a:prstGeom prst="rect">
-            <a:avLst/>
-          </a:prstGeom>
-          <a:noFill/>
-          <a:ln/>
-        </p:spPr>
-        <p:txBody>
-          <a:bodyPr wrap="square" rtlCol="0" anchor="ctr"/>
-          <a:lstStyle/>
-          <a:p>
-            <a:pPr marL="0" indent="0" algn="ctr">
-              <a:buNone/>
-            </a:pPr>
-            <a:r>
-              <a:rPr lang="en-US" sz="1400" b="1" dirty="0">
-                <a:solidFill>
-                  <a:srgbClr val="388E3C"/>
-                </a:solidFill>
-              </a:rPr>
-              <a:t>5 min</a:t>
-            </a:r>
-            <a:endParaRPr lang="en-US" sz="1400" dirty="0"/>
-          </a:p>
-        </p:txBody>
-      </p:sp>
-      <p:sp>
-        <p:nvSpPr>
-          <p:cNvPr id="13" name="Text 11"/>
-          <p:cNvSpPr/>
-          <p:nvPr/>
-        </p:nvSpPr>
-        <p:spPr>
-          <a:xfrm>
-            <a:off x="1920240" y="2078595"/>
-            <a:ext cx="457200" cy="411480"/>
-          </a:xfrm>
-          <a:prstGeom prst="rect">
-            <a:avLst/>
-          </a:prstGeom>
-          <a:noFill/>
-          <a:ln/>
-        </p:spPr>
-        <p:txBody>
-          <a:bodyPr wrap="square" rtlCol="0" anchor="ctr"/>
-          <a:lstStyle/>
-          <a:p>
-            <a:pPr marL="0" indent="0" algn="ctr">
-              <a:buNone/>
-            </a:pPr>
-            <a:r>
-              <a:rPr lang="en-US" sz="2000" dirty="0">
-                <a:solidFill>
-                  <a:srgbClr val="1976D2"/>
-                </a:solidFill>
-              </a:rPr>
-              <a:t>→</a:t>
-            </a:r>
-            <a:endParaRPr lang="en-US" sz="2000" dirty="0"/>
-          </a:p>
-        </p:txBody>
-      </p:sp>
-      <p:sp>
-        <p:nvSpPr>
-          <p:cNvPr id="15" name="Text 13"/>
-          <p:cNvSpPr/>
-          <p:nvPr/>
-        </p:nvSpPr>
-        <p:spPr>
-          <a:xfrm>
-            <a:off x="2560320" y="2164660"/>
-            <a:ext cx="5486400" cy="228600"/>
-          </a:xfrm>
-          <a:prstGeom prst="rect">
-            <a:avLst/>
-          </a:prstGeom>
-          <a:noFill/>
-          <a:ln/>
-        </p:spPr>
-        <p:txBody>
-          <a:bodyPr wrap="square" rtlCol="0" anchor="ctr"/>
-          <a:lstStyle/>
-          <a:p>
-            <a:pPr marL="0" indent="0" algn="ctr">
-              <a:buNone/>
-            </a:pPr>
-            <a:r>
-              <a:rPr lang="en-US" sz="1400" b="1" dirty="0">
-                <a:solidFill>
-                  <a:srgbClr val="212121"/>
-                </a:solidFill>
-              </a:rPr>
-              <a:t>Retrieve &amp; review</a:t>
-            </a:r>
-            <a:endParaRPr lang="en-US" sz="1400" dirty="0"/>
-          </a:p>
-        </p:txBody>
-      </p:sp>
-      <p:sp>
-        <p:nvSpPr>
-          <p:cNvPr id="16" name="Text 14"/>
-          <p:cNvSpPr/>
-          <p:nvPr/>
-        </p:nvSpPr>
-        <p:spPr>
-          <a:xfrm>
-            <a:off x="457200" y="2672955"/>
-            <a:ext cx="1371600" cy="411480"/>
-          </a:xfrm>
-          <a:prstGeom prst="rect">
-            <a:avLst/>
-          </a:prstGeom>
-          <a:noFill/>
-          <a:ln/>
-        </p:spPr>
-        <p:txBody>
-          <a:bodyPr wrap="square" rtlCol="0" anchor="ctr"/>
-          <a:lstStyle/>
-          <a:p>
-            <a:pPr marL="0" indent="0" algn="ctr">
-              <a:buNone/>
-            </a:pPr>
-            <a:r>
-              <a:rPr lang="en-US" sz="1400" b="1" dirty="0">
-                <a:solidFill>
-                  <a:srgbClr val="388E3C"/>
-                </a:solidFill>
-              </a:rPr>
-              <a:t>Instant</a:t>
-            </a:r>
-            <a:endParaRPr lang="en-US" sz="1400" dirty="0"/>
-          </a:p>
-        </p:txBody>
-      </p:sp>
-      <p:sp>
-        <p:nvSpPr>
-          <p:cNvPr id="17" name="Text 15"/>
-          <p:cNvSpPr/>
-          <p:nvPr/>
-        </p:nvSpPr>
-        <p:spPr>
-          <a:xfrm>
-            <a:off x="1920240" y="2672955"/>
-            <a:ext cx="457200" cy="411480"/>
-          </a:xfrm>
-          <a:prstGeom prst="rect">
-            <a:avLst/>
-          </a:prstGeom>
-          <a:noFill/>
-          <a:ln/>
-        </p:spPr>
-        <p:txBody>
-          <a:bodyPr wrap="square" rtlCol="0" anchor="ctr"/>
-          <a:lstStyle/>
-          <a:p>
-            <a:pPr marL="0" indent="0" algn="ctr">
-              <a:buNone/>
-            </a:pPr>
-            <a:r>
-              <a:rPr lang="en-US" sz="2000" dirty="0">
-                <a:solidFill>
-                  <a:srgbClr val="1976D2"/>
-                </a:solidFill>
-              </a:rPr>
-              <a:t>→</a:t>
-            </a:r>
-            <a:endParaRPr lang="en-US" sz="2000" dirty="0"/>
-          </a:p>
-        </p:txBody>
-      </p:sp>
-      <p:sp>
-        <p:nvSpPr>
-          <p:cNvPr id="19" name="Text 17"/>
-          <p:cNvSpPr/>
-          <p:nvPr/>
-        </p:nvSpPr>
-        <p:spPr>
-          <a:xfrm>
-            <a:off x="2651760" y="2729045"/>
-            <a:ext cx="5486400" cy="228600"/>
-          </a:xfrm>
-          <a:prstGeom prst="rect">
-            <a:avLst/>
-          </a:prstGeom>
-          <a:noFill/>
-          <a:ln/>
-        </p:spPr>
-        <p:txBody>
-          <a:bodyPr wrap="square" rtlCol="0" anchor="ctr"/>
-          <a:lstStyle/>
-          <a:p>
-            <a:pPr marL="0" indent="0" algn="ctr">
-              <a:buNone/>
-            </a:pPr>
-            <a:r>
-              <a:rPr lang="en-US" sz="1400" b="1" dirty="0">
-                <a:solidFill>
-                  <a:srgbClr val="212121"/>
-                </a:solidFill>
-              </a:rPr>
-              <a:t>Alerts if detected</a:t>
-            </a:r>
-            <a:endParaRPr lang="en-US" sz="1400" dirty="0"/>
-          </a:p>
-        </p:txBody>
-      </p:sp>
-      <p:sp>
-        <p:nvSpPr>
-          <p:cNvPr id="20" name="Shape 18"/>
-          <p:cNvSpPr/>
-          <p:nvPr/>
-        </p:nvSpPr>
-        <p:spPr>
-          <a:xfrm>
-            <a:off x="457200" y="3293883"/>
-            <a:ext cx="8229600" cy="1745990"/>
-          </a:xfrm>
-          <a:prstGeom prst="rect">
-            <a:avLst/>
-          </a:prstGeom>
-          <a:solidFill>
-            <a:srgbClr val="E3F2FD"/>
-          </a:solidFill>
-          <a:ln w="25400">
-            <a:solidFill>
-              <a:srgbClr val="1976D2"/>
-            </a:solidFill>
-            <a:prstDash val="solid"/>
-          </a:ln>
-        </p:spPr>
-        <p:txBody>
-          <a:bodyPr/>
-          <a:lstStyle/>
-          <a:p>
-            <a:endParaRPr lang="en-AU"/>
-          </a:p>
-        </p:txBody>
-      </p:sp>
-      <p:sp>
-        <p:nvSpPr>
-          <p:cNvPr id="21" name="Text 19"/>
-          <p:cNvSpPr/>
-          <p:nvPr/>
-        </p:nvSpPr>
-        <p:spPr>
-          <a:xfrm>
-            <a:off x="640080" y="3376430"/>
-            <a:ext cx="7863840" cy="274320"/>
-          </a:xfrm>
-          <a:prstGeom prst="rect">
-            <a:avLst/>
-          </a:prstGeom>
-          <a:noFill/>
-          <a:ln/>
-        </p:spPr>
-        <p:txBody>
-          <a:bodyPr wrap="square" rtlCol="0" anchor="ctr"/>
-          <a:lstStyle/>
-          <a:p>
-            <a:pPr marL="0" indent="0">
-              <a:buNone/>
-            </a:pPr>
-            <a:r>
-              <a:rPr lang="en-US" sz="1400" b="1" dirty="0">
-                <a:solidFill>
-                  <a:srgbClr val="1976D2"/>
-                </a:solidFill>
-              </a:rPr>
-              <a:t>Property Manager Action:</a:t>
-            </a:r>
-            <a:endParaRPr lang="en-US" sz="1400" dirty="0"/>
-          </a:p>
-        </p:txBody>
-      </p:sp>
-      <p:sp>
-        <p:nvSpPr>
-          <p:cNvPr id="22" name="Text 20"/>
-          <p:cNvSpPr/>
-          <p:nvPr/>
-        </p:nvSpPr>
-        <p:spPr>
-          <a:xfrm>
-            <a:off x="822960" y="3755398"/>
-            <a:ext cx="7498080" cy="320040"/>
-          </a:xfrm>
-          <a:prstGeom prst="rect">
-            <a:avLst/>
-          </a:prstGeom>
-          <a:noFill/>
-          <a:ln/>
-        </p:spPr>
-        <p:txBody>
-          <a:bodyPr wrap="square" rtlCol="0" anchor="ctr"/>
-          <a:lstStyle/>
-          <a:p>
-            <a:pPr marL="285750" indent="-285750">
-              <a:buFont typeface="Wingdings" panose="05000000000000000000" pitchFamily="2" charset="2"/>
-              <a:buChar char="ü"/>
-            </a:pPr>
-            <a:r>
-              <a:rPr lang="en-US" sz="1300" dirty="0">
-                <a:solidFill>
-                  <a:srgbClr val="212121"/>
-                </a:solidFill>
-              </a:rPr>
-              <a:t>If normal: 'Schedule next month'</a:t>
-            </a:r>
-            <a:endParaRPr lang="en-US" sz="1300" dirty="0"/>
-          </a:p>
-        </p:txBody>
-      </p:sp>
-      <p:sp>
-        <p:nvSpPr>
-          <p:cNvPr id="23" name="Text 21"/>
-          <p:cNvSpPr/>
-          <p:nvPr/>
-        </p:nvSpPr>
-        <p:spPr>
-          <a:xfrm>
-            <a:off x="822960" y="4166878"/>
-            <a:ext cx="7498080" cy="320040"/>
-          </a:xfrm>
-          <a:prstGeom prst="rect">
-            <a:avLst/>
-          </a:prstGeom>
-          <a:noFill/>
-          <a:ln/>
-        </p:spPr>
-        <p:txBody>
-          <a:bodyPr wrap="square" rtlCol="0" anchor="ctr"/>
-          <a:lstStyle/>
-          <a:p>
-            <a:pPr marL="285750" indent="-285750">
-              <a:buFont typeface="Wingdings" panose="05000000000000000000" pitchFamily="2" charset="2"/>
-              <a:buChar char="ü"/>
-            </a:pPr>
-            <a:r>
-              <a:rPr lang="en-US" sz="1300" dirty="0">
-                <a:solidFill>
-                  <a:srgbClr val="212121"/>
-                </a:solidFill>
-              </a:rPr>
-              <a:t>If watch zone: 'Monitor closely next visit'</a:t>
-            </a:r>
-            <a:endParaRPr lang="en-US" sz="1300" dirty="0"/>
-          </a:p>
-        </p:txBody>
-      </p:sp>
-      <p:sp>
-        <p:nvSpPr>
-          <p:cNvPr id="24" name="Text 22"/>
-          <p:cNvSpPr/>
-          <p:nvPr/>
-        </p:nvSpPr>
-        <p:spPr>
-          <a:xfrm>
-            <a:off x="822960" y="4578358"/>
-            <a:ext cx="7498080" cy="320040"/>
-          </a:xfrm>
-          <a:prstGeom prst="rect">
-            <a:avLst/>
-          </a:prstGeom>
-          <a:noFill/>
-          <a:ln/>
-        </p:spPr>
-        <p:txBody>
-          <a:bodyPr wrap="square" rtlCol="0" anchor="ctr"/>
-          <a:lstStyle/>
-          <a:p>
-            <a:pPr marL="285750" indent="-285750">
-              <a:buFont typeface="Wingdings" panose="05000000000000000000" pitchFamily="2" charset="2"/>
-              <a:buChar char="ü"/>
-            </a:pPr>
-            <a:r>
-              <a:rPr lang="en-US" sz="1300" dirty="0">
-                <a:solidFill>
-                  <a:srgbClr val="212121"/>
-                </a:solidFill>
-              </a:rPr>
-              <a:t>If alert: 'Call contractor immediately'</a:t>
-            </a:r>
-            <a:endParaRPr lang="en-US" sz="1300" dirty="0"/>
           </a:p>
         </p:txBody>
       </p:sp>
@@ -9423,7 +10713,7 @@
 
 <file path=ppt/slides/slide9.xml><?xml version="1.0" encoding="utf-8"?>
 <p:sld xmlns:a="http://schemas.openxmlformats.org/drawingml/2006/main" xmlns:r="http://schemas.openxmlformats.org/officeDocument/2006/relationships" xmlns:p="http://schemas.openxmlformats.org/presentationml/2006/main">
-  <p:cSld name="Slide 9">
+  <p:cSld name="Slide 5">
     <p:bg>
       <p:bgPr>
         <a:solidFill>
@@ -9448,37 +10738,6 @@
       </p:grpSpPr>
       <p:sp>
         <p:nvSpPr>
-          <p:cNvPr id="6" name="Shape 4"/>
-          <p:cNvSpPr/>
-          <p:nvPr/>
-        </p:nvSpPr>
-        <p:spPr>
-          <a:xfrm>
-            <a:off x="2770450" y="1342147"/>
-            <a:ext cx="610710" cy="0"/>
-          </a:xfrm>
-          <a:prstGeom prst="line">
-            <a:avLst/>
-          </a:prstGeom>
-          <a:noFill/>
-          <a:ln w="25400">
-            <a:solidFill>
-              <a:srgbClr val="1976D2"/>
-            </a:solidFill>
-            <a:prstDash val="solid"/>
-            <a:tailEnd type="triangle"/>
-          </a:ln>
-        </p:spPr>
-        <p:txBody>
-          <a:bodyPr/>
-          <a:lstStyle/>
-          <a:p>
-            <a:endParaRPr lang="en-AU"/>
-          </a:p>
-        </p:txBody>
-      </p:sp>
-      <p:sp>
-        <p:nvSpPr>
           <p:cNvPr id="2" name="Shape 0"/>
           <p:cNvSpPr/>
           <p:nvPr/>
@@ -9539,7 +10798,7 @@
                   <a:srgbClr val="FFFFFF"/>
                 </a:solidFill>
               </a:rPr>
-              <a:t>Data Flow Diagram</a:t>
+              <a:t>System Sensor Architecture</a:t>
             </a:r>
             <a:endParaRPr lang="en-US" sz="4000" dirty="0"/>
           </a:p>
@@ -9553,8 +10812,8 @@
         </p:nvSpPr>
         <p:spPr>
           <a:xfrm>
-            <a:off x="965570" y="1093413"/>
-            <a:ext cx="1828800" cy="548640"/>
+            <a:off x="457200" y="1097734"/>
+            <a:ext cx="2286000" cy="913946"/>
           </a:xfrm>
           <a:prstGeom prst="rect">
             <a:avLst/>
@@ -9585,8 +10844,154 @@
         </p:nvSpPr>
         <p:spPr>
           <a:xfrm>
-            <a:off x="1078810" y="1147763"/>
-            <a:ext cx="1645920" cy="365760"/>
+            <a:off x="411480" y="1233982"/>
+            <a:ext cx="2286000" cy="640534"/>
+          </a:xfrm>
+          <a:prstGeom prst="rect">
+            <a:avLst/>
+          </a:prstGeom>
+          <a:noFill/>
+          <a:ln/>
+        </p:spPr>
+        <p:txBody>
+          <a:bodyPr wrap="square" rtlCol="0" anchor="ctr"/>
+          <a:lstStyle/>
+          <a:p>
+            <a:pPr algn="ctr"/>
+            <a:r>
+              <a:rPr lang="en-US" sz="1200" b="1" dirty="0">
+                <a:solidFill>
+                  <a:srgbClr val="212121"/>
+                </a:solidFill>
+              </a:rPr>
+              <a:t>SENSORS</a:t>
+            </a:r>
+            <a:r>
+              <a:rPr lang="en-US" sz="1050" b="1" dirty="0">
+                <a:solidFill>
+                  <a:srgbClr val="212121"/>
+                </a:solidFill>
+              </a:rPr>
+              <a:t>:</a:t>
+            </a:r>
+            <a:r>
+              <a:rPr lang="en-US" sz="1050" dirty="0"/>
+              <a:t> </a:t>
+            </a:r>
+          </a:p>
+          <a:p>
+            <a:pPr marL="171450" indent="-171450" algn="ctr">
+              <a:buFont typeface="Arial" panose="020B0604020202020204" pitchFamily="34" charset="0"/>
+              <a:buChar char="•"/>
+            </a:pPr>
+            <a:r>
+              <a:rPr lang="en-US" sz="1050" b="1" dirty="0">
+                <a:solidFill>
+                  <a:srgbClr val="212121"/>
+                </a:solidFill>
+              </a:rPr>
+              <a:t>Humidity</a:t>
+            </a:r>
+          </a:p>
+          <a:p>
+            <a:pPr marL="171450" indent="-171450" algn="ctr">
+              <a:buFont typeface="Arial" panose="020B0604020202020204" pitchFamily="34" charset="0"/>
+              <a:buChar char="•"/>
+            </a:pPr>
+            <a:r>
+              <a:rPr lang="en-US" sz="1050" dirty="0"/>
+              <a:t> </a:t>
+            </a:r>
+            <a:r>
+              <a:rPr lang="en-US" sz="1050" b="1" dirty="0">
+                <a:solidFill>
+                  <a:srgbClr val="212121"/>
+                </a:solidFill>
+              </a:rPr>
+              <a:t>temperature</a:t>
+            </a:r>
+            <a:r>
+              <a:rPr lang="en-US" sz="1050" dirty="0"/>
+              <a:t> </a:t>
+            </a:r>
+          </a:p>
+          <a:p>
+            <a:pPr marL="171450" indent="-171450" algn="ctr">
+              <a:buFont typeface="Arial" panose="020B0604020202020204" pitchFamily="34" charset="0"/>
+              <a:buChar char="•"/>
+            </a:pPr>
+            <a:r>
+              <a:rPr lang="en-US" sz="1050" b="1" dirty="0">
+                <a:solidFill>
+                  <a:srgbClr val="212121"/>
+                </a:solidFill>
+              </a:rPr>
+              <a:t>thermal</a:t>
+            </a:r>
+            <a:r>
+              <a:rPr lang="en-US" sz="1050" dirty="0"/>
+              <a:t> </a:t>
+            </a:r>
+          </a:p>
+          <a:p>
+            <a:pPr marL="171450" indent="-171450" algn="ctr">
+              <a:buFont typeface="Arial" panose="020B0604020202020204" pitchFamily="34" charset="0"/>
+              <a:buChar char="•"/>
+            </a:pPr>
+            <a:r>
+              <a:rPr lang="en-US" sz="1050" b="1" dirty="0">
+                <a:solidFill>
+                  <a:srgbClr val="212121"/>
+                </a:solidFill>
+              </a:rPr>
+              <a:t>GPS</a:t>
+            </a:r>
+            <a:endParaRPr lang="en-US" sz="1200" dirty="0"/>
+          </a:p>
+        </p:txBody>
+      </p:sp>
+      <p:sp>
+        <p:nvSpPr>
+          <p:cNvPr id="6" name="Shape 4"/>
+          <p:cNvSpPr/>
+          <p:nvPr/>
+        </p:nvSpPr>
+        <p:spPr>
+          <a:xfrm>
+            <a:off x="3200400" y="1097279"/>
+            <a:ext cx="2286000" cy="913941"/>
+          </a:xfrm>
+          <a:prstGeom prst="rect">
+            <a:avLst/>
+          </a:prstGeom>
+          <a:solidFill>
+            <a:srgbClr val="C8E6C9"/>
+          </a:solidFill>
+          <a:ln w="25400">
+            <a:solidFill>
+              <a:srgbClr val="1976D2"/>
+            </a:solidFill>
+            <a:prstDash val="solid"/>
+          </a:ln>
+        </p:spPr>
+        <p:txBody>
+          <a:bodyPr/>
+          <a:lstStyle/>
+          <a:p>
+            <a:endParaRPr lang="en-AU"/>
+          </a:p>
+        </p:txBody>
+      </p:sp>
+      <p:sp>
+        <p:nvSpPr>
+          <p:cNvPr id="7" name="Text 5"/>
+          <p:cNvSpPr/>
+          <p:nvPr/>
+        </p:nvSpPr>
+        <p:spPr>
+          <a:xfrm>
+            <a:off x="3291840" y="1237539"/>
+            <a:ext cx="2103120" cy="548640"/>
           </a:xfrm>
           <a:prstGeom prst="rect">
             <a:avLst/>
@@ -9602,41 +11007,72 @@
               <a:buNone/>
             </a:pPr>
             <a:r>
-              <a:rPr lang="en-US" sz="1400" b="1" dirty="0">
+              <a:rPr lang="en-US" sz="1200" b="1" dirty="0">
                 <a:solidFill>
                   <a:srgbClr val="212121"/>
                 </a:solidFill>
               </a:rPr>
-              <a:t>ROBOT</a:t>
-            </a:r>
-            <a:endParaRPr lang="en-US" sz="1400" dirty="0"/>
-          </a:p>
-          <a:p>
-            <a:pPr marL="0" indent="0" algn="ctr">
-              <a:buNone/>
-            </a:pPr>
-            <a:r>
-              <a:rPr lang="en-US" sz="1400" b="1" dirty="0">
+              <a:t>PROCESSING:</a:t>
+            </a:r>
+            <a:endParaRPr lang="en-US" sz="1200" dirty="0"/>
+          </a:p>
+          <a:p>
+            <a:pPr marL="171450" indent="-171450" algn="ctr">
+              <a:buFont typeface="Arial" panose="020B0604020202020204" pitchFamily="34" charset="0"/>
+              <a:buChar char="•"/>
+            </a:pPr>
+            <a:r>
+              <a:rPr lang="en-US" sz="1050" b="1" dirty="0">
                 <a:solidFill>
                   <a:srgbClr val="212121"/>
                 </a:solidFill>
               </a:rPr>
-              <a:t>Collects Data</a:t>
-            </a:r>
-            <a:endParaRPr lang="en-US" sz="1400" dirty="0"/>
-          </a:p>
-        </p:txBody>
-      </p:sp>
-      <p:sp>
-        <p:nvSpPr>
-          <p:cNvPr id="7" name="Shape 5"/>
-          <p:cNvSpPr/>
-          <p:nvPr/>
-        </p:nvSpPr>
-        <p:spPr>
-          <a:xfrm>
-            <a:off x="3381160" y="1087358"/>
-            <a:ext cx="1828800" cy="548640"/>
+              <a:t>Data Collection</a:t>
+            </a:r>
+            <a:endParaRPr lang="en-US" sz="1050" dirty="0"/>
+          </a:p>
+          <a:p>
+            <a:pPr marL="171450" indent="-171450" algn="ctr">
+              <a:buFont typeface="Arial" panose="020B0604020202020204" pitchFamily="34" charset="0"/>
+              <a:buChar char="•"/>
+            </a:pPr>
+            <a:r>
+              <a:rPr lang="en-US" sz="1050" b="1" dirty="0">
+                <a:solidFill>
+                  <a:srgbClr val="212121"/>
+                </a:solidFill>
+              </a:rPr>
+              <a:t>Baseline Learning</a:t>
+            </a:r>
+            <a:endParaRPr lang="en-US" sz="1050" dirty="0"/>
+          </a:p>
+          <a:p>
+            <a:pPr marL="171450" indent="-171450" algn="ctr">
+              <a:buFont typeface="Arial" panose="020B0604020202020204" pitchFamily="34" charset="0"/>
+              <a:buChar char="•"/>
+            </a:pPr>
+            <a:r>
+              <a:rPr lang="en-US" sz="1050" b="1" dirty="0">
+                <a:solidFill>
+                  <a:srgbClr val="212121"/>
+                </a:solidFill>
+              </a:rPr>
+              <a:t>Trend Analysis</a:t>
+            </a:r>
+            <a:endParaRPr lang="en-US" sz="1050" dirty="0"/>
+          </a:p>
+        </p:txBody>
+      </p:sp>
+      <p:sp>
+        <p:nvSpPr>
+          <p:cNvPr id="8" name="Shape 6"/>
+          <p:cNvSpPr/>
+          <p:nvPr/>
+        </p:nvSpPr>
+        <p:spPr>
+          <a:xfrm>
+            <a:off x="5943600" y="1097280"/>
+            <a:ext cx="2286000" cy="914400"/>
           </a:xfrm>
           <a:prstGeom prst="rect">
             <a:avLst/>
@@ -9661,14 +11097,14 @@
       </p:sp>
       <p:sp>
         <p:nvSpPr>
-          <p:cNvPr id="8" name="Text 6"/>
-          <p:cNvSpPr/>
-          <p:nvPr/>
-        </p:nvSpPr>
-        <p:spPr>
-          <a:xfrm>
-            <a:off x="3424761" y="1150185"/>
-            <a:ext cx="1645920" cy="365760"/>
+          <p:cNvPr id="9" name="Text 7"/>
+          <p:cNvSpPr/>
+          <p:nvPr/>
+        </p:nvSpPr>
+        <p:spPr>
+          <a:xfrm>
+            <a:off x="6035040" y="1223011"/>
+            <a:ext cx="2103120" cy="548640"/>
           </a:xfrm>
           <a:prstGeom prst="rect">
             <a:avLst/>
@@ -9684,41 +11120,71 @@
               <a:buNone/>
             </a:pPr>
             <a:r>
-              <a:rPr lang="en-US" sz="1400" b="1" dirty="0">
+              <a:rPr lang="en-US" sz="1200" b="1" dirty="0">
                 <a:solidFill>
                   <a:srgbClr val="212121"/>
                 </a:solidFill>
               </a:rPr>
-              <a:t>LOCAL</a:t>
-            </a:r>
-            <a:endParaRPr lang="en-US" sz="1400" dirty="0"/>
-          </a:p>
-          <a:p>
-            <a:pPr marL="0" indent="0" algn="ctr">
-              <a:buNone/>
-            </a:pPr>
-            <a:r>
-              <a:rPr lang="en-US" sz="1400" b="1" dirty="0">
+              <a:t>OUTPUT:</a:t>
+            </a:r>
+            <a:endParaRPr lang="en-US" sz="1200" dirty="0"/>
+          </a:p>
+          <a:p>
+            <a:pPr marL="171450" indent="-171450" algn="ctr">
+              <a:buFont typeface="Arial" panose="020B0604020202020204" pitchFamily="34" charset="0"/>
+              <a:buChar char="•"/>
+            </a:pPr>
+            <a:r>
+              <a:rPr lang="en-US" sz="1050" b="1" dirty="0">
                 <a:solidFill>
                   <a:srgbClr val="212121"/>
                 </a:solidFill>
               </a:rPr>
-              <a:t>SD Storage</a:t>
-            </a:r>
-            <a:endParaRPr lang="en-US" sz="1400" dirty="0"/>
-          </a:p>
-        </p:txBody>
-      </p:sp>
-      <p:sp>
-        <p:nvSpPr>
-          <p:cNvPr id="9" name="Shape 7"/>
-          <p:cNvSpPr/>
-          <p:nvPr/>
-        </p:nvSpPr>
-        <p:spPr>
-          <a:xfrm>
-            <a:off x="5209960" y="1361678"/>
-            <a:ext cx="564990" cy="0"/>
+              <a:t>Alerts</a:t>
+            </a:r>
+            <a:endParaRPr lang="en-US" sz="1050" dirty="0"/>
+          </a:p>
+          <a:p>
+            <a:pPr marL="171450" indent="-171450" algn="ctr">
+              <a:buFont typeface="Arial" panose="020B0604020202020204" pitchFamily="34" charset="0"/>
+              <a:buChar char="•"/>
+            </a:pPr>
+            <a:r>
+              <a:rPr lang="en-US" sz="1050" b="1" dirty="0">
+                <a:solidFill>
+                  <a:srgbClr val="212121"/>
+                </a:solidFill>
+              </a:rPr>
+              <a:t>Reports</a:t>
+            </a:r>
+          </a:p>
+          <a:p>
+            <a:pPr marL="171450" indent="-171450" algn="ctr">
+              <a:buFont typeface="Arial" panose="020B0604020202020204" pitchFamily="34" charset="0"/>
+              <a:buChar char="•"/>
+            </a:pPr>
+            <a:r>
+              <a:rPr lang="en-US" sz="1050" b="1" dirty="0">
+                <a:solidFill>
+                  <a:srgbClr val="212121"/>
+                </a:solidFill>
+              </a:rPr>
+              <a:t>Dashboard</a:t>
+            </a:r>
+            <a:endParaRPr lang="en-US" sz="1050" dirty="0"/>
+          </a:p>
+        </p:txBody>
+      </p:sp>
+      <p:sp>
+        <p:nvSpPr>
+          <p:cNvPr id="10" name="Shape 8"/>
+          <p:cNvSpPr/>
+          <p:nvPr/>
+        </p:nvSpPr>
+        <p:spPr>
+          <a:xfrm>
+            <a:off x="2743200" y="1572041"/>
+            <a:ext cx="457200" cy="0"/>
           </a:xfrm>
           <a:prstGeom prst="line">
             <a:avLst/>
@@ -9742,96 +11208,14 @@
       </p:sp>
       <p:sp>
         <p:nvSpPr>
-          <p:cNvPr id="10" name="Shape 8"/>
-          <p:cNvSpPr/>
-          <p:nvPr/>
-        </p:nvSpPr>
-        <p:spPr>
-          <a:xfrm>
-            <a:off x="5774950" y="1077592"/>
-            <a:ext cx="1828800" cy="548640"/>
-          </a:xfrm>
-          <a:prstGeom prst="rect">
-            <a:avLst/>
-          </a:prstGeom>
-          <a:solidFill>
-            <a:srgbClr val="C8E6C9"/>
-          </a:solidFill>
-          <a:ln w="25400">
-            <a:solidFill>
-              <a:srgbClr val="1976D2"/>
-            </a:solidFill>
-            <a:prstDash val="solid"/>
-          </a:ln>
-        </p:spPr>
-        <p:txBody>
-          <a:bodyPr/>
-          <a:lstStyle/>
-          <a:p>
-            <a:endParaRPr lang="en-AU"/>
-          </a:p>
-        </p:txBody>
-      </p:sp>
-      <p:sp>
-        <p:nvSpPr>
-          <p:cNvPr id="11" name="Text 9"/>
-          <p:cNvSpPr/>
-          <p:nvPr/>
-        </p:nvSpPr>
-        <p:spPr>
-          <a:xfrm>
-            <a:off x="5866390" y="1159267"/>
-            <a:ext cx="1645920" cy="365760"/>
-          </a:xfrm>
-          <a:prstGeom prst="rect">
-            <a:avLst/>
-          </a:prstGeom>
-          <a:noFill/>
-          <a:ln/>
-        </p:spPr>
-        <p:txBody>
-          <a:bodyPr wrap="square" rtlCol="0" anchor="ctr"/>
-          <a:lstStyle/>
-          <a:p>
-            <a:pPr marL="0" indent="0" algn="ctr">
-              <a:buNone/>
-            </a:pPr>
-            <a:r>
-              <a:rPr lang="en-US" sz="1400" b="1" dirty="0">
-                <a:solidFill>
-                  <a:srgbClr val="212121"/>
-                </a:solidFill>
-              </a:rPr>
-              <a:t>CLOUD</a:t>
-            </a:r>
-            <a:endParaRPr lang="en-US" sz="1400" dirty="0"/>
-          </a:p>
-          <a:p>
-            <a:pPr marL="0" indent="0" algn="ctr">
-              <a:buNone/>
-            </a:pPr>
-            <a:r>
-              <a:rPr lang="en-US" sz="1400" b="1" dirty="0">
-                <a:solidFill>
-                  <a:srgbClr val="212121"/>
-                </a:solidFill>
-              </a:rPr>
-              <a:t>Upload</a:t>
-            </a:r>
-            <a:endParaRPr lang="en-US" sz="1400" dirty="0"/>
-          </a:p>
-        </p:txBody>
-      </p:sp>
-      <p:sp>
-        <p:nvSpPr>
-          <p:cNvPr id="12" name="Shape 10"/>
-          <p:cNvSpPr/>
-          <p:nvPr/>
-        </p:nvSpPr>
-        <p:spPr>
-          <a:xfrm>
-            <a:off x="6746274" y="1642052"/>
-            <a:ext cx="0" cy="331323"/>
+          <p:cNvPr id="11" name="Shape 9"/>
+          <p:cNvSpPr/>
+          <p:nvPr/>
+        </p:nvSpPr>
+        <p:spPr>
+          <a:xfrm>
+            <a:off x="5486400" y="1572041"/>
+            <a:ext cx="457200" cy="0"/>
           </a:xfrm>
           <a:prstGeom prst="line">
             <a:avLst/>
@@ -9855,33 +11239,73 @@
       </p:sp>
       <p:sp>
         <p:nvSpPr>
-          <p:cNvPr id="13" name="Shape 11"/>
-          <p:cNvSpPr/>
-          <p:nvPr/>
-        </p:nvSpPr>
-        <p:spPr>
-          <a:xfrm>
-            <a:off x="5774950" y="1973376"/>
-            <a:ext cx="1828800" cy="548640"/>
-          </a:xfrm>
-          <a:prstGeom prst="rect">
-            <a:avLst/>
-          </a:prstGeom>
-          <a:solidFill>
-            <a:srgbClr val="C8E6C9"/>
-          </a:solidFill>
-          <a:ln w="25400">
-            <a:solidFill>
-              <a:srgbClr val="1976D2"/>
-            </a:solidFill>
-            <a:prstDash val="solid"/>
-          </a:ln>
-        </p:spPr>
-        <p:txBody>
-          <a:bodyPr/>
-          <a:lstStyle/>
-          <a:p>
-            <a:endParaRPr lang="en-AU"/>
+          <p:cNvPr id="12" name="Text 10"/>
+          <p:cNvSpPr/>
+          <p:nvPr/>
+        </p:nvSpPr>
+        <p:spPr>
+          <a:xfrm>
+            <a:off x="457200" y="2103120"/>
+            <a:ext cx="8229600" cy="274320"/>
+          </a:xfrm>
+          <a:prstGeom prst="rect">
+            <a:avLst/>
+          </a:prstGeom>
+          <a:noFill/>
+          <a:ln/>
+        </p:spPr>
+        <p:txBody>
+          <a:bodyPr wrap="square" rtlCol="0" anchor="ctr"/>
+          <a:lstStyle/>
+          <a:p>
+            <a:pPr marL="0" indent="0">
+              <a:buNone/>
+            </a:pPr>
+            <a:r>
+              <a:rPr lang="en-US" sz="1400" b="1" dirty="0">
+                <a:solidFill>
+                  <a:srgbClr val="212121"/>
+                </a:solidFill>
+              </a:rPr>
+              <a:t>Continuous cycle:</a:t>
+            </a:r>
+            <a:endParaRPr lang="en-US" sz="1400" dirty="0"/>
+          </a:p>
+        </p:txBody>
+      </p:sp>
+      <p:sp>
+        <p:nvSpPr>
+          <p:cNvPr id="13" name="Text 11"/>
+          <p:cNvSpPr/>
+          <p:nvPr/>
+        </p:nvSpPr>
+        <p:spPr>
+          <a:xfrm>
+            <a:off x="731520" y="2468880"/>
+            <a:ext cx="7680960" cy="320040"/>
+          </a:xfrm>
+          <a:prstGeom prst="rect">
+            <a:avLst/>
+          </a:prstGeom>
+          <a:noFill/>
+          <a:ln/>
+        </p:spPr>
+        <p:txBody>
+          <a:bodyPr wrap="square" rtlCol="0" anchor="ctr"/>
+          <a:lstStyle/>
+          <a:p>
+            <a:pPr marL="0" indent="0">
+              <a:buNone/>
+            </a:pPr>
+            <a:r>
+              <a:rPr lang="en-US" sz="1300" dirty="0">
+                <a:solidFill>
+                  <a:srgbClr val="212121"/>
+                </a:solidFill>
+              </a:rPr>
+              <a:t>1. Robot collects sensor data every 10 seconds</a:t>
+            </a:r>
+            <a:endParaRPr lang="en-US" sz="1300" dirty="0"/>
           </a:p>
         </p:txBody>
       </p:sp>
@@ -9893,108 +11317,119 @@
         </p:nvSpPr>
         <p:spPr>
           <a:xfrm>
-            <a:off x="5923314" y="2064816"/>
-            <a:ext cx="1645920" cy="365760"/>
-          </a:xfrm>
-          <a:prstGeom prst="rect">
-            <a:avLst/>
-          </a:prstGeom>
-          <a:noFill/>
-          <a:ln/>
-        </p:spPr>
-        <p:txBody>
-          <a:bodyPr wrap="square" rtlCol="0" anchor="ctr"/>
-          <a:lstStyle/>
-          <a:p>
-            <a:pPr marL="0" indent="0" algn="ctr">
-              <a:buNone/>
-            </a:pPr>
-            <a:r>
-              <a:rPr lang="en-US" sz="1400" b="1" dirty="0">
+            <a:off x="731520" y="2903219"/>
+            <a:ext cx="7680960" cy="320040"/>
+          </a:xfrm>
+          <a:prstGeom prst="rect">
+            <a:avLst/>
+          </a:prstGeom>
+          <a:noFill/>
+          <a:ln/>
+        </p:spPr>
+        <p:txBody>
+          <a:bodyPr wrap="square" rtlCol="0" anchor="ctr"/>
+          <a:lstStyle/>
+          <a:p>
+            <a:pPr marL="0" indent="0">
+              <a:buNone/>
+            </a:pPr>
+            <a:r>
+              <a:rPr lang="en-US" sz="1300" dirty="0">
                 <a:solidFill>
                   <a:srgbClr val="212121"/>
                 </a:solidFill>
               </a:rPr>
-              <a:t>ANALYSIS</a:t>
-            </a:r>
-            <a:endParaRPr lang="en-US" sz="1400" dirty="0"/>
-          </a:p>
-          <a:p>
-            <a:pPr marL="0" indent="0" algn="ctr">
-              <a:buNone/>
-            </a:pPr>
-            <a:r>
-              <a:rPr lang="en-US" sz="1400" b="1" dirty="0">
+              <a:t>2. Data stored locally (SD card) &amp; uploaded (via </a:t>
+            </a:r>
+            <a:r>
+              <a:rPr lang="en-US" sz="1300" dirty="0" err="1">
                 <a:solidFill>
                   <a:srgbClr val="212121"/>
                 </a:solidFill>
               </a:rPr>
-              <a:t>Engine</a:t>
-            </a:r>
-            <a:endParaRPr lang="en-US" sz="1400" dirty="0"/>
-          </a:p>
-        </p:txBody>
-      </p:sp>
-      <p:sp>
-        <p:nvSpPr>
-          <p:cNvPr id="15" name="Shape 13"/>
-          <p:cNvSpPr/>
-          <p:nvPr/>
-        </p:nvSpPr>
-        <p:spPr>
-          <a:xfrm flipH="1" flipV="1">
-            <a:off x="4611058" y="2256172"/>
-            <a:ext cx="1177516" cy="9689"/>
-          </a:xfrm>
-          <a:prstGeom prst="line">
-            <a:avLst/>
-          </a:prstGeom>
-          <a:noFill/>
-          <a:ln w="25400">
-            <a:solidFill>
-              <a:srgbClr val="1976D2"/>
-            </a:solidFill>
-            <a:prstDash val="solid"/>
-            <a:tailEnd type="triangle"/>
-          </a:ln>
-        </p:spPr>
-        <p:txBody>
-          <a:bodyPr/>
-          <a:lstStyle/>
-          <a:p>
-            <a:endParaRPr lang="en-AU"/>
-          </a:p>
-        </p:txBody>
-      </p:sp>
-      <p:sp>
-        <p:nvSpPr>
-          <p:cNvPr id="16" name="Shape 14"/>
-          <p:cNvSpPr/>
-          <p:nvPr/>
-        </p:nvSpPr>
-        <p:spPr>
-          <a:xfrm>
-            <a:off x="2770450" y="1981853"/>
-            <a:ext cx="1828800" cy="548640"/>
-          </a:xfrm>
-          <a:prstGeom prst="rect">
-            <a:avLst/>
-          </a:prstGeom>
-          <a:solidFill>
-            <a:srgbClr val="E3F2FD"/>
-          </a:solidFill>
-          <a:ln w="25400">
-            <a:solidFill>
-              <a:srgbClr val="1976D2"/>
-            </a:solidFill>
-            <a:prstDash val="solid"/>
-          </a:ln>
-        </p:spPr>
-        <p:txBody>
-          <a:bodyPr/>
-          <a:lstStyle/>
-          <a:p>
-            <a:endParaRPr lang="en-AU"/>
+              <a:t>WiFi</a:t>
+            </a:r>
+            <a:r>
+              <a:rPr lang="en-US" sz="1300" dirty="0">
+                <a:solidFill>
+                  <a:srgbClr val="212121"/>
+                </a:solidFill>
+              </a:rPr>
+              <a:t>) to remote data base</a:t>
+            </a:r>
+            <a:endParaRPr lang="en-US" sz="1300" dirty="0"/>
+          </a:p>
+        </p:txBody>
+      </p:sp>
+      <p:sp>
+        <p:nvSpPr>
+          <p:cNvPr id="15" name="Text 13"/>
+          <p:cNvSpPr/>
+          <p:nvPr/>
+        </p:nvSpPr>
+        <p:spPr>
+          <a:xfrm>
+            <a:off x="731520" y="3314699"/>
+            <a:ext cx="7680960" cy="320040"/>
+          </a:xfrm>
+          <a:prstGeom prst="rect">
+            <a:avLst/>
+          </a:prstGeom>
+          <a:noFill/>
+          <a:ln/>
+        </p:spPr>
+        <p:txBody>
+          <a:bodyPr wrap="square" rtlCol="0" anchor="ctr"/>
+          <a:lstStyle/>
+          <a:p>
+            <a:pPr marL="0" indent="0">
+              <a:buNone/>
+            </a:pPr>
+            <a:r>
+              <a:rPr lang="en-US" sz="1300" dirty="0">
+                <a:solidFill>
+                  <a:srgbClr val="212121"/>
+                </a:solidFill>
+              </a:rPr>
+              <a:t>3. System compares current to baseline</a:t>
+            </a:r>
+            <a:endParaRPr lang="en-US" sz="1300" dirty="0"/>
+          </a:p>
+        </p:txBody>
+      </p:sp>
+      <p:sp>
+        <p:nvSpPr>
+          <p:cNvPr id="16" name="Text 14"/>
+          <p:cNvSpPr/>
+          <p:nvPr/>
+        </p:nvSpPr>
+        <p:spPr>
+          <a:xfrm>
+            <a:off x="731520" y="3726179"/>
+            <a:ext cx="7680960" cy="320040"/>
+          </a:xfrm>
+          <a:prstGeom prst="rect">
+            <a:avLst/>
+          </a:prstGeom>
+          <a:noFill/>
+          <a:ln/>
+        </p:spPr>
+        <p:txBody>
+          <a:bodyPr wrap="square" rtlCol="0" anchor="ctr"/>
+          <a:lstStyle/>
+          <a:p>
+            <a:pPr marL="0" indent="0">
+              <a:buNone/>
+            </a:pPr>
+            <a:r>
+              <a:rPr lang="en-US" sz="1300" dirty="0">
+                <a:solidFill>
+                  <a:srgbClr val="212121"/>
+                </a:solidFill>
+              </a:rPr>
+              <a:t>4. Detects anomalies, Trends &amp; generates alerts</a:t>
+            </a:r>
+            <a:endParaRPr lang="en-US" sz="1300" dirty="0"/>
           </a:p>
         </p:txBody>
       </p:sp>
@@ -10006,460 +11441,34 @@
         </p:nvSpPr>
         <p:spPr>
           <a:xfrm>
-            <a:off x="2861890" y="2073293"/>
-            <a:ext cx="1645920" cy="365760"/>
-          </a:xfrm>
-          <a:prstGeom prst="rect">
-            <a:avLst/>
-          </a:prstGeom>
-          <a:noFill/>
-          <a:ln/>
-        </p:spPr>
-        <p:txBody>
-          <a:bodyPr wrap="square" rtlCol="0" anchor="ctr"/>
-          <a:lstStyle/>
-          <a:p>
-            <a:pPr marL="0" indent="0" algn="ctr">
-              <a:buNone/>
-            </a:pPr>
-            <a:r>
-              <a:rPr lang="en-US" sz="1400" b="1" dirty="0">
+            <a:off x="731520" y="4137659"/>
+            <a:ext cx="7680960" cy="320040"/>
+          </a:xfrm>
+          <a:prstGeom prst="rect">
+            <a:avLst/>
+          </a:prstGeom>
+          <a:noFill/>
+          <a:ln/>
+        </p:spPr>
+        <p:txBody>
+          <a:bodyPr wrap="square" rtlCol="0" anchor="ctr"/>
+          <a:lstStyle/>
+          <a:p>
+            <a:pPr marL="0" indent="0">
+              <a:buNone/>
+            </a:pPr>
+            <a:r>
+              <a:rPr lang="en-US" sz="1300" dirty="0">
                 <a:solidFill>
                   <a:srgbClr val="212121"/>
                 </a:solidFill>
               </a:rPr>
-              <a:t>COMPARE</a:t>
-            </a:r>
-            <a:endParaRPr lang="en-US" sz="1400" dirty="0"/>
-          </a:p>
-          <a:p>
-            <a:pPr marL="0" indent="0" algn="ctr">
-              <a:buNone/>
-            </a:pPr>
-            <a:r>
-              <a:rPr lang="en-US" sz="1400" b="1" dirty="0">
-                <a:solidFill>
-                  <a:srgbClr val="212121"/>
-                </a:solidFill>
-              </a:rPr>
-              <a:t>to Baseline</a:t>
-            </a:r>
-            <a:endParaRPr lang="en-US" sz="1400" dirty="0"/>
-          </a:p>
-        </p:txBody>
-      </p:sp>
-      <p:sp>
-        <p:nvSpPr>
-          <p:cNvPr id="18" name="Shape 16"/>
-          <p:cNvSpPr/>
-          <p:nvPr/>
-        </p:nvSpPr>
-        <p:spPr>
-          <a:xfrm>
-            <a:off x="3684850" y="2530493"/>
-            <a:ext cx="0" cy="457200"/>
-          </a:xfrm>
-          <a:prstGeom prst="line">
-            <a:avLst/>
-          </a:prstGeom>
-          <a:noFill/>
-          <a:ln w="25400">
-            <a:solidFill>
-              <a:srgbClr val="1976D2"/>
-            </a:solidFill>
-            <a:prstDash val="solid"/>
-            <a:tailEnd type="triangle"/>
-          </a:ln>
-        </p:spPr>
-        <p:txBody>
-          <a:bodyPr/>
-          <a:lstStyle/>
-          <a:p>
-            <a:endParaRPr lang="en-AU"/>
-          </a:p>
-        </p:txBody>
-      </p:sp>
-      <p:sp>
-        <p:nvSpPr>
-          <p:cNvPr id="19" name="Shape 17"/>
-          <p:cNvSpPr/>
-          <p:nvPr/>
-        </p:nvSpPr>
-        <p:spPr>
-          <a:xfrm>
-            <a:off x="2770449" y="2999199"/>
-            <a:ext cx="1828800" cy="548640"/>
-          </a:xfrm>
-          <a:prstGeom prst="rect">
-            <a:avLst/>
-          </a:prstGeom>
-          <a:solidFill>
-            <a:srgbClr val="FFE0B2"/>
-          </a:solidFill>
-          <a:ln w="25400">
-            <a:solidFill>
-              <a:srgbClr val="1976D2"/>
-            </a:solidFill>
-            <a:prstDash val="solid"/>
-          </a:ln>
-        </p:spPr>
-        <p:txBody>
-          <a:bodyPr/>
-          <a:lstStyle/>
-          <a:p>
-            <a:endParaRPr lang="en-AU"/>
-          </a:p>
-        </p:txBody>
-      </p:sp>
-      <p:sp>
-        <p:nvSpPr>
-          <p:cNvPr id="20" name="Text 18"/>
-          <p:cNvSpPr/>
-          <p:nvPr/>
-        </p:nvSpPr>
-        <p:spPr>
-          <a:xfrm>
-            <a:off x="2861889" y="3090639"/>
-            <a:ext cx="1645920" cy="365760"/>
-          </a:xfrm>
-          <a:prstGeom prst="rect">
-            <a:avLst/>
-          </a:prstGeom>
-          <a:noFill/>
-          <a:ln/>
-        </p:spPr>
-        <p:txBody>
-          <a:bodyPr wrap="square" rtlCol="0" anchor="ctr"/>
-          <a:lstStyle/>
-          <a:p>
-            <a:pPr marL="0" indent="0" algn="ctr">
-              <a:buNone/>
-            </a:pPr>
-            <a:r>
-              <a:rPr lang="en-US" sz="1400" b="1" dirty="0">
-                <a:solidFill>
-                  <a:srgbClr val="212121"/>
-                </a:solidFill>
-              </a:rPr>
-              <a:t>DECISION</a:t>
-            </a:r>
-            <a:endParaRPr lang="en-US" sz="1400" dirty="0"/>
-          </a:p>
-          <a:p>
-            <a:pPr marL="0" indent="0" algn="ctr">
-              <a:buNone/>
-            </a:pPr>
-            <a:r>
-              <a:rPr lang="en-US" sz="1400" b="1" dirty="0">
-                <a:solidFill>
-                  <a:srgbClr val="212121"/>
-                </a:solidFill>
-              </a:rPr>
-              <a:t>Logic</a:t>
-            </a:r>
-            <a:endParaRPr lang="en-US" sz="1400" dirty="0"/>
-          </a:p>
-        </p:txBody>
-      </p:sp>
-      <p:sp>
-        <p:nvSpPr>
-          <p:cNvPr id="21" name="Shape 19"/>
-          <p:cNvSpPr/>
-          <p:nvPr/>
-        </p:nvSpPr>
-        <p:spPr>
-          <a:xfrm>
-            <a:off x="3681822" y="3547839"/>
-            <a:ext cx="0" cy="365760"/>
-          </a:xfrm>
-          <a:prstGeom prst="line">
-            <a:avLst/>
-          </a:prstGeom>
-          <a:noFill/>
-          <a:ln w="25400">
-            <a:solidFill>
-              <a:srgbClr val="1976D2"/>
-            </a:solidFill>
-            <a:prstDash val="solid"/>
-            <a:tailEnd type="triangle"/>
-          </a:ln>
-        </p:spPr>
-        <p:txBody>
-          <a:bodyPr/>
-          <a:lstStyle/>
-          <a:p>
-            <a:endParaRPr lang="en-AU" dirty="0"/>
-          </a:p>
-        </p:txBody>
-      </p:sp>
-      <p:sp>
-        <p:nvSpPr>
-          <p:cNvPr id="22" name="Shape 20"/>
-          <p:cNvSpPr/>
-          <p:nvPr/>
-        </p:nvSpPr>
-        <p:spPr>
-          <a:xfrm>
-            <a:off x="2770450" y="3913599"/>
-            <a:ext cx="1828800" cy="931506"/>
-          </a:xfrm>
-          <a:prstGeom prst="rect">
-            <a:avLst/>
-          </a:prstGeom>
-          <a:solidFill>
-            <a:schemeClr val="accent2">
-              <a:lumMod val="60000"/>
-              <a:lumOff val="40000"/>
-            </a:schemeClr>
-          </a:solidFill>
-          <a:ln w="38100">
-            <a:solidFill>
-              <a:srgbClr val="FF0000"/>
-            </a:solidFill>
-            <a:prstDash val="solid"/>
-          </a:ln>
-        </p:spPr>
-        <p:txBody>
-          <a:bodyPr/>
-          <a:lstStyle/>
-          <a:p>
-            <a:endParaRPr lang="en-AU"/>
-          </a:p>
-        </p:txBody>
-      </p:sp>
-      <p:sp>
-        <p:nvSpPr>
-          <p:cNvPr id="23" name="Text 21"/>
-          <p:cNvSpPr/>
-          <p:nvPr/>
-        </p:nvSpPr>
-        <p:spPr>
-          <a:xfrm>
-            <a:off x="2816170" y="3849410"/>
-            <a:ext cx="1645920" cy="1005840"/>
-          </a:xfrm>
-          <a:prstGeom prst="rect">
-            <a:avLst/>
-          </a:prstGeom>
-          <a:noFill/>
-          <a:ln/>
-        </p:spPr>
-        <p:txBody>
-          <a:bodyPr wrap="square" rtlCol="0" anchor="ctr"/>
-          <a:lstStyle/>
-          <a:p>
-            <a:pPr marL="0" indent="0" algn="ctr">
-              <a:buNone/>
-            </a:pPr>
-            <a:r>
-              <a:rPr lang="en-US" sz="1200" b="1" dirty="0">
-                <a:solidFill>
-                  <a:srgbClr val="1976D2"/>
-                </a:solidFill>
-              </a:rPr>
-              <a:t>🚨</a:t>
-            </a:r>
-            <a:r>
-              <a:rPr lang="en-US" sz="1200" b="1" dirty="0"/>
-              <a:t> ALERT</a:t>
-            </a:r>
-            <a:endParaRPr lang="en-US" sz="1200" dirty="0"/>
-          </a:p>
-          <a:p>
-            <a:pPr marL="171450" indent="-171450" algn="ctr">
-              <a:buFont typeface="Wingdings" panose="05000000000000000000" pitchFamily="2" charset="2"/>
-              <a:buChar char="ü"/>
-            </a:pPr>
-            <a:r>
-              <a:rPr lang="en-US" sz="1200" b="1" dirty="0"/>
-              <a:t> Timestamp</a:t>
-            </a:r>
-            <a:endParaRPr lang="en-US" sz="1200" dirty="0"/>
-          </a:p>
-          <a:p>
-            <a:pPr marL="171450" indent="-171450" algn="ctr">
-              <a:buFont typeface="Wingdings" panose="05000000000000000000" pitchFamily="2" charset="2"/>
-              <a:buChar char="ü"/>
-            </a:pPr>
-            <a:r>
-              <a:rPr lang="en-US" sz="1200" b="1" dirty="0"/>
-              <a:t> Location</a:t>
-            </a:r>
-            <a:endParaRPr lang="en-US" sz="1200" dirty="0"/>
-          </a:p>
-          <a:p>
-            <a:pPr marL="171450" indent="-171450" algn="ctr">
-              <a:buFont typeface="Wingdings" panose="05000000000000000000" pitchFamily="2" charset="2"/>
-              <a:buChar char="ü"/>
-            </a:pPr>
-            <a:r>
-              <a:rPr lang="en-US" sz="1200" b="1" dirty="0"/>
-              <a:t> Severity</a:t>
-            </a:r>
-            <a:endParaRPr lang="en-US" sz="1200" dirty="0"/>
-          </a:p>
-        </p:txBody>
-      </p:sp>
-      <p:sp>
-        <p:nvSpPr>
-          <p:cNvPr id="24" name="Shape 22"/>
-          <p:cNvSpPr/>
-          <p:nvPr/>
-        </p:nvSpPr>
-        <p:spPr>
-          <a:xfrm>
-            <a:off x="4612876" y="4403191"/>
-            <a:ext cx="1175699" cy="0"/>
-          </a:xfrm>
-          <a:prstGeom prst="line">
-            <a:avLst/>
-          </a:prstGeom>
-          <a:noFill/>
-          <a:ln w="25400">
-            <a:solidFill>
-              <a:srgbClr val="1976D2"/>
-            </a:solidFill>
-            <a:prstDash val="solid"/>
-            <a:tailEnd type="triangle"/>
-          </a:ln>
-        </p:spPr>
-        <p:txBody>
-          <a:bodyPr/>
-          <a:lstStyle/>
-          <a:p>
-            <a:endParaRPr lang="en-AU"/>
-          </a:p>
-        </p:txBody>
-      </p:sp>
-      <p:sp>
-        <p:nvSpPr>
-          <p:cNvPr id="25" name="Shape 23"/>
-          <p:cNvSpPr/>
-          <p:nvPr/>
-        </p:nvSpPr>
-        <p:spPr>
-          <a:xfrm>
-            <a:off x="5774950" y="4102078"/>
-            <a:ext cx="2468880" cy="548640"/>
-          </a:xfrm>
-          <a:prstGeom prst="rect">
-            <a:avLst/>
-          </a:prstGeom>
-          <a:solidFill>
-            <a:srgbClr val="E3F2FD"/>
-          </a:solidFill>
-          <a:ln w="25400">
-            <a:solidFill>
-              <a:srgbClr val="1976D2"/>
-            </a:solidFill>
-            <a:prstDash val="solid"/>
-          </a:ln>
-        </p:spPr>
-        <p:txBody>
-          <a:bodyPr/>
-          <a:lstStyle/>
-          <a:p>
-            <a:endParaRPr lang="en-AU"/>
-          </a:p>
-        </p:txBody>
-      </p:sp>
-      <p:sp>
-        <p:nvSpPr>
-          <p:cNvPr id="26" name="Text 24"/>
-          <p:cNvSpPr/>
-          <p:nvPr/>
-        </p:nvSpPr>
-        <p:spPr>
-          <a:xfrm>
-            <a:off x="5866390" y="4174890"/>
-            <a:ext cx="2286000" cy="365760"/>
-          </a:xfrm>
-          <a:prstGeom prst="rect">
-            <a:avLst/>
-          </a:prstGeom>
-          <a:noFill/>
-          <a:ln/>
-        </p:spPr>
-        <p:txBody>
-          <a:bodyPr wrap="square" rtlCol="0" anchor="ctr"/>
-          <a:lstStyle/>
-          <a:p>
-            <a:pPr marL="0" indent="0" algn="ctr">
-              <a:buNone/>
-            </a:pPr>
-            <a:r>
-              <a:rPr lang="en-US" sz="1400" b="1" dirty="0">
-                <a:solidFill>
-                  <a:srgbClr val="212121"/>
-                </a:solidFill>
-              </a:rPr>
-              <a:t>Property manager</a:t>
-            </a:r>
-            <a:endParaRPr lang="en-US" sz="1400" dirty="0"/>
-          </a:p>
-          <a:p>
-            <a:pPr marL="0" indent="0" algn="ctr">
-              <a:buNone/>
-            </a:pPr>
-            <a:r>
-              <a:rPr lang="en-US" sz="1400" b="1" dirty="0">
-                <a:solidFill>
-                  <a:srgbClr val="212121"/>
-                </a:solidFill>
-              </a:rPr>
-              <a:t>Receives Report</a:t>
-            </a:r>
-            <a:endParaRPr lang="en-US" sz="1400" dirty="0"/>
-          </a:p>
-        </p:txBody>
-      </p:sp>
-      <p:cxnSp>
-        <p:nvCxnSpPr>
-          <p:cNvPr id="28" name="Connector: Elbow 27">
-            <a:extLst>
-              <a:ext uri="{FF2B5EF4-FFF2-40B4-BE49-F238E27FC236}">
-                <a16:creationId xmlns:a16="http://schemas.microsoft.com/office/drawing/2014/main" id="{B4A9E6FA-B111-323A-7B67-63FFCEBF04FE}"/>
-              </a:ext>
-            </a:extLst>
-          </p:cNvPr>
-          <p:cNvCxnSpPr>
-            <a:cxnSpLocks/>
-            <a:stCxn id="10" idx="3"/>
-            <a:endCxn id="4" idx="1"/>
-          </p:cNvCxnSpPr>
-          <p:nvPr/>
-        </p:nvCxnSpPr>
-        <p:spPr>
-          <a:xfrm flipH="1">
-            <a:off x="965570" y="1351912"/>
-            <a:ext cx="6638180" cy="15821"/>
-          </a:xfrm>
-          <a:prstGeom prst="bentConnector5">
-            <a:avLst>
-              <a:gd name="adj1" fmla="val -3444"/>
-              <a:gd name="adj2" fmla="val -2615675"/>
-              <a:gd name="adj3" fmla="val 103444"/>
-            </a:avLst>
-          </a:prstGeom>
-          <a:ln>
-            <a:tailEnd type="triangle"/>
-          </a:ln>
-        </p:spPr>
-        <p:style>
-          <a:lnRef idx="3">
-            <a:schemeClr val="accent1"/>
-          </a:lnRef>
-          <a:fillRef idx="0">
-            <a:schemeClr val="accent1"/>
-          </a:fillRef>
-          <a:effectRef idx="2">
-            <a:schemeClr val="accent1"/>
-          </a:effectRef>
-          <a:fontRef idx="minor">
-            <a:schemeClr val="tx1"/>
-          </a:fontRef>
-        </p:style>
-      </p:cxnSp>
+              <a:t>5. Property manager receives report and takes action</a:t>
+            </a:r>
+            <a:endParaRPr lang="en-US" sz="1300" dirty="0"/>
+          </a:p>
+        </p:txBody>
+      </p:sp>
     </p:spTree>
   </p:cSld>
   <p:clrMapOvr>
